--- a/tasks/bird_spatiotemporal_patterns/figures/fig_sp07_year_stacked_barline_top10.pptx
+++ b/tasks/bird_spatiotemporal_patterns/figures/fig_sp07_year_stacked_barline_top10.pptx
@@ -1,23 +1,20 @@
 
 <file path=ppt/presentation.xml><?xml version="1.0" encoding="utf-8"?>
-<p:presentation xmlns:a="http://schemas.openxmlformats.org/drawingml/2006/main" xmlns:r="http://schemas.openxmlformats.org/officeDocument/2006/relationships" xmlns:p="http://schemas.openxmlformats.org/presentationml/2006/main" saveSubsetFonts="1">
+<p:presentation xmlns:a="http://schemas.openxmlformats.org/drawingml/2006/main" xmlns:r="http://schemas.openxmlformats.org/officeDocument/2006/relationships" xmlns:p="http://schemas.openxmlformats.org/presentationml/2006/main" saveSubsetFonts="1" autoCompressPictures="0">
   <p:sldMasterIdLst>
     <p:sldMasterId id="2147483648" r:id="rId1"/>
   </p:sldMasterIdLst>
   <p:sldIdLst>
-    <p:sldId id="256" r:id="rId8"/>
+    <p:sldId id="256" r:id="rId6"/>
   </p:sldIdLst>
-  <p:sldSz cx="9144000" cy="6858000" type="screen4x3"/>
+  <p:sldSz cx="15087600" cy="10698163"/>
   <p:notesSz cx="6858000" cy="9144000"/>
-  <p:custDataLst>
-    <p:tags r:id="rId3"/>
-  </p:custDataLst>
   <p:defaultTextStyle>
     <a:defPPr>
       <a:defRPr lang="en-US"/>
     </a:defPPr>
-    <a:lvl1pPr marL="0" algn="l" defTabSz="914400" rtl="0" eaLnBrk="1" latinLnBrk="0" hangingPunct="1">
-      <a:defRPr sz="1800" kern="1200">
+    <a:lvl1pPr marL="0" algn="l" defTabSz="1052474" rtl="0" eaLnBrk="1" latinLnBrk="0" hangingPunct="1">
+      <a:defRPr sz="2100" kern="1200">
         <a:solidFill>
           <a:schemeClr val="tx1"/>
         </a:solidFill>
@@ -26,8 +23,8 @@
         <a:cs typeface="+mn-cs"/>
       </a:defRPr>
     </a:lvl1pPr>
-    <a:lvl2pPr marL="457200" algn="l" defTabSz="914400" rtl="0" eaLnBrk="1" latinLnBrk="0" hangingPunct="1">
-      <a:defRPr sz="1800" kern="1200">
+    <a:lvl2pPr marL="526237" algn="l" defTabSz="1052474" rtl="0" eaLnBrk="1" latinLnBrk="0" hangingPunct="1">
+      <a:defRPr sz="2100" kern="1200">
         <a:solidFill>
           <a:schemeClr val="tx1"/>
         </a:solidFill>
@@ -36,8 +33,8 @@
         <a:cs typeface="+mn-cs"/>
       </a:defRPr>
     </a:lvl2pPr>
-    <a:lvl3pPr marL="914400" algn="l" defTabSz="914400" rtl="0" eaLnBrk="1" latinLnBrk="0" hangingPunct="1">
-      <a:defRPr sz="1800" kern="1200">
+    <a:lvl3pPr marL="1052474" algn="l" defTabSz="1052474" rtl="0" eaLnBrk="1" latinLnBrk="0" hangingPunct="1">
+      <a:defRPr sz="2100" kern="1200">
         <a:solidFill>
           <a:schemeClr val="tx1"/>
         </a:solidFill>
@@ -46,8 +43,8 @@
         <a:cs typeface="+mn-cs"/>
       </a:defRPr>
     </a:lvl3pPr>
-    <a:lvl4pPr marL="1371600" algn="l" defTabSz="914400" rtl="0" eaLnBrk="1" latinLnBrk="0" hangingPunct="1">
-      <a:defRPr sz="1800" kern="1200">
+    <a:lvl4pPr marL="1578712" algn="l" defTabSz="1052474" rtl="0" eaLnBrk="1" latinLnBrk="0" hangingPunct="1">
+      <a:defRPr sz="2100" kern="1200">
         <a:solidFill>
           <a:schemeClr val="tx1"/>
         </a:solidFill>
@@ -56,8 +53,8 @@
         <a:cs typeface="+mn-cs"/>
       </a:defRPr>
     </a:lvl4pPr>
-    <a:lvl5pPr marL="1828800" algn="l" defTabSz="914400" rtl="0" eaLnBrk="1" latinLnBrk="0" hangingPunct="1">
-      <a:defRPr sz="1800" kern="1200">
+    <a:lvl5pPr marL="2104949" algn="l" defTabSz="1052474" rtl="0" eaLnBrk="1" latinLnBrk="0" hangingPunct="1">
+      <a:defRPr sz="2100" kern="1200">
         <a:solidFill>
           <a:schemeClr val="tx1"/>
         </a:solidFill>
@@ -66,8 +63,8 @@
         <a:cs typeface="+mn-cs"/>
       </a:defRPr>
     </a:lvl5pPr>
-    <a:lvl6pPr marL="2286000" algn="l" defTabSz="914400" rtl="0" eaLnBrk="1" latinLnBrk="0" hangingPunct="1">
-      <a:defRPr sz="1800" kern="1200">
+    <a:lvl6pPr marL="2631186" algn="l" defTabSz="1052474" rtl="0" eaLnBrk="1" latinLnBrk="0" hangingPunct="1">
+      <a:defRPr sz="2100" kern="1200">
         <a:solidFill>
           <a:schemeClr val="tx1"/>
         </a:solidFill>
@@ -76,8 +73,8 @@
         <a:cs typeface="+mn-cs"/>
       </a:defRPr>
     </a:lvl6pPr>
-    <a:lvl7pPr marL="2743200" algn="l" defTabSz="914400" rtl="0" eaLnBrk="1" latinLnBrk="0" hangingPunct="1">
-      <a:defRPr sz="1800" kern="1200">
+    <a:lvl7pPr marL="3157423" algn="l" defTabSz="1052474" rtl="0" eaLnBrk="1" latinLnBrk="0" hangingPunct="1">
+      <a:defRPr sz="2100" kern="1200">
         <a:solidFill>
           <a:schemeClr val="tx1"/>
         </a:solidFill>
@@ -86,8 +83,8 @@
         <a:cs typeface="+mn-cs"/>
       </a:defRPr>
     </a:lvl7pPr>
-    <a:lvl8pPr marL="3200400" algn="l" defTabSz="914400" rtl="0" eaLnBrk="1" latinLnBrk="0" hangingPunct="1">
-      <a:defRPr sz="1800" kern="1200">
+    <a:lvl8pPr marL="3683660" algn="l" defTabSz="1052474" rtl="0" eaLnBrk="1" latinLnBrk="0" hangingPunct="1">
+      <a:defRPr sz="2100" kern="1200">
         <a:solidFill>
           <a:schemeClr val="tx1"/>
         </a:solidFill>
@@ -96,8 +93,8 @@
         <a:cs typeface="+mn-cs"/>
       </a:defRPr>
     </a:lvl8pPr>
-    <a:lvl9pPr marL="3657600" algn="l" defTabSz="914400" rtl="0" eaLnBrk="1" latinLnBrk="0" hangingPunct="1">
-      <a:defRPr sz="1800" kern="1200">
+    <a:lvl9pPr marL="4209898" algn="l" defTabSz="1052474" rtl="0" eaLnBrk="1" latinLnBrk="0" hangingPunct="1">
+      <a:defRPr sz="2100" kern="1200">
         <a:solidFill>
           <a:schemeClr val="tx1"/>
         </a:solidFill>
@@ -139,8 +136,8 @@
         </p:nvSpPr>
         <p:spPr>
           <a:xfrm>
-            <a:off x="685800" y="2130425"/>
-            <a:ext cx="7772400" cy="1470025"/>
+            <a:off x="1131570" y="3323370"/>
+            <a:ext cx="12824460" cy="2293171"/>
           </a:xfrm>
         </p:spPr>
         <p:txBody>
@@ -167,8 +164,8 @@
         </p:nvSpPr>
         <p:spPr>
           <a:xfrm>
-            <a:off x="1371600" y="3886200"/>
-            <a:ext cx="6400800" cy="1752600"/>
+            <a:off x="2263140" y="6062292"/>
+            <a:ext cx="10561320" cy="2733975"/>
           </a:xfrm>
         </p:spPr>
         <p:txBody>
@@ -184,7 +181,7 @@
                 </a:solidFill>
               </a:defRPr>
             </a:lvl1pPr>
-            <a:lvl2pPr marL="457200" indent="0" algn="ctr">
+            <a:lvl2pPr marL="526237" indent="0" algn="ctr">
               <a:buNone/>
               <a:defRPr>
                 <a:solidFill>
@@ -194,7 +191,7 @@
                 </a:solidFill>
               </a:defRPr>
             </a:lvl2pPr>
-            <a:lvl3pPr marL="914400" indent="0" algn="ctr">
+            <a:lvl3pPr marL="1052474" indent="0" algn="ctr">
               <a:buNone/>
               <a:defRPr>
                 <a:solidFill>
@@ -204,7 +201,7 @@
                 </a:solidFill>
               </a:defRPr>
             </a:lvl3pPr>
-            <a:lvl4pPr marL="1371600" indent="0" algn="ctr">
+            <a:lvl4pPr marL="1578712" indent="0" algn="ctr">
               <a:buNone/>
               <a:defRPr>
                 <a:solidFill>
@@ -214,7 +211,7 @@
                 </a:solidFill>
               </a:defRPr>
             </a:lvl4pPr>
-            <a:lvl5pPr marL="1828800" indent="0" algn="ctr">
+            <a:lvl5pPr marL="2104949" indent="0" algn="ctr">
               <a:buNone/>
               <a:defRPr>
                 <a:solidFill>
@@ -224,7 +221,7 @@
                 </a:solidFill>
               </a:defRPr>
             </a:lvl5pPr>
-            <a:lvl6pPr marL="2286000" indent="0" algn="ctr">
+            <a:lvl6pPr marL="2631186" indent="0" algn="ctr">
               <a:buNone/>
               <a:defRPr>
                 <a:solidFill>
@@ -234,7 +231,7 @@
                 </a:solidFill>
               </a:defRPr>
             </a:lvl6pPr>
-            <a:lvl7pPr marL="2743200" indent="0" algn="ctr">
+            <a:lvl7pPr marL="3157423" indent="0" algn="ctr">
               <a:buNone/>
               <a:defRPr>
                 <a:solidFill>
@@ -244,7 +241,7 @@
                 </a:solidFill>
               </a:defRPr>
             </a:lvl7pPr>
-            <a:lvl8pPr marL="3200400" indent="0" algn="ctr">
+            <a:lvl8pPr marL="3683660" indent="0" algn="ctr">
               <a:buNone/>
               <a:defRPr>
                 <a:solidFill>
@@ -254,7 +251,7 @@
                 </a:solidFill>
               </a:defRPr>
             </a:lvl8pPr>
-            <a:lvl9pPr marL="3657600" indent="0" algn="ctr">
+            <a:lvl9pPr marL="4209898" indent="0" algn="ctr">
               <a:buNone/>
               <a:defRPr>
                 <a:solidFill>
@@ -289,9 +286,9 @@
           <a:bodyPr/>
           <a:lstStyle/>
           <a:p>
-            <a:fld id="{E6744CE3-0875-4B69-89C0-6F72D8139561}" type="datetimeFigureOut">
+            <a:fld id="{6BA5D40C-A8DC-479A-A5D3-E7B4936A184B}" type="datetimeFigureOut">
               <a:rPr lang="en-GB" smtClean="0"/>
-              <a:t>26/05/17</a:t>
+              <a:t>15/07/2015</a:t>
             </a:fld>
             <a:endParaRPr lang="en-GB"/>
           </a:p>
@@ -331,7 +328,7 @@
           <a:bodyPr/>
           <a:lstStyle/>
           <a:p>
-            <a:fld id="{8DADB20D-508E-4C6D-A9E4-257D5607B0F6}" type="slidenum">
+            <a:fld id="{52235FAC-C7EA-4164-B888-497B3F49A53C}" type="slidenum">
               <a:rPr lang="en-GB" smtClean="0"/>
               <a:t>‹#›</a:t>
             </a:fld>
@@ -342,7 +339,357 @@
     </p:spTree>
     <p:extLst>
       <p:ext uri="{BB962C8B-B14F-4D97-AF65-F5344CB8AC3E}">
-        <p14:creationId xmlns:p14="http://schemas.microsoft.com/office/powerpoint/2010/main" val="4214881138"/>
+        <p14:creationId xmlns:p14="http://schemas.microsoft.com/office/powerpoint/2010/main" val="329626357"/>
+      </p:ext>
+    </p:extLst>
+  </p:cSld>
+  <p:clrMapOvr>
+    <a:masterClrMapping/>
+  </p:clrMapOvr>
+</p:sldLayout>
+</file>
+
+<file path=ppt/slideLayouts/slideLayout10.xml><?xml version="1.0" encoding="utf-8"?>
+<p:sldLayout xmlns:a="http://schemas.openxmlformats.org/drawingml/2006/main" xmlns:r="http://schemas.openxmlformats.org/officeDocument/2006/relationships" xmlns:p="http://schemas.openxmlformats.org/presentationml/2006/main" type="vertTx" preserve="1">
+  <p:cSld name="Title and Vertical Text">
+    <p:spTree>
+      <p:nvGrpSpPr>
+        <p:cNvPr id="1" name=""/>
+        <p:cNvGrpSpPr/>
+        <p:nvPr/>
+      </p:nvGrpSpPr>
+      <p:grpSpPr>
+        <a:xfrm>
+          <a:off x="0" y="0"/>
+          <a:ext cx="0" cy="0"/>
+          <a:chOff x="0" y="0"/>
+          <a:chExt cx="0" cy="0"/>
+        </a:xfrm>
+      </p:grpSpPr>
+      <p:sp>
+        <p:nvSpPr>
+          <p:cNvPr id="2" name="Title 1"/>
+          <p:cNvSpPr>
+            <a:spLocks noGrp="1"/>
+          </p:cNvSpPr>
+          <p:nvPr>
+            <p:ph type="title"/>
+          </p:nvPr>
+        </p:nvSpPr>
+        <p:spPr/>
+        <p:txBody>
+          <a:bodyPr/>
+          <a:lstStyle/>
+          <a:p>
+            <a:r>
+              <a:rPr lang="en-US" smtClean="0"/>
+              <a:t>Click to edit Master title style</a:t>
+            </a:r>
+            <a:endParaRPr lang="en-GB"/>
+          </a:p>
+        </p:txBody>
+      </p:sp>
+      <p:sp>
+        <p:nvSpPr>
+          <p:cNvPr id="3" name="Vertical Text Placeholder 2"/>
+          <p:cNvSpPr>
+            <a:spLocks noGrp="1"/>
+          </p:cNvSpPr>
+          <p:nvPr>
+            <p:ph type="body" orient="vert" idx="1"/>
+          </p:nvPr>
+        </p:nvSpPr>
+        <p:spPr/>
+        <p:txBody>
+          <a:bodyPr vert="eaVert"/>
+          <a:lstStyle/>
+          <a:p>
+            <a:pPr lvl="0"/>
+            <a:r>
+              <a:rPr lang="en-US" smtClean="0"/>
+              <a:t>Click to edit Master text styles</a:t>
+            </a:r>
+          </a:p>
+          <a:p>
+            <a:pPr lvl="1"/>
+            <a:r>
+              <a:rPr lang="en-US" smtClean="0"/>
+              <a:t>Second level</a:t>
+            </a:r>
+          </a:p>
+          <a:p>
+            <a:pPr lvl="2"/>
+            <a:r>
+              <a:rPr lang="en-US" smtClean="0"/>
+              <a:t>Third level</a:t>
+            </a:r>
+          </a:p>
+          <a:p>
+            <a:pPr lvl="3"/>
+            <a:r>
+              <a:rPr lang="en-US" smtClean="0"/>
+              <a:t>Fourth level</a:t>
+            </a:r>
+          </a:p>
+          <a:p>
+            <a:pPr lvl="4"/>
+            <a:r>
+              <a:rPr lang="en-US" smtClean="0"/>
+              <a:t>Fifth level</a:t>
+            </a:r>
+            <a:endParaRPr lang="en-GB"/>
+          </a:p>
+        </p:txBody>
+      </p:sp>
+      <p:sp>
+        <p:nvSpPr>
+          <p:cNvPr id="4" name="Date Placeholder 3"/>
+          <p:cNvSpPr>
+            <a:spLocks noGrp="1"/>
+          </p:cNvSpPr>
+          <p:nvPr>
+            <p:ph type="dt" sz="half" idx="10"/>
+          </p:nvPr>
+        </p:nvSpPr>
+        <p:spPr/>
+        <p:txBody>
+          <a:bodyPr/>
+          <a:lstStyle/>
+          <a:p>
+            <a:fld id="{6BA5D40C-A8DC-479A-A5D3-E7B4936A184B}" type="datetimeFigureOut">
+              <a:rPr lang="en-GB" smtClean="0"/>
+              <a:t>15/07/2015</a:t>
+            </a:fld>
+            <a:endParaRPr lang="en-GB"/>
+          </a:p>
+        </p:txBody>
+      </p:sp>
+      <p:sp>
+        <p:nvSpPr>
+          <p:cNvPr id="5" name="Footer Placeholder 4"/>
+          <p:cNvSpPr>
+            <a:spLocks noGrp="1"/>
+          </p:cNvSpPr>
+          <p:nvPr>
+            <p:ph type="ftr" sz="quarter" idx="11"/>
+          </p:nvPr>
+        </p:nvSpPr>
+        <p:spPr/>
+        <p:txBody>
+          <a:bodyPr/>
+          <a:lstStyle/>
+          <a:p>
+            <a:endParaRPr lang="en-GB"/>
+          </a:p>
+        </p:txBody>
+      </p:sp>
+      <p:sp>
+        <p:nvSpPr>
+          <p:cNvPr id="6" name="Slide Number Placeholder 5"/>
+          <p:cNvSpPr>
+            <a:spLocks noGrp="1"/>
+          </p:cNvSpPr>
+          <p:nvPr>
+            <p:ph type="sldNum" sz="quarter" idx="12"/>
+          </p:nvPr>
+        </p:nvSpPr>
+        <p:spPr/>
+        <p:txBody>
+          <a:bodyPr/>
+          <a:lstStyle/>
+          <a:p>
+            <a:fld id="{52235FAC-C7EA-4164-B888-497B3F49A53C}" type="slidenum">
+              <a:rPr lang="en-GB" smtClean="0"/>
+              <a:t>‹#›</a:t>
+            </a:fld>
+            <a:endParaRPr lang="en-GB"/>
+          </a:p>
+        </p:txBody>
+      </p:sp>
+    </p:spTree>
+    <p:extLst>
+      <p:ext uri="{BB962C8B-B14F-4D97-AF65-F5344CB8AC3E}">
+        <p14:creationId xmlns:p14="http://schemas.microsoft.com/office/powerpoint/2010/main" val="2804603315"/>
+      </p:ext>
+    </p:extLst>
+  </p:cSld>
+  <p:clrMapOvr>
+    <a:masterClrMapping/>
+  </p:clrMapOvr>
+</p:sldLayout>
+</file>
+
+<file path=ppt/slideLayouts/slideLayout11.xml><?xml version="1.0" encoding="utf-8"?>
+<p:sldLayout xmlns:a="http://schemas.openxmlformats.org/drawingml/2006/main" xmlns:r="http://schemas.openxmlformats.org/officeDocument/2006/relationships" xmlns:p="http://schemas.openxmlformats.org/presentationml/2006/main" type="vertTitleAndTx" preserve="1">
+  <p:cSld name="Vertical Title and Text">
+    <p:spTree>
+      <p:nvGrpSpPr>
+        <p:cNvPr id="1" name=""/>
+        <p:cNvGrpSpPr/>
+        <p:nvPr/>
+      </p:nvGrpSpPr>
+      <p:grpSpPr>
+        <a:xfrm>
+          <a:off x="0" y="0"/>
+          <a:ext cx="0" cy="0"/>
+          <a:chOff x="0" y="0"/>
+          <a:chExt cx="0" cy="0"/>
+        </a:xfrm>
+      </p:grpSpPr>
+      <p:sp>
+        <p:nvSpPr>
+          <p:cNvPr id="2" name="Vertical Title 1"/>
+          <p:cNvSpPr>
+            <a:spLocks noGrp="1"/>
+          </p:cNvSpPr>
+          <p:nvPr>
+            <p:ph type="title" orient="vert"/>
+          </p:nvPr>
+        </p:nvSpPr>
+        <p:spPr>
+          <a:xfrm>
+            <a:off x="11850052" y="428427"/>
+            <a:ext cx="3677604" cy="9128109"/>
+          </a:xfrm>
+        </p:spPr>
+        <p:txBody>
+          <a:bodyPr vert="eaVert"/>
+          <a:lstStyle/>
+          <a:p>
+            <a:r>
+              <a:rPr lang="en-US" smtClean="0"/>
+              <a:t>Click to edit Master title style</a:t>
+            </a:r>
+            <a:endParaRPr lang="en-GB"/>
+          </a:p>
+        </p:txBody>
+      </p:sp>
+      <p:sp>
+        <p:nvSpPr>
+          <p:cNvPr id="3" name="Vertical Text Placeholder 2"/>
+          <p:cNvSpPr>
+            <a:spLocks noGrp="1"/>
+          </p:cNvSpPr>
+          <p:nvPr>
+            <p:ph type="body" orient="vert" idx="1"/>
+          </p:nvPr>
+        </p:nvSpPr>
+        <p:spPr>
+          <a:xfrm>
+            <a:off x="817249" y="428427"/>
+            <a:ext cx="10781349" cy="9128109"/>
+          </a:xfrm>
+        </p:spPr>
+        <p:txBody>
+          <a:bodyPr vert="eaVert"/>
+          <a:lstStyle/>
+          <a:p>
+            <a:pPr lvl="0"/>
+            <a:r>
+              <a:rPr lang="en-US" smtClean="0"/>
+              <a:t>Click to edit Master text styles</a:t>
+            </a:r>
+          </a:p>
+          <a:p>
+            <a:pPr lvl="1"/>
+            <a:r>
+              <a:rPr lang="en-US" smtClean="0"/>
+              <a:t>Second level</a:t>
+            </a:r>
+          </a:p>
+          <a:p>
+            <a:pPr lvl="2"/>
+            <a:r>
+              <a:rPr lang="en-US" smtClean="0"/>
+              <a:t>Third level</a:t>
+            </a:r>
+          </a:p>
+          <a:p>
+            <a:pPr lvl="3"/>
+            <a:r>
+              <a:rPr lang="en-US" smtClean="0"/>
+              <a:t>Fourth level</a:t>
+            </a:r>
+          </a:p>
+          <a:p>
+            <a:pPr lvl="4"/>
+            <a:r>
+              <a:rPr lang="en-US" smtClean="0"/>
+              <a:t>Fifth level</a:t>
+            </a:r>
+            <a:endParaRPr lang="en-GB"/>
+          </a:p>
+        </p:txBody>
+      </p:sp>
+      <p:sp>
+        <p:nvSpPr>
+          <p:cNvPr id="4" name="Date Placeholder 3"/>
+          <p:cNvSpPr>
+            <a:spLocks noGrp="1"/>
+          </p:cNvSpPr>
+          <p:nvPr>
+            <p:ph type="dt" sz="half" idx="10"/>
+          </p:nvPr>
+        </p:nvSpPr>
+        <p:spPr/>
+        <p:txBody>
+          <a:bodyPr/>
+          <a:lstStyle/>
+          <a:p>
+            <a:fld id="{6BA5D40C-A8DC-479A-A5D3-E7B4936A184B}" type="datetimeFigureOut">
+              <a:rPr lang="en-GB" smtClean="0"/>
+              <a:t>15/07/2015</a:t>
+            </a:fld>
+            <a:endParaRPr lang="en-GB"/>
+          </a:p>
+        </p:txBody>
+      </p:sp>
+      <p:sp>
+        <p:nvSpPr>
+          <p:cNvPr id="5" name="Footer Placeholder 4"/>
+          <p:cNvSpPr>
+            <a:spLocks noGrp="1"/>
+          </p:cNvSpPr>
+          <p:nvPr>
+            <p:ph type="ftr" sz="quarter" idx="11"/>
+          </p:nvPr>
+        </p:nvSpPr>
+        <p:spPr/>
+        <p:txBody>
+          <a:bodyPr/>
+          <a:lstStyle/>
+          <a:p>
+            <a:endParaRPr lang="en-GB"/>
+          </a:p>
+        </p:txBody>
+      </p:sp>
+      <p:sp>
+        <p:nvSpPr>
+          <p:cNvPr id="6" name="Slide Number Placeholder 5"/>
+          <p:cNvSpPr>
+            <a:spLocks noGrp="1"/>
+          </p:cNvSpPr>
+          <p:nvPr>
+            <p:ph type="sldNum" sz="quarter" idx="12"/>
+          </p:nvPr>
+        </p:nvSpPr>
+        <p:spPr/>
+        <p:txBody>
+          <a:bodyPr/>
+          <a:lstStyle/>
+          <a:p>
+            <a:fld id="{52235FAC-C7EA-4164-B888-497B3F49A53C}" type="slidenum">
+              <a:rPr lang="en-GB" smtClean="0"/>
+              <a:t>‹#›</a:t>
+            </a:fld>
+            <a:endParaRPr lang="en-GB"/>
+          </a:p>
+        </p:txBody>
+      </p:sp>
+    </p:spTree>
+    <p:extLst>
+      <p:ext uri="{BB962C8B-B14F-4D97-AF65-F5344CB8AC3E}">
+        <p14:creationId xmlns:p14="http://schemas.microsoft.com/office/powerpoint/2010/main" val="1715730913"/>
       </p:ext>
     </p:extLst>
   </p:cSld>
@@ -459,9 +806,9 @@
           <a:bodyPr/>
           <a:lstStyle/>
           <a:p>
-            <a:fld id="{E6744CE3-0875-4B69-89C0-6F72D8139561}" type="datetimeFigureOut">
+            <a:fld id="{6BA5D40C-A8DC-479A-A5D3-E7B4936A184B}" type="datetimeFigureOut">
               <a:rPr lang="en-GB" smtClean="0"/>
-              <a:t>26/05/17</a:t>
+              <a:t>15/07/2015</a:t>
             </a:fld>
             <a:endParaRPr lang="en-GB"/>
           </a:p>
@@ -501,7 +848,7 @@
           <a:bodyPr/>
           <a:lstStyle/>
           <a:p>
-            <a:fld id="{8DADB20D-508E-4C6D-A9E4-257D5607B0F6}" type="slidenum">
+            <a:fld id="{52235FAC-C7EA-4164-B888-497B3F49A53C}" type="slidenum">
               <a:rPr lang="en-GB" smtClean="0"/>
               <a:t>‹#›</a:t>
             </a:fld>
@@ -512,7 +859,7 @@
     </p:spTree>
     <p:extLst>
       <p:ext uri="{BB962C8B-B14F-4D97-AF65-F5344CB8AC3E}">
-        <p14:creationId xmlns:p14="http://schemas.microsoft.com/office/powerpoint/2010/main" val="271576982"/>
+        <p14:creationId xmlns:p14="http://schemas.microsoft.com/office/powerpoint/2010/main" val="1072499689"/>
       </p:ext>
     </p:extLst>
   </p:cSld>
@@ -551,15 +898,15 @@
         </p:nvSpPr>
         <p:spPr>
           <a:xfrm>
-            <a:off x="722313" y="4406900"/>
-            <a:ext cx="7772400" cy="1362075"/>
+            <a:off x="1191817" y="6874563"/>
+            <a:ext cx="12824460" cy="2124774"/>
           </a:xfrm>
         </p:spPr>
         <p:txBody>
           <a:bodyPr anchor="t"/>
           <a:lstStyle>
             <a:lvl1pPr algn="l">
-              <a:defRPr sz="4000" b="1" cap="all"/>
+              <a:defRPr sz="4600" b="1" cap="all"/>
             </a:lvl1pPr>
           </a:lstStyle>
           <a:p>
@@ -583,8 +930,8 @@
         </p:nvSpPr>
         <p:spPr>
           <a:xfrm>
-            <a:off x="722313" y="2906713"/>
-            <a:ext cx="7772400" cy="1500187"/>
+            <a:off x="1191817" y="4534341"/>
+            <a:ext cx="12824460" cy="2340223"/>
           </a:xfrm>
         </p:spPr>
         <p:txBody>
@@ -592,7 +939,7 @@
           <a:lstStyle>
             <a:lvl1pPr marL="0" indent="0">
               <a:buNone/>
-              <a:defRPr sz="2000">
+              <a:defRPr sz="2300">
                 <a:solidFill>
                   <a:schemeClr val="tx1">
                     <a:tint val="75000"/>
@@ -600,7 +947,17 @@
                 </a:solidFill>
               </a:defRPr>
             </a:lvl1pPr>
-            <a:lvl2pPr marL="457200" indent="0">
+            <a:lvl2pPr marL="526237" indent="0">
+              <a:buNone/>
+              <a:defRPr sz="2100">
+                <a:solidFill>
+                  <a:schemeClr val="tx1">
+                    <a:tint val="75000"/>
+                  </a:schemeClr>
+                </a:solidFill>
+              </a:defRPr>
+            </a:lvl2pPr>
+            <a:lvl3pPr marL="1052474" indent="0">
               <a:buNone/>
               <a:defRPr sz="1800">
                 <a:solidFill>
@@ -609,8 +966,8 @@
                   </a:schemeClr>
                 </a:solidFill>
               </a:defRPr>
-            </a:lvl2pPr>
-            <a:lvl3pPr marL="914400" indent="0">
+            </a:lvl3pPr>
+            <a:lvl4pPr marL="1578712" indent="0">
               <a:buNone/>
               <a:defRPr sz="1600">
                 <a:solidFill>
@@ -619,20 +976,10 @@
                   </a:schemeClr>
                 </a:solidFill>
               </a:defRPr>
-            </a:lvl3pPr>
-            <a:lvl4pPr marL="1371600" indent="0">
+            </a:lvl4pPr>
+            <a:lvl5pPr marL="2104949" indent="0">
               <a:buNone/>
-              <a:defRPr sz="1400">
-                <a:solidFill>
-                  <a:schemeClr val="tx1">
-                    <a:tint val="75000"/>
-                  </a:schemeClr>
-                </a:solidFill>
-              </a:defRPr>
-            </a:lvl4pPr>
-            <a:lvl5pPr marL="1828800" indent="0">
-              <a:buNone/>
-              <a:defRPr sz="1400">
+              <a:defRPr sz="1600">
                 <a:solidFill>
                   <a:schemeClr val="tx1">
                     <a:tint val="75000"/>
@@ -640,9 +987,9 @@
                 </a:solidFill>
               </a:defRPr>
             </a:lvl5pPr>
-            <a:lvl6pPr marL="2286000" indent="0">
+            <a:lvl6pPr marL="2631186" indent="0">
               <a:buNone/>
-              <a:defRPr sz="1400">
+              <a:defRPr sz="1600">
                 <a:solidFill>
                   <a:schemeClr val="tx1">
                     <a:tint val="75000"/>
@@ -650,9 +997,9 @@
                 </a:solidFill>
               </a:defRPr>
             </a:lvl6pPr>
-            <a:lvl7pPr marL="2743200" indent="0">
+            <a:lvl7pPr marL="3157423" indent="0">
               <a:buNone/>
-              <a:defRPr sz="1400">
+              <a:defRPr sz="1600">
                 <a:solidFill>
                   <a:schemeClr val="tx1">
                     <a:tint val="75000"/>
@@ -660,9 +1007,9 @@
                 </a:solidFill>
               </a:defRPr>
             </a:lvl7pPr>
-            <a:lvl8pPr marL="3200400" indent="0">
+            <a:lvl8pPr marL="3683660" indent="0">
               <a:buNone/>
-              <a:defRPr sz="1400">
+              <a:defRPr sz="1600">
                 <a:solidFill>
                   <a:schemeClr val="tx1">
                     <a:tint val="75000"/>
@@ -670,9 +1017,9 @@
                 </a:solidFill>
               </a:defRPr>
             </a:lvl8pPr>
-            <a:lvl9pPr marL="3657600" indent="0">
+            <a:lvl9pPr marL="4209898" indent="0">
               <a:buNone/>
-              <a:defRPr sz="1400">
+              <a:defRPr sz="1600">
                 <a:solidFill>
                   <a:schemeClr val="tx1">
                     <a:tint val="75000"/>
@@ -705,9 +1052,9 @@
           <a:bodyPr/>
           <a:lstStyle/>
           <a:p>
-            <a:fld id="{E6744CE3-0875-4B69-89C0-6F72D8139561}" type="datetimeFigureOut">
+            <a:fld id="{6BA5D40C-A8DC-479A-A5D3-E7B4936A184B}" type="datetimeFigureOut">
               <a:rPr lang="en-GB" smtClean="0"/>
-              <a:t>26/05/17</a:t>
+              <a:t>15/07/2015</a:t>
             </a:fld>
             <a:endParaRPr lang="en-GB"/>
           </a:p>
@@ -747,7 +1094,7 @@
           <a:bodyPr/>
           <a:lstStyle/>
           <a:p>
-            <a:fld id="{8DADB20D-508E-4C6D-A9E4-257D5607B0F6}" type="slidenum">
+            <a:fld id="{52235FAC-C7EA-4164-B888-497B3F49A53C}" type="slidenum">
               <a:rPr lang="en-GB" smtClean="0"/>
               <a:t>‹#›</a:t>
             </a:fld>
@@ -758,7 +1105,7 @@
     </p:spTree>
     <p:extLst>
       <p:ext uri="{BB962C8B-B14F-4D97-AF65-F5344CB8AC3E}">
-        <p14:creationId xmlns:p14="http://schemas.microsoft.com/office/powerpoint/2010/main" val="1431545585"/>
+        <p14:creationId xmlns:p14="http://schemas.microsoft.com/office/powerpoint/2010/main" val="2061327686"/>
       </p:ext>
     </p:extLst>
   </p:cSld>
@@ -820,8 +1167,370 @@
         </p:nvSpPr>
         <p:spPr>
           <a:xfrm>
-            <a:off x="457200" y="1600200"/>
-            <a:ext cx="4038600" cy="4525963"/>
+            <a:off x="817249" y="2496240"/>
+            <a:ext cx="7229475" cy="7060293"/>
+          </a:xfrm>
+        </p:spPr>
+        <p:txBody>
+          <a:bodyPr/>
+          <a:lstStyle>
+            <a:lvl1pPr>
+              <a:defRPr sz="3200"/>
+            </a:lvl1pPr>
+            <a:lvl2pPr>
+              <a:defRPr sz="2800"/>
+            </a:lvl2pPr>
+            <a:lvl3pPr>
+              <a:defRPr sz="2300"/>
+            </a:lvl3pPr>
+            <a:lvl4pPr>
+              <a:defRPr sz="2100"/>
+            </a:lvl4pPr>
+            <a:lvl5pPr>
+              <a:defRPr sz="2100"/>
+            </a:lvl5pPr>
+            <a:lvl6pPr>
+              <a:defRPr sz="2100"/>
+            </a:lvl6pPr>
+            <a:lvl7pPr>
+              <a:defRPr sz="2100"/>
+            </a:lvl7pPr>
+            <a:lvl8pPr>
+              <a:defRPr sz="2100"/>
+            </a:lvl8pPr>
+            <a:lvl9pPr>
+              <a:defRPr sz="2100"/>
+            </a:lvl9pPr>
+          </a:lstStyle>
+          <a:p>
+            <a:pPr lvl="0"/>
+            <a:r>
+              <a:rPr lang="en-US" smtClean="0"/>
+              <a:t>Click to edit Master text styles</a:t>
+            </a:r>
+          </a:p>
+          <a:p>
+            <a:pPr lvl="1"/>
+            <a:r>
+              <a:rPr lang="en-US" smtClean="0"/>
+              <a:t>Second level</a:t>
+            </a:r>
+          </a:p>
+          <a:p>
+            <a:pPr lvl="2"/>
+            <a:r>
+              <a:rPr lang="en-US" smtClean="0"/>
+              <a:t>Third level</a:t>
+            </a:r>
+          </a:p>
+          <a:p>
+            <a:pPr lvl="3"/>
+            <a:r>
+              <a:rPr lang="en-US" smtClean="0"/>
+              <a:t>Fourth level</a:t>
+            </a:r>
+          </a:p>
+          <a:p>
+            <a:pPr lvl="4"/>
+            <a:r>
+              <a:rPr lang="en-US" smtClean="0"/>
+              <a:t>Fifth level</a:t>
+            </a:r>
+            <a:endParaRPr lang="en-GB"/>
+          </a:p>
+        </p:txBody>
+      </p:sp>
+      <p:sp>
+        <p:nvSpPr>
+          <p:cNvPr id="4" name="Content Placeholder 3"/>
+          <p:cNvSpPr>
+            <a:spLocks noGrp="1"/>
+          </p:cNvSpPr>
+          <p:nvPr>
+            <p:ph sz="half" idx="2"/>
+          </p:nvPr>
+        </p:nvSpPr>
+        <p:spPr>
+          <a:xfrm>
+            <a:off x="8298184" y="2496240"/>
+            <a:ext cx="7229475" cy="7060293"/>
+          </a:xfrm>
+        </p:spPr>
+        <p:txBody>
+          <a:bodyPr/>
+          <a:lstStyle>
+            <a:lvl1pPr>
+              <a:defRPr sz="3200"/>
+            </a:lvl1pPr>
+            <a:lvl2pPr>
+              <a:defRPr sz="2800"/>
+            </a:lvl2pPr>
+            <a:lvl3pPr>
+              <a:defRPr sz="2300"/>
+            </a:lvl3pPr>
+            <a:lvl4pPr>
+              <a:defRPr sz="2100"/>
+            </a:lvl4pPr>
+            <a:lvl5pPr>
+              <a:defRPr sz="2100"/>
+            </a:lvl5pPr>
+            <a:lvl6pPr>
+              <a:defRPr sz="2100"/>
+            </a:lvl6pPr>
+            <a:lvl7pPr>
+              <a:defRPr sz="2100"/>
+            </a:lvl7pPr>
+            <a:lvl8pPr>
+              <a:defRPr sz="2100"/>
+            </a:lvl8pPr>
+            <a:lvl9pPr>
+              <a:defRPr sz="2100"/>
+            </a:lvl9pPr>
+          </a:lstStyle>
+          <a:p>
+            <a:pPr lvl="0"/>
+            <a:r>
+              <a:rPr lang="en-US" smtClean="0"/>
+              <a:t>Click to edit Master text styles</a:t>
+            </a:r>
+          </a:p>
+          <a:p>
+            <a:pPr lvl="1"/>
+            <a:r>
+              <a:rPr lang="en-US" smtClean="0"/>
+              <a:t>Second level</a:t>
+            </a:r>
+          </a:p>
+          <a:p>
+            <a:pPr lvl="2"/>
+            <a:r>
+              <a:rPr lang="en-US" smtClean="0"/>
+              <a:t>Third level</a:t>
+            </a:r>
+          </a:p>
+          <a:p>
+            <a:pPr lvl="3"/>
+            <a:r>
+              <a:rPr lang="en-US" smtClean="0"/>
+              <a:t>Fourth level</a:t>
+            </a:r>
+          </a:p>
+          <a:p>
+            <a:pPr lvl="4"/>
+            <a:r>
+              <a:rPr lang="en-US" smtClean="0"/>
+              <a:t>Fifth level</a:t>
+            </a:r>
+            <a:endParaRPr lang="en-GB"/>
+          </a:p>
+        </p:txBody>
+      </p:sp>
+      <p:sp>
+        <p:nvSpPr>
+          <p:cNvPr id="5" name="Date Placeholder 4"/>
+          <p:cNvSpPr>
+            <a:spLocks noGrp="1"/>
+          </p:cNvSpPr>
+          <p:nvPr>
+            <p:ph type="dt" sz="half" idx="10"/>
+          </p:nvPr>
+        </p:nvSpPr>
+        <p:spPr/>
+        <p:txBody>
+          <a:bodyPr/>
+          <a:lstStyle/>
+          <a:p>
+            <a:fld id="{6BA5D40C-A8DC-479A-A5D3-E7B4936A184B}" type="datetimeFigureOut">
+              <a:rPr lang="en-GB" smtClean="0"/>
+              <a:t>15/07/2015</a:t>
+            </a:fld>
+            <a:endParaRPr lang="en-GB"/>
+          </a:p>
+        </p:txBody>
+      </p:sp>
+      <p:sp>
+        <p:nvSpPr>
+          <p:cNvPr id="6" name="Footer Placeholder 5"/>
+          <p:cNvSpPr>
+            <a:spLocks noGrp="1"/>
+          </p:cNvSpPr>
+          <p:nvPr>
+            <p:ph type="ftr" sz="quarter" idx="11"/>
+          </p:nvPr>
+        </p:nvSpPr>
+        <p:spPr/>
+        <p:txBody>
+          <a:bodyPr/>
+          <a:lstStyle/>
+          <a:p>
+            <a:endParaRPr lang="en-GB"/>
+          </a:p>
+        </p:txBody>
+      </p:sp>
+      <p:sp>
+        <p:nvSpPr>
+          <p:cNvPr id="7" name="Slide Number Placeholder 6"/>
+          <p:cNvSpPr>
+            <a:spLocks noGrp="1"/>
+          </p:cNvSpPr>
+          <p:nvPr>
+            <p:ph type="sldNum" sz="quarter" idx="12"/>
+          </p:nvPr>
+        </p:nvSpPr>
+        <p:spPr/>
+        <p:txBody>
+          <a:bodyPr/>
+          <a:lstStyle/>
+          <a:p>
+            <a:fld id="{52235FAC-C7EA-4164-B888-497B3F49A53C}" type="slidenum">
+              <a:rPr lang="en-GB" smtClean="0"/>
+              <a:t>‹#›</a:t>
+            </a:fld>
+            <a:endParaRPr lang="en-GB"/>
+          </a:p>
+        </p:txBody>
+      </p:sp>
+    </p:spTree>
+    <p:extLst>
+      <p:ext uri="{BB962C8B-B14F-4D97-AF65-F5344CB8AC3E}">
+        <p14:creationId xmlns:p14="http://schemas.microsoft.com/office/powerpoint/2010/main" val="3083140367"/>
+      </p:ext>
+    </p:extLst>
+  </p:cSld>
+  <p:clrMapOvr>
+    <a:masterClrMapping/>
+  </p:clrMapOvr>
+</p:sldLayout>
+</file>
+
+<file path=ppt/slideLayouts/slideLayout5.xml><?xml version="1.0" encoding="utf-8"?>
+<p:sldLayout xmlns:a="http://schemas.openxmlformats.org/drawingml/2006/main" xmlns:r="http://schemas.openxmlformats.org/officeDocument/2006/relationships" xmlns:p="http://schemas.openxmlformats.org/presentationml/2006/main" type="twoTxTwoObj" preserve="1">
+  <p:cSld name="Comparison">
+    <p:spTree>
+      <p:nvGrpSpPr>
+        <p:cNvPr id="1" name=""/>
+        <p:cNvGrpSpPr/>
+        <p:nvPr/>
+      </p:nvGrpSpPr>
+      <p:grpSpPr>
+        <a:xfrm>
+          <a:off x="0" y="0"/>
+          <a:ext cx="0" cy="0"/>
+          <a:chOff x="0" y="0"/>
+          <a:chExt cx="0" cy="0"/>
+        </a:xfrm>
+      </p:grpSpPr>
+      <p:sp>
+        <p:nvSpPr>
+          <p:cNvPr id="2" name="Title 1"/>
+          <p:cNvSpPr>
+            <a:spLocks noGrp="1"/>
+          </p:cNvSpPr>
+          <p:nvPr>
+            <p:ph type="title"/>
+          </p:nvPr>
+        </p:nvSpPr>
+        <p:spPr>
+          <a:xfrm>
+            <a:off x="754380" y="428422"/>
+            <a:ext cx="13578840" cy="1783027"/>
+          </a:xfrm>
+        </p:spPr>
+        <p:txBody>
+          <a:bodyPr/>
+          <a:lstStyle>
+            <a:lvl1pPr>
+              <a:defRPr/>
+            </a:lvl1pPr>
+          </a:lstStyle>
+          <a:p>
+            <a:r>
+              <a:rPr lang="en-US" smtClean="0"/>
+              <a:t>Click to edit Master title style</a:t>
+            </a:r>
+            <a:endParaRPr lang="en-GB"/>
+          </a:p>
+        </p:txBody>
+      </p:sp>
+      <p:sp>
+        <p:nvSpPr>
+          <p:cNvPr id="3" name="Text Placeholder 2"/>
+          <p:cNvSpPr>
+            <a:spLocks noGrp="1"/>
+          </p:cNvSpPr>
+          <p:nvPr>
+            <p:ph type="body" idx="1"/>
+          </p:nvPr>
+        </p:nvSpPr>
+        <p:spPr>
+          <a:xfrm>
+            <a:off x="754384" y="2394706"/>
+            <a:ext cx="6666310" cy="997999"/>
+          </a:xfrm>
+        </p:spPr>
+        <p:txBody>
+          <a:bodyPr anchor="b"/>
+          <a:lstStyle>
+            <a:lvl1pPr marL="0" indent="0">
+              <a:buNone/>
+              <a:defRPr sz="2800" b="1"/>
+            </a:lvl1pPr>
+            <a:lvl2pPr marL="526237" indent="0">
+              <a:buNone/>
+              <a:defRPr sz="2300" b="1"/>
+            </a:lvl2pPr>
+            <a:lvl3pPr marL="1052474" indent="0">
+              <a:buNone/>
+              <a:defRPr sz="2100" b="1"/>
+            </a:lvl3pPr>
+            <a:lvl4pPr marL="1578712" indent="0">
+              <a:buNone/>
+              <a:defRPr sz="1800" b="1"/>
+            </a:lvl4pPr>
+            <a:lvl5pPr marL="2104949" indent="0">
+              <a:buNone/>
+              <a:defRPr sz="1800" b="1"/>
+            </a:lvl5pPr>
+            <a:lvl6pPr marL="2631186" indent="0">
+              <a:buNone/>
+              <a:defRPr sz="1800" b="1"/>
+            </a:lvl6pPr>
+            <a:lvl7pPr marL="3157423" indent="0">
+              <a:buNone/>
+              <a:defRPr sz="1800" b="1"/>
+            </a:lvl7pPr>
+            <a:lvl8pPr marL="3683660" indent="0">
+              <a:buNone/>
+              <a:defRPr sz="1800" b="1"/>
+            </a:lvl8pPr>
+            <a:lvl9pPr marL="4209898" indent="0">
+              <a:buNone/>
+              <a:defRPr sz="1800" b="1"/>
+            </a:lvl9pPr>
+          </a:lstStyle>
+          <a:p>
+            <a:pPr lvl="0"/>
+            <a:r>
+              <a:rPr lang="en-US" smtClean="0"/>
+              <a:t>Click to edit Master text styles</a:t>
+            </a:r>
+          </a:p>
+        </p:txBody>
+      </p:sp>
+      <p:sp>
+        <p:nvSpPr>
+          <p:cNvPr id="4" name="Content Placeholder 3"/>
+          <p:cNvSpPr>
+            <a:spLocks noGrp="1"/>
+          </p:cNvSpPr>
+          <p:nvPr>
+            <p:ph sz="half" idx="2"/>
+          </p:nvPr>
+        </p:nvSpPr>
+        <p:spPr>
+          <a:xfrm>
+            <a:off x="754384" y="3392705"/>
+            <a:ext cx="6666310" cy="6163826"/>
           </a:xfrm>
         </p:spPr>
         <p:txBody>
@@ -831,10 +1540,10 @@
               <a:defRPr sz="2800"/>
             </a:lvl1pPr>
             <a:lvl2pPr>
-              <a:defRPr sz="2400"/>
+              <a:defRPr sz="2300"/>
             </a:lvl2pPr>
             <a:lvl3pPr>
-              <a:defRPr sz="2000"/>
+              <a:defRPr sz="2100"/>
             </a:lvl3pPr>
             <a:lvl4pPr>
               <a:defRPr sz="1800"/>
@@ -895,18 +1604,83 @@
       </p:sp>
       <p:sp>
         <p:nvSpPr>
-          <p:cNvPr id="4" name="Content Placeholder 3"/>
+          <p:cNvPr id="5" name="Text Placeholder 4"/>
           <p:cNvSpPr>
             <a:spLocks noGrp="1"/>
           </p:cNvSpPr>
           <p:nvPr>
-            <p:ph sz="half" idx="2"/>
+            <p:ph type="body" sz="quarter" idx="3"/>
           </p:nvPr>
         </p:nvSpPr>
         <p:spPr>
           <a:xfrm>
-            <a:off x="4648200" y="1600200"/>
-            <a:ext cx="4038600" cy="4525963"/>
+            <a:off x="7664295" y="2394706"/>
+            <a:ext cx="6668930" cy="997999"/>
+          </a:xfrm>
+        </p:spPr>
+        <p:txBody>
+          <a:bodyPr anchor="b"/>
+          <a:lstStyle>
+            <a:lvl1pPr marL="0" indent="0">
+              <a:buNone/>
+              <a:defRPr sz="2800" b="1"/>
+            </a:lvl1pPr>
+            <a:lvl2pPr marL="526237" indent="0">
+              <a:buNone/>
+              <a:defRPr sz="2300" b="1"/>
+            </a:lvl2pPr>
+            <a:lvl3pPr marL="1052474" indent="0">
+              <a:buNone/>
+              <a:defRPr sz="2100" b="1"/>
+            </a:lvl3pPr>
+            <a:lvl4pPr marL="1578712" indent="0">
+              <a:buNone/>
+              <a:defRPr sz="1800" b="1"/>
+            </a:lvl4pPr>
+            <a:lvl5pPr marL="2104949" indent="0">
+              <a:buNone/>
+              <a:defRPr sz="1800" b="1"/>
+            </a:lvl5pPr>
+            <a:lvl6pPr marL="2631186" indent="0">
+              <a:buNone/>
+              <a:defRPr sz="1800" b="1"/>
+            </a:lvl6pPr>
+            <a:lvl7pPr marL="3157423" indent="0">
+              <a:buNone/>
+              <a:defRPr sz="1800" b="1"/>
+            </a:lvl7pPr>
+            <a:lvl8pPr marL="3683660" indent="0">
+              <a:buNone/>
+              <a:defRPr sz="1800" b="1"/>
+            </a:lvl8pPr>
+            <a:lvl9pPr marL="4209898" indent="0">
+              <a:buNone/>
+              <a:defRPr sz="1800" b="1"/>
+            </a:lvl9pPr>
+          </a:lstStyle>
+          <a:p>
+            <a:pPr lvl="0"/>
+            <a:r>
+              <a:rPr lang="en-US" smtClean="0"/>
+              <a:t>Click to edit Master text styles</a:t>
+            </a:r>
+          </a:p>
+        </p:txBody>
+      </p:sp>
+      <p:sp>
+        <p:nvSpPr>
+          <p:cNvPr id="6" name="Content Placeholder 5"/>
+          <p:cNvSpPr>
+            <a:spLocks noGrp="1"/>
+          </p:cNvSpPr>
+          <p:nvPr>
+            <p:ph sz="quarter" idx="4"/>
+          </p:nvPr>
+        </p:nvSpPr>
+        <p:spPr>
+          <a:xfrm>
+            <a:off x="7664295" y="3392705"/>
+            <a:ext cx="6668930" cy="6163826"/>
           </a:xfrm>
         </p:spPr>
         <p:txBody>
@@ -916,10 +1690,10 @@
               <a:defRPr sz="2800"/>
             </a:lvl1pPr>
             <a:lvl2pPr>
-              <a:defRPr sz="2400"/>
+              <a:defRPr sz="2300"/>
             </a:lvl2pPr>
             <a:lvl3pPr>
-              <a:defRPr sz="2000"/>
+              <a:defRPr sz="2100"/>
             </a:lvl3pPr>
             <a:lvl4pPr>
               <a:defRPr sz="1800"/>
@@ -980,428 +1754,6 @@
       </p:sp>
       <p:sp>
         <p:nvSpPr>
-          <p:cNvPr id="5" name="Date Placeholder 4"/>
-          <p:cNvSpPr>
-            <a:spLocks noGrp="1"/>
-          </p:cNvSpPr>
-          <p:nvPr>
-            <p:ph type="dt" sz="half" idx="10"/>
-          </p:nvPr>
-        </p:nvSpPr>
-        <p:spPr/>
-        <p:txBody>
-          <a:bodyPr/>
-          <a:lstStyle/>
-          <a:p>
-            <a:fld id="{E6744CE3-0875-4B69-89C0-6F72D8139561}" type="datetimeFigureOut">
-              <a:rPr lang="en-GB" smtClean="0"/>
-              <a:t>26/05/17</a:t>
-            </a:fld>
-            <a:endParaRPr lang="en-GB"/>
-          </a:p>
-        </p:txBody>
-      </p:sp>
-      <p:sp>
-        <p:nvSpPr>
-          <p:cNvPr id="6" name="Footer Placeholder 5"/>
-          <p:cNvSpPr>
-            <a:spLocks noGrp="1"/>
-          </p:cNvSpPr>
-          <p:nvPr>
-            <p:ph type="ftr" sz="quarter" idx="11"/>
-          </p:nvPr>
-        </p:nvSpPr>
-        <p:spPr/>
-        <p:txBody>
-          <a:bodyPr/>
-          <a:lstStyle/>
-          <a:p>
-            <a:endParaRPr lang="en-GB"/>
-          </a:p>
-        </p:txBody>
-      </p:sp>
-      <p:sp>
-        <p:nvSpPr>
-          <p:cNvPr id="7" name="Slide Number Placeholder 6"/>
-          <p:cNvSpPr>
-            <a:spLocks noGrp="1"/>
-          </p:cNvSpPr>
-          <p:nvPr>
-            <p:ph type="sldNum" sz="quarter" idx="12"/>
-          </p:nvPr>
-        </p:nvSpPr>
-        <p:spPr/>
-        <p:txBody>
-          <a:bodyPr/>
-          <a:lstStyle/>
-          <a:p>
-            <a:fld id="{8DADB20D-508E-4C6D-A9E4-257D5607B0F6}" type="slidenum">
-              <a:rPr lang="en-GB" smtClean="0"/>
-              <a:t>‹#›</a:t>
-            </a:fld>
-            <a:endParaRPr lang="en-GB"/>
-          </a:p>
-        </p:txBody>
-      </p:sp>
-    </p:spTree>
-    <p:extLst>
-      <p:ext uri="{BB962C8B-B14F-4D97-AF65-F5344CB8AC3E}">
-        <p14:creationId xmlns:p14="http://schemas.microsoft.com/office/powerpoint/2010/main" val="468392282"/>
-      </p:ext>
-    </p:extLst>
-  </p:cSld>
-  <p:clrMapOvr>
-    <a:masterClrMapping/>
-  </p:clrMapOvr>
-</p:sldLayout>
-</file>
-
-<file path=ppt/slideLayouts/slideLayout5.xml><?xml version="1.0" encoding="utf-8"?>
-<p:sldLayout xmlns:a="http://schemas.openxmlformats.org/drawingml/2006/main" xmlns:r="http://schemas.openxmlformats.org/officeDocument/2006/relationships" xmlns:p="http://schemas.openxmlformats.org/presentationml/2006/main" type="twoTxTwoObj" preserve="1">
-  <p:cSld name="Comparison">
-    <p:spTree>
-      <p:nvGrpSpPr>
-        <p:cNvPr id="1" name=""/>
-        <p:cNvGrpSpPr/>
-        <p:nvPr/>
-      </p:nvGrpSpPr>
-      <p:grpSpPr>
-        <a:xfrm>
-          <a:off x="0" y="0"/>
-          <a:ext cx="0" cy="0"/>
-          <a:chOff x="0" y="0"/>
-          <a:chExt cx="0" cy="0"/>
-        </a:xfrm>
-      </p:grpSpPr>
-      <p:sp>
-        <p:nvSpPr>
-          <p:cNvPr id="2" name="Title 1"/>
-          <p:cNvSpPr>
-            <a:spLocks noGrp="1"/>
-          </p:cNvSpPr>
-          <p:nvPr>
-            <p:ph type="title"/>
-          </p:nvPr>
-        </p:nvSpPr>
-        <p:spPr/>
-        <p:txBody>
-          <a:bodyPr/>
-          <a:lstStyle>
-            <a:lvl1pPr>
-              <a:defRPr/>
-            </a:lvl1pPr>
-          </a:lstStyle>
-          <a:p>
-            <a:r>
-              <a:rPr lang="en-US" smtClean="0"/>
-              <a:t>Click to edit Master title style</a:t>
-            </a:r>
-            <a:endParaRPr lang="en-GB"/>
-          </a:p>
-        </p:txBody>
-      </p:sp>
-      <p:sp>
-        <p:nvSpPr>
-          <p:cNvPr id="3" name="Text Placeholder 2"/>
-          <p:cNvSpPr>
-            <a:spLocks noGrp="1"/>
-          </p:cNvSpPr>
-          <p:nvPr>
-            <p:ph type="body" idx="1"/>
-          </p:nvPr>
-        </p:nvSpPr>
-        <p:spPr>
-          <a:xfrm>
-            <a:off x="457200" y="1535113"/>
-            <a:ext cx="4040188" cy="639762"/>
-          </a:xfrm>
-        </p:spPr>
-        <p:txBody>
-          <a:bodyPr anchor="b"/>
-          <a:lstStyle>
-            <a:lvl1pPr marL="0" indent="0">
-              <a:buNone/>
-              <a:defRPr sz="2400" b="1"/>
-            </a:lvl1pPr>
-            <a:lvl2pPr marL="457200" indent="0">
-              <a:buNone/>
-              <a:defRPr sz="2000" b="1"/>
-            </a:lvl2pPr>
-            <a:lvl3pPr marL="914400" indent="0">
-              <a:buNone/>
-              <a:defRPr sz="1800" b="1"/>
-            </a:lvl3pPr>
-            <a:lvl4pPr marL="1371600" indent="0">
-              <a:buNone/>
-              <a:defRPr sz="1600" b="1"/>
-            </a:lvl4pPr>
-            <a:lvl5pPr marL="1828800" indent="0">
-              <a:buNone/>
-              <a:defRPr sz="1600" b="1"/>
-            </a:lvl5pPr>
-            <a:lvl6pPr marL="2286000" indent="0">
-              <a:buNone/>
-              <a:defRPr sz="1600" b="1"/>
-            </a:lvl6pPr>
-            <a:lvl7pPr marL="2743200" indent="0">
-              <a:buNone/>
-              <a:defRPr sz="1600" b="1"/>
-            </a:lvl7pPr>
-            <a:lvl8pPr marL="3200400" indent="0">
-              <a:buNone/>
-              <a:defRPr sz="1600" b="1"/>
-            </a:lvl8pPr>
-            <a:lvl9pPr marL="3657600" indent="0">
-              <a:buNone/>
-              <a:defRPr sz="1600" b="1"/>
-            </a:lvl9pPr>
-          </a:lstStyle>
-          <a:p>
-            <a:pPr lvl="0"/>
-            <a:r>
-              <a:rPr lang="en-US" smtClean="0"/>
-              <a:t>Click to edit Master text styles</a:t>
-            </a:r>
-          </a:p>
-        </p:txBody>
-      </p:sp>
-      <p:sp>
-        <p:nvSpPr>
-          <p:cNvPr id="4" name="Content Placeholder 3"/>
-          <p:cNvSpPr>
-            <a:spLocks noGrp="1"/>
-          </p:cNvSpPr>
-          <p:nvPr>
-            <p:ph sz="half" idx="2"/>
-          </p:nvPr>
-        </p:nvSpPr>
-        <p:spPr>
-          <a:xfrm>
-            <a:off x="457200" y="2174875"/>
-            <a:ext cx="4040188" cy="3951288"/>
-          </a:xfrm>
-        </p:spPr>
-        <p:txBody>
-          <a:bodyPr/>
-          <a:lstStyle>
-            <a:lvl1pPr>
-              <a:defRPr sz="2400"/>
-            </a:lvl1pPr>
-            <a:lvl2pPr>
-              <a:defRPr sz="2000"/>
-            </a:lvl2pPr>
-            <a:lvl3pPr>
-              <a:defRPr sz="1800"/>
-            </a:lvl3pPr>
-            <a:lvl4pPr>
-              <a:defRPr sz="1600"/>
-            </a:lvl4pPr>
-            <a:lvl5pPr>
-              <a:defRPr sz="1600"/>
-            </a:lvl5pPr>
-            <a:lvl6pPr>
-              <a:defRPr sz="1600"/>
-            </a:lvl6pPr>
-            <a:lvl7pPr>
-              <a:defRPr sz="1600"/>
-            </a:lvl7pPr>
-            <a:lvl8pPr>
-              <a:defRPr sz="1600"/>
-            </a:lvl8pPr>
-            <a:lvl9pPr>
-              <a:defRPr sz="1600"/>
-            </a:lvl9pPr>
-          </a:lstStyle>
-          <a:p>
-            <a:pPr lvl="0"/>
-            <a:r>
-              <a:rPr lang="en-US" smtClean="0"/>
-              <a:t>Click to edit Master text styles</a:t>
-            </a:r>
-          </a:p>
-          <a:p>
-            <a:pPr lvl="1"/>
-            <a:r>
-              <a:rPr lang="en-US" smtClean="0"/>
-              <a:t>Second level</a:t>
-            </a:r>
-          </a:p>
-          <a:p>
-            <a:pPr lvl="2"/>
-            <a:r>
-              <a:rPr lang="en-US" smtClean="0"/>
-              <a:t>Third level</a:t>
-            </a:r>
-          </a:p>
-          <a:p>
-            <a:pPr lvl="3"/>
-            <a:r>
-              <a:rPr lang="en-US" smtClean="0"/>
-              <a:t>Fourth level</a:t>
-            </a:r>
-          </a:p>
-          <a:p>
-            <a:pPr lvl="4"/>
-            <a:r>
-              <a:rPr lang="en-US" smtClean="0"/>
-              <a:t>Fifth level</a:t>
-            </a:r>
-            <a:endParaRPr lang="en-GB"/>
-          </a:p>
-        </p:txBody>
-      </p:sp>
-      <p:sp>
-        <p:nvSpPr>
-          <p:cNvPr id="5" name="Text Placeholder 4"/>
-          <p:cNvSpPr>
-            <a:spLocks noGrp="1"/>
-          </p:cNvSpPr>
-          <p:nvPr>
-            <p:ph type="body" sz="quarter" idx="3"/>
-          </p:nvPr>
-        </p:nvSpPr>
-        <p:spPr>
-          <a:xfrm>
-            <a:off x="4645025" y="1535113"/>
-            <a:ext cx="4041775" cy="639762"/>
-          </a:xfrm>
-        </p:spPr>
-        <p:txBody>
-          <a:bodyPr anchor="b"/>
-          <a:lstStyle>
-            <a:lvl1pPr marL="0" indent="0">
-              <a:buNone/>
-              <a:defRPr sz="2400" b="1"/>
-            </a:lvl1pPr>
-            <a:lvl2pPr marL="457200" indent="0">
-              <a:buNone/>
-              <a:defRPr sz="2000" b="1"/>
-            </a:lvl2pPr>
-            <a:lvl3pPr marL="914400" indent="0">
-              <a:buNone/>
-              <a:defRPr sz="1800" b="1"/>
-            </a:lvl3pPr>
-            <a:lvl4pPr marL="1371600" indent="0">
-              <a:buNone/>
-              <a:defRPr sz="1600" b="1"/>
-            </a:lvl4pPr>
-            <a:lvl5pPr marL="1828800" indent="0">
-              <a:buNone/>
-              <a:defRPr sz="1600" b="1"/>
-            </a:lvl5pPr>
-            <a:lvl6pPr marL="2286000" indent="0">
-              <a:buNone/>
-              <a:defRPr sz="1600" b="1"/>
-            </a:lvl6pPr>
-            <a:lvl7pPr marL="2743200" indent="0">
-              <a:buNone/>
-              <a:defRPr sz="1600" b="1"/>
-            </a:lvl7pPr>
-            <a:lvl8pPr marL="3200400" indent="0">
-              <a:buNone/>
-              <a:defRPr sz="1600" b="1"/>
-            </a:lvl8pPr>
-            <a:lvl9pPr marL="3657600" indent="0">
-              <a:buNone/>
-              <a:defRPr sz="1600" b="1"/>
-            </a:lvl9pPr>
-          </a:lstStyle>
-          <a:p>
-            <a:pPr lvl="0"/>
-            <a:r>
-              <a:rPr lang="en-US" smtClean="0"/>
-              <a:t>Click to edit Master text styles</a:t>
-            </a:r>
-          </a:p>
-        </p:txBody>
-      </p:sp>
-      <p:sp>
-        <p:nvSpPr>
-          <p:cNvPr id="6" name="Content Placeholder 5"/>
-          <p:cNvSpPr>
-            <a:spLocks noGrp="1"/>
-          </p:cNvSpPr>
-          <p:nvPr>
-            <p:ph sz="quarter" idx="4"/>
-          </p:nvPr>
-        </p:nvSpPr>
-        <p:spPr>
-          <a:xfrm>
-            <a:off x="4645025" y="2174875"/>
-            <a:ext cx="4041775" cy="3951288"/>
-          </a:xfrm>
-        </p:spPr>
-        <p:txBody>
-          <a:bodyPr/>
-          <a:lstStyle>
-            <a:lvl1pPr>
-              <a:defRPr sz="2400"/>
-            </a:lvl1pPr>
-            <a:lvl2pPr>
-              <a:defRPr sz="2000"/>
-            </a:lvl2pPr>
-            <a:lvl3pPr>
-              <a:defRPr sz="1800"/>
-            </a:lvl3pPr>
-            <a:lvl4pPr>
-              <a:defRPr sz="1600"/>
-            </a:lvl4pPr>
-            <a:lvl5pPr>
-              <a:defRPr sz="1600"/>
-            </a:lvl5pPr>
-            <a:lvl6pPr>
-              <a:defRPr sz="1600"/>
-            </a:lvl6pPr>
-            <a:lvl7pPr>
-              <a:defRPr sz="1600"/>
-            </a:lvl7pPr>
-            <a:lvl8pPr>
-              <a:defRPr sz="1600"/>
-            </a:lvl8pPr>
-            <a:lvl9pPr>
-              <a:defRPr sz="1600"/>
-            </a:lvl9pPr>
-          </a:lstStyle>
-          <a:p>
-            <a:pPr lvl="0"/>
-            <a:r>
-              <a:rPr lang="en-US" smtClean="0"/>
-              <a:t>Click to edit Master text styles</a:t>
-            </a:r>
-          </a:p>
-          <a:p>
-            <a:pPr lvl="1"/>
-            <a:r>
-              <a:rPr lang="en-US" smtClean="0"/>
-              <a:t>Second level</a:t>
-            </a:r>
-          </a:p>
-          <a:p>
-            <a:pPr lvl="2"/>
-            <a:r>
-              <a:rPr lang="en-US" smtClean="0"/>
-              <a:t>Third level</a:t>
-            </a:r>
-          </a:p>
-          <a:p>
-            <a:pPr lvl="3"/>
-            <a:r>
-              <a:rPr lang="en-US" smtClean="0"/>
-              <a:t>Fourth level</a:t>
-            </a:r>
-          </a:p>
-          <a:p>
-            <a:pPr lvl="4"/>
-            <a:r>
-              <a:rPr lang="en-US" smtClean="0"/>
-              <a:t>Fifth level</a:t>
-            </a:r>
-            <a:endParaRPr lang="en-GB"/>
-          </a:p>
-        </p:txBody>
-      </p:sp>
-      <p:sp>
-        <p:nvSpPr>
           <p:cNvPr id="7" name="Date Placeholder 6"/>
           <p:cNvSpPr>
             <a:spLocks noGrp="1"/>
@@ -1415,9 +1767,9 @@
           <a:bodyPr/>
           <a:lstStyle/>
           <a:p>
-            <a:fld id="{E6744CE3-0875-4B69-89C0-6F72D8139561}" type="datetimeFigureOut">
+            <a:fld id="{6BA5D40C-A8DC-479A-A5D3-E7B4936A184B}" type="datetimeFigureOut">
               <a:rPr lang="en-GB" smtClean="0"/>
-              <a:t>26/05/17</a:t>
+              <a:t>15/07/2015</a:t>
             </a:fld>
             <a:endParaRPr lang="en-GB"/>
           </a:p>
@@ -1457,7 +1809,7 @@
           <a:bodyPr/>
           <a:lstStyle/>
           <a:p>
-            <a:fld id="{8DADB20D-508E-4C6D-A9E4-257D5607B0F6}" type="slidenum">
+            <a:fld id="{52235FAC-C7EA-4164-B888-497B3F49A53C}" type="slidenum">
               <a:rPr lang="en-GB" smtClean="0"/>
               <a:t>‹#›</a:t>
             </a:fld>
@@ -1468,7 +1820,7 @@
     </p:spTree>
     <p:extLst>
       <p:ext uri="{BB962C8B-B14F-4D97-AF65-F5344CB8AC3E}">
-        <p14:creationId xmlns:p14="http://schemas.microsoft.com/office/powerpoint/2010/main" val="2120349123"/>
+        <p14:creationId xmlns:p14="http://schemas.microsoft.com/office/powerpoint/2010/main" val="4230559702"/>
       </p:ext>
     </p:extLst>
   </p:cSld>
@@ -1533,9 +1885,9 @@
           <a:bodyPr/>
           <a:lstStyle/>
           <a:p>
-            <a:fld id="{E6744CE3-0875-4B69-89C0-6F72D8139561}" type="datetimeFigureOut">
+            <a:fld id="{6BA5D40C-A8DC-479A-A5D3-E7B4936A184B}" type="datetimeFigureOut">
               <a:rPr lang="en-GB" smtClean="0"/>
-              <a:t>26/05/17</a:t>
+              <a:t>15/07/2015</a:t>
             </a:fld>
             <a:endParaRPr lang="en-GB"/>
           </a:p>
@@ -1575,7 +1927,7 @@
           <a:bodyPr/>
           <a:lstStyle/>
           <a:p>
-            <a:fld id="{8DADB20D-508E-4C6D-A9E4-257D5607B0F6}" type="slidenum">
+            <a:fld id="{52235FAC-C7EA-4164-B888-497B3F49A53C}" type="slidenum">
               <a:rPr lang="en-GB" smtClean="0"/>
               <a:t>‹#›</a:t>
             </a:fld>
@@ -1586,7 +1938,7 @@
     </p:spTree>
     <p:extLst>
       <p:ext uri="{BB962C8B-B14F-4D97-AF65-F5344CB8AC3E}">
-        <p14:creationId xmlns:p14="http://schemas.microsoft.com/office/powerpoint/2010/main" val="1385807973"/>
+        <p14:creationId xmlns:p14="http://schemas.microsoft.com/office/powerpoint/2010/main" val="3001564123"/>
       </p:ext>
     </p:extLst>
   </p:cSld>
@@ -1628,9 +1980,9 @@
           <a:bodyPr/>
           <a:lstStyle/>
           <a:p>
-            <a:fld id="{E6744CE3-0875-4B69-89C0-6F72D8139561}" type="datetimeFigureOut">
+            <a:fld id="{6BA5D40C-A8DC-479A-A5D3-E7B4936A184B}" type="datetimeFigureOut">
               <a:rPr lang="en-GB" smtClean="0"/>
-              <a:t>26/05/17</a:t>
+              <a:t>15/07/2015</a:t>
             </a:fld>
             <a:endParaRPr lang="en-GB"/>
           </a:p>
@@ -1670,7 +2022,7 @@
           <a:bodyPr/>
           <a:lstStyle/>
           <a:p>
-            <a:fld id="{8DADB20D-508E-4C6D-A9E4-257D5607B0F6}" type="slidenum">
+            <a:fld id="{52235FAC-C7EA-4164-B888-497B3F49A53C}" type="slidenum">
               <a:rPr lang="en-GB" smtClean="0"/>
               <a:t>‹#›</a:t>
             </a:fld>
@@ -1681,7 +2033,537 @@
     </p:spTree>
     <p:extLst>
       <p:ext uri="{BB962C8B-B14F-4D97-AF65-F5344CB8AC3E}">
-        <p14:creationId xmlns:p14="http://schemas.microsoft.com/office/powerpoint/2010/main" val="2755996059"/>
+        <p14:creationId xmlns:p14="http://schemas.microsoft.com/office/powerpoint/2010/main" val="2431818814"/>
+      </p:ext>
+    </p:extLst>
+  </p:cSld>
+  <p:clrMapOvr>
+    <a:masterClrMapping/>
+  </p:clrMapOvr>
+</p:sldLayout>
+</file>
+
+<file path=ppt/slideLayouts/slideLayout8.xml><?xml version="1.0" encoding="utf-8"?>
+<p:sldLayout xmlns:a="http://schemas.openxmlformats.org/drawingml/2006/main" xmlns:r="http://schemas.openxmlformats.org/officeDocument/2006/relationships" xmlns:p="http://schemas.openxmlformats.org/presentationml/2006/main" type="objTx" preserve="1">
+  <p:cSld name="Content with Caption">
+    <p:spTree>
+      <p:nvGrpSpPr>
+        <p:cNvPr id="1" name=""/>
+        <p:cNvGrpSpPr/>
+        <p:nvPr/>
+      </p:nvGrpSpPr>
+      <p:grpSpPr>
+        <a:xfrm>
+          <a:off x="0" y="0"/>
+          <a:ext cx="0" cy="0"/>
+          <a:chOff x="0" y="0"/>
+          <a:chExt cx="0" cy="0"/>
+        </a:xfrm>
+      </p:grpSpPr>
+      <p:sp>
+        <p:nvSpPr>
+          <p:cNvPr id="2" name="Title 1"/>
+          <p:cNvSpPr>
+            <a:spLocks noGrp="1"/>
+          </p:cNvSpPr>
+          <p:nvPr>
+            <p:ph type="title"/>
+          </p:nvPr>
+        </p:nvSpPr>
+        <p:spPr>
+          <a:xfrm>
+            <a:off x="754384" y="425946"/>
+            <a:ext cx="4963717" cy="1812744"/>
+          </a:xfrm>
+        </p:spPr>
+        <p:txBody>
+          <a:bodyPr anchor="b"/>
+          <a:lstStyle>
+            <a:lvl1pPr algn="l">
+              <a:defRPr sz="2300" b="1"/>
+            </a:lvl1pPr>
+          </a:lstStyle>
+          <a:p>
+            <a:r>
+              <a:rPr lang="en-US" smtClean="0"/>
+              <a:t>Click to edit Master title style</a:t>
+            </a:r>
+            <a:endParaRPr lang="en-GB"/>
+          </a:p>
+        </p:txBody>
+      </p:sp>
+      <p:sp>
+        <p:nvSpPr>
+          <p:cNvPr id="3" name="Content Placeholder 2"/>
+          <p:cNvSpPr>
+            <a:spLocks noGrp="1"/>
+          </p:cNvSpPr>
+          <p:nvPr>
+            <p:ph idx="1"/>
+          </p:nvPr>
+        </p:nvSpPr>
+        <p:spPr>
+          <a:xfrm>
+            <a:off x="5898834" y="425950"/>
+            <a:ext cx="8434386" cy="9130587"/>
+          </a:xfrm>
+        </p:spPr>
+        <p:txBody>
+          <a:bodyPr/>
+          <a:lstStyle>
+            <a:lvl1pPr>
+              <a:defRPr sz="3700"/>
+            </a:lvl1pPr>
+            <a:lvl2pPr>
+              <a:defRPr sz="3200"/>
+            </a:lvl2pPr>
+            <a:lvl3pPr>
+              <a:defRPr sz="2800"/>
+            </a:lvl3pPr>
+            <a:lvl4pPr>
+              <a:defRPr sz="2300"/>
+            </a:lvl4pPr>
+            <a:lvl5pPr>
+              <a:defRPr sz="2300"/>
+            </a:lvl5pPr>
+            <a:lvl6pPr>
+              <a:defRPr sz="2300"/>
+            </a:lvl6pPr>
+            <a:lvl7pPr>
+              <a:defRPr sz="2300"/>
+            </a:lvl7pPr>
+            <a:lvl8pPr>
+              <a:defRPr sz="2300"/>
+            </a:lvl8pPr>
+            <a:lvl9pPr>
+              <a:defRPr sz="2300"/>
+            </a:lvl9pPr>
+          </a:lstStyle>
+          <a:p>
+            <a:pPr lvl="0"/>
+            <a:r>
+              <a:rPr lang="en-US" smtClean="0"/>
+              <a:t>Click to edit Master text styles</a:t>
+            </a:r>
+          </a:p>
+          <a:p>
+            <a:pPr lvl="1"/>
+            <a:r>
+              <a:rPr lang="en-US" smtClean="0"/>
+              <a:t>Second level</a:t>
+            </a:r>
+          </a:p>
+          <a:p>
+            <a:pPr lvl="2"/>
+            <a:r>
+              <a:rPr lang="en-US" smtClean="0"/>
+              <a:t>Third level</a:t>
+            </a:r>
+          </a:p>
+          <a:p>
+            <a:pPr lvl="3"/>
+            <a:r>
+              <a:rPr lang="en-US" smtClean="0"/>
+              <a:t>Fourth level</a:t>
+            </a:r>
+          </a:p>
+          <a:p>
+            <a:pPr lvl="4"/>
+            <a:r>
+              <a:rPr lang="en-US" smtClean="0"/>
+              <a:t>Fifth level</a:t>
+            </a:r>
+            <a:endParaRPr lang="en-GB"/>
+          </a:p>
+        </p:txBody>
+      </p:sp>
+      <p:sp>
+        <p:nvSpPr>
+          <p:cNvPr id="4" name="Text Placeholder 3"/>
+          <p:cNvSpPr>
+            <a:spLocks noGrp="1"/>
+          </p:cNvSpPr>
+          <p:nvPr>
+            <p:ph type="body" sz="half" idx="2"/>
+          </p:nvPr>
+        </p:nvSpPr>
+        <p:spPr>
+          <a:xfrm>
+            <a:off x="754384" y="2238692"/>
+            <a:ext cx="4963717" cy="7317841"/>
+          </a:xfrm>
+        </p:spPr>
+        <p:txBody>
+          <a:bodyPr/>
+          <a:lstStyle>
+            <a:lvl1pPr marL="0" indent="0">
+              <a:buNone/>
+              <a:defRPr sz="1600"/>
+            </a:lvl1pPr>
+            <a:lvl2pPr marL="526237" indent="0">
+              <a:buNone/>
+              <a:defRPr sz="1400"/>
+            </a:lvl2pPr>
+            <a:lvl3pPr marL="1052474" indent="0">
+              <a:buNone/>
+              <a:defRPr sz="1200"/>
+            </a:lvl3pPr>
+            <a:lvl4pPr marL="1578712" indent="0">
+              <a:buNone/>
+              <a:defRPr sz="1000"/>
+            </a:lvl4pPr>
+            <a:lvl5pPr marL="2104949" indent="0">
+              <a:buNone/>
+              <a:defRPr sz="1000"/>
+            </a:lvl5pPr>
+            <a:lvl6pPr marL="2631186" indent="0">
+              <a:buNone/>
+              <a:defRPr sz="1000"/>
+            </a:lvl6pPr>
+            <a:lvl7pPr marL="3157423" indent="0">
+              <a:buNone/>
+              <a:defRPr sz="1000"/>
+            </a:lvl7pPr>
+            <a:lvl8pPr marL="3683660" indent="0">
+              <a:buNone/>
+              <a:defRPr sz="1000"/>
+            </a:lvl8pPr>
+            <a:lvl9pPr marL="4209898" indent="0">
+              <a:buNone/>
+              <a:defRPr sz="1000"/>
+            </a:lvl9pPr>
+          </a:lstStyle>
+          <a:p>
+            <a:pPr lvl="0"/>
+            <a:r>
+              <a:rPr lang="en-US" smtClean="0"/>
+              <a:t>Click to edit Master text styles</a:t>
+            </a:r>
+          </a:p>
+        </p:txBody>
+      </p:sp>
+      <p:sp>
+        <p:nvSpPr>
+          <p:cNvPr id="5" name="Date Placeholder 4"/>
+          <p:cNvSpPr>
+            <a:spLocks noGrp="1"/>
+          </p:cNvSpPr>
+          <p:nvPr>
+            <p:ph type="dt" sz="half" idx="10"/>
+          </p:nvPr>
+        </p:nvSpPr>
+        <p:spPr/>
+        <p:txBody>
+          <a:bodyPr/>
+          <a:lstStyle/>
+          <a:p>
+            <a:fld id="{6BA5D40C-A8DC-479A-A5D3-E7B4936A184B}" type="datetimeFigureOut">
+              <a:rPr lang="en-GB" smtClean="0"/>
+              <a:t>15/07/2015</a:t>
+            </a:fld>
+            <a:endParaRPr lang="en-GB"/>
+          </a:p>
+        </p:txBody>
+      </p:sp>
+      <p:sp>
+        <p:nvSpPr>
+          <p:cNvPr id="6" name="Footer Placeholder 5"/>
+          <p:cNvSpPr>
+            <a:spLocks noGrp="1"/>
+          </p:cNvSpPr>
+          <p:nvPr>
+            <p:ph type="ftr" sz="quarter" idx="11"/>
+          </p:nvPr>
+        </p:nvSpPr>
+        <p:spPr/>
+        <p:txBody>
+          <a:bodyPr/>
+          <a:lstStyle/>
+          <a:p>
+            <a:endParaRPr lang="en-GB"/>
+          </a:p>
+        </p:txBody>
+      </p:sp>
+      <p:sp>
+        <p:nvSpPr>
+          <p:cNvPr id="7" name="Slide Number Placeholder 6"/>
+          <p:cNvSpPr>
+            <a:spLocks noGrp="1"/>
+          </p:cNvSpPr>
+          <p:nvPr>
+            <p:ph type="sldNum" sz="quarter" idx="12"/>
+          </p:nvPr>
+        </p:nvSpPr>
+        <p:spPr/>
+        <p:txBody>
+          <a:bodyPr/>
+          <a:lstStyle/>
+          <a:p>
+            <a:fld id="{52235FAC-C7EA-4164-B888-497B3F49A53C}" type="slidenum">
+              <a:rPr lang="en-GB" smtClean="0"/>
+              <a:t>‹#›</a:t>
+            </a:fld>
+            <a:endParaRPr lang="en-GB"/>
+          </a:p>
+        </p:txBody>
+      </p:sp>
+    </p:spTree>
+    <p:extLst>
+      <p:ext uri="{BB962C8B-B14F-4D97-AF65-F5344CB8AC3E}">
+        <p14:creationId xmlns:p14="http://schemas.microsoft.com/office/powerpoint/2010/main" val="1310804531"/>
+      </p:ext>
+    </p:extLst>
+  </p:cSld>
+  <p:clrMapOvr>
+    <a:masterClrMapping/>
+  </p:clrMapOvr>
+</p:sldLayout>
+</file>
+
+<file path=ppt/slideLayouts/slideLayout9.xml><?xml version="1.0" encoding="utf-8"?>
+<p:sldLayout xmlns:a="http://schemas.openxmlformats.org/drawingml/2006/main" xmlns:r="http://schemas.openxmlformats.org/officeDocument/2006/relationships" xmlns:p="http://schemas.openxmlformats.org/presentationml/2006/main" type="picTx" preserve="1">
+  <p:cSld name="Picture with Caption">
+    <p:spTree>
+      <p:nvGrpSpPr>
+        <p:cNvPr id="1" name=""/>
+        <p:cNvGrpSpPr/>
+        <p:nvPr/>
+      </p:nvGrpSpPr>
+      <p:grpSpPr>
+        <a:xfrm>
+          <a:off x="0" y="0"/>
+          <a:ext cx="0" cy="0"/>
+          <a:chOff x="0" y="0"/>
+          <a:chExt cx="0" cy="0"/>
+        </a:xfrm>
+      </p:grpSpPr>
+      <p:sp>
+        <p:nvSpPr>
+          <p:cNvPr id="2" name="Title 1"/>
+          <p:cNvSpPr>
+            <a:spLocks noGrp="1"/>
+          </p:cNvSpPr>
+          <p:nvPr>
+            <p:ph type="title"/>
+          </p:nvPr>
+        </p:nvSpPr>
+        <p:spPr>
+          <a:xfrm>
+            <a:off x="2957275" y="7488714"/>
+            <a:ext cx="9052560" cy="884086"/>
+          </a:xfrm>
+        </p:spPr>
+        <p:txBody>
+          <a:bodyPr anchor="b"/>
+          <a:lstStyle>
+            <a:lvl1pPr algn="l">
+              <a:defRPr sz="2300" b="1"/>
+            </a:lvl1pPr>
+          </a:lstStyle>
+          <a:p>
+            <a:r>
+              <a:rPr lang="en-US" smtClean="0"/>
+              <a:t>Click to edit Master title style</a:t>
+            </a:r>
+            <a:endParaRPr lang="en-GB"/>
+          </a:p>
+        </p:txBody>
+      </p:sp>
+      <p:sp>
+        <p:nvSpPr>
+          <p:cNvPr id="3" name="Picture Placeholder 2"/>
+          <p:cNvSpPr>
+            <a:spLocks noGrp="1"/>
+          </p:cNvSpPr>
+          <p:nvPr>
+            <p:ph type="pic" idx="1"/>
+          </p:nvPr>
+        </p:nvSpPr>
+        <p:spPr>
+          <a:xfrm>
+            <a:off x="2957275" y="955901"/>
+            <a:ext cx="9052560" cy="6418898"/>
+          </a:xfrm>
+        </p:spPr>
+        <p:txBody>
+          <a:bodyPr/>
+          <a:lstStyle>
+            <a:lvl1pPr marL="0" indent="0">
+              <a:buNone/>
+              <a:defRPr sz="3700"/>
+            </a:lvl1pPr>
+            <a:lvl2pPr marL="526237" indent="0">
+              <a:buNone/>
+              <a:defRPr sz="3200"/>
+            </a:lvl2pPr>
+            <a:lvl3pPr marL="1052474" indent="0">
+              <a:buNone/>
+              <a:defRPr sz="2800"/>
+            </a:lvl3pPr>
+            <a:lvl4pPr marL="1578712" indent="0">
+              <a:buNone/>
+              <a:defRPr sz="2300"/>
+            </a:lvl4pPr>
+            <a:lvl5pPr marL="2104949" indent="0">
+              <a:buNone/>
+              <a:defRPr sz="2300"/>
+            </a:lvl5pPr>
+            <a:lvl6pPr marL="2631186" indent="0">
+              <a:buNone/>
+              <a:defRPr sz="2300"/>
+            </a:lvl6pPr>
+            <a:lvl7pPr marL="3157423" indent="0">
+              <a:buNone/>
+              <a:defRPr sz="2300"/>
+            </a:lvl7pPr>
+            <a:lvl8pPr marL="3683660" indent="0">
+              <a:buNone/>
+              <a:defRPr sz="2300"/>
+            </a:lvl8pPr>
+            <a:lvl9pPr marL="4209898" indent="0">
+              <a:buNone/>
+              <a:defRPr sz="2300"/>
+            </a:lvl9pPr>
+          </a:lstStyle>
+          <a:p>
+            <a:endParaRPr lang="en-GB"/>
+          </a:p>
+        </p:txBody>
+      </p:sp>
+      <p:sp>
+        <p:nvSpPr>
+          <p:cNvPr id="4" name="Text Placeholder 3"/>
+          <p:cNvSpPr>
+            <a:spLocks noGrp="1"/>
+          </p:cNvSpPr>
+          <p:nvPr>
+            <p:ph type="body" sz="half" idx="2"/>
+          </p:nvPr>
+        </p:nvSpPr>
+        <p:spPr>
+          <a:xfrm>
+            <a:off x="2957275" y="8372800"/>
+            <a:ext cx="9052560" cy="1255547"/>
+          </a:xfrm>
+        </p:spPr>
+        <p:txBody>
+          <a:bodyPr/>
+          <a:lstStyle>
+            <a:lvl1pPr marL="0" indent="0">
+              <a:buNone/>
+              <a:defRPr sz="1600"/>
+            </a:lvl1pPr>
+            <a:lvl2pPr marL="526237" indent="0">
+              <a:buNone/>
+              <a:defRPr sz="1400"/>
+            </a:lvl2pPr>
+            <a:lvl3pPr marL="1052474" indent="0">
+              <a:buNone/>
+              <a:defRPr sz="1200"/>
+            </a:lvl3pPr>
+            <a:lvl4pPr marL="1578712" indent="0">
+              <a:buNone/>
+              <a:defRPr sz="1000"/>
+            </a:lvl4pPr>
+            <a:lvl5pPr marL="2104949" indent="0">
+              <a:buNone/>
+              <a:defRPr sz="1000"/>
+            </a:lvl5pPr>
+            <a:lvl6pPr marL="2631186" indent="0">
+              <a:buNone/>
+              <a:defRPr sz="1000"/>
+            </a:lvl6pPr>
+            <a:lvl7pPr marL="3157423" indent="0">
+              <a:buNone/>
+              <a:defRPr sz="1000"/>
+            </a:lvl7pPr>
+            <a:lvl8pPr marL="3683660" indent="0">
+              <a:buNone/>
+              <a:defRPr sz="1000"/>
+            </a:lvl8pPr>
+            <a:lvl9pPr marL="4209898" indent="0">
+              <a:buNone/>
+              <a:defRPr sz="1000"/>
+            </a:lvl9pPr>
+          </a:lstStyle>
+          <a:p>
+            <a:pPr lvl="0"/>
+            <a:r>
+              <a:rPr lang="en-US" smtClean="0"/>
+              <a:t>Click to edit Master text styles</a:t>
+            </a:r>
+          </a:p>
+        </p:txBody>
+      </p:sp>
+      <p:sp>
+        <p:nvSpPr>
+          <p:cNvPr id="5" name="Date Placeholder 4"/>
+          <p:cNvSpPr>
+            <a:spLocks noGrp="1"/>
+          </p:cNvSpPr>
+          <p:nvPr>
+            <p:ph type="dt" sz="half" idx="10"/>
+          </p:nvPr>
+        </p:nvSpPr>
+        <p:spPr/>
+        <p:txBody>
+          <a:bodyPr/>
+          <a:lstStyle/>
+          <a:p>
+            <a:fld id="{6BA5D40C-A8DC-479A-A5D3-E7B4936A184B}" type="datetimeFigureOut">
+              <a:rPr lang="en-GB" smtClean="0"/>
+              <a:t>15/07/2015</a:t>
+            </a:fld>
+            <a:endParaRPr lang="en-GB"/>
+          </a:p>
+        </p:txBody>
+      </p:sp>
+      <p:sp>
+        <p:nvSpPr>
+          <p:cNvPr id="6" name="Footer Placeholder 5"/>
+          <p:cNvSpPr>
+            <a:spLocks noGrp="1"/>
+          </p:cNvSpPr>
+          <p:nvPr>
+            <p:ph type="ftr" sz="quarter" idx="11"/>
+          </p:nvPr>
+        </p:nvSpPr>
+        <p:spPr/>
+        <p:txBody>
+          <a:bodyPr/>
+          <a:lstStyle/>
+          <a:p>
+            <a:endParaRPr lang="en-GB"/>
+          </a:p>
+        </p:txBody>
+      </p:sp>
+      <p:sp>
+        <p:nvSpPr>
+          <p:cNvPr id="7" name="Slide Number Placeholder 6"/>
+          <p:cNvSpPr>
+            <a:spLocks noGrp="1"/>
+          </p:cNvSpPr>
+          <p:nvPr>
+            <p:ph type="sldNum" sz="quarter" idx="12"/>
+          </p:nvPr>
+        </p:nvSpPr>
+        <p:spPr/>
+        <p:txBody>
+          <a:bodyPr/>
+          <a:lstStyle/>
+          <a:p>
+            <a:fld id="{52235FAC-C7EA-4164-B888-497B3F49A53C}" type="slidenum">
+              <a:rPr lang="en-GB" smtClean="0"/>
+              <a:t>‹#›</a:t>
+            </a:fld>
+            <a:endParaRPr lang="en-GB"/>
+          </a:p>
+        </p:txBody>
+      </p:sp>
+    </p:spTree>
+    <p:extLst>
+      <p:ext uri="{BB962C8B-B14F-4D97-AF65-F5344CB8AC3E}">
+        <p14:creationId xmlns:p14="http://schemas.microsoft.com/office/powerpoint/2010/main" val="1056271408"/>
       </p:ext>
     </p:extLst>
   </p:cSld>
@@ -1725,15 +2607,15 @@
         </p:nvSpPr>
         <p:spPr>
           <a:xfrm>
-            <a:off x="457200" y="274638"/>
-            <a:ext cx="8229600" cy="1143000"/>
+            <a:off x="754380" y="428422"/>
+            <a:ext cx="13578840" cy="1783027"/>
           </a:xfrm>
           <a:prstGeom prst="rect">
             <a:avLst/>
           </a:prstGeom>
         </p:spPr>
         <p:txBody>
-          <a:bodyPr vert="horz" lIns="91440" tIns="45720" rIns="91440" bIns="45720" rtlCol="0" anchor="ctr">
+          <a:bodyPr vert="horz" lIns="105247" tIns="52624" rIns="105247" bIns="52624" rtlCol="0" anchor="ctr">
             <a:normAutofit/>
           </a:bodyPr>
           <a:lstStyle/>
@@ -1758,15 +2640,15 @@
         </p:nvSpPr>
         <p:spPr>
           <a:xfrm>
-            <a:off x="457200" y="1600200"/>
-            <a:ext cx="8229600" cy="4525963"/>
+            <a:off x="754380" y="2496240"/>
+            <a:ext cx="13578840" cy="7060293"/>
           </a:xfrm>
           <a:prstGeom prst="rect">
             <a:avLst/>
           </a:prstGeom>
         </p:spPr>
         <p:txBody>
-          <a:bodyPr vert="horz" lIns="91440" tIns="45720" rIns="91440" bIns="45720" rtlCol="0">
+          <a:bodyPr vert="horz" lIns="105247" tIns="52624" rIns="105247" bIns="52624" rtlCol="0">
             <a:normAutofit/>
           </a:bodyPr>
           <a:lstStyle/>
@@ -1820,18 +2702,18 @@
         </p:nvSpPr>
         <p:spPr>
           <a:xfrm>
-            <a:off x="457200" y="6356350"/>
-            <a:ext cx="2133600" cy="365125"/>
+            <a:off x="754380" y="9915617"/>
+            <a:ext cx="3520440" cy="569578"/>
           </a:xfrm>
           <a:prstGeom prst="rect">
             <a:avLst/>
           </a:prstGeom>
         </p:spPr>
         <p:txBody>
-          <a:bodyPr vert="horz" lIns="91440" tIns="45720" rIns="91440" bIns="45720" rtlCol="0" anchor="ctr"/>
+          <a:bodyPr vert="horz" lIns="105247" tIns="52624" rIns="105247" bIns="52624" rtlCol="0" anchor="ctr"/>
           <a:lstStyle>
             <a:lvl1pPr algn="l">
-              <a:defRPr sz="1200">
+              <a:defRPr sz="1400">
                 <a:solidFill>
                   <a:schemeClr val="tx1">
                     <a:tint val="75000"/>
@@ -1841,9 +2723,9 @@
             </a:lvl1pPr>
           </a:lstStyle>
           <a:p>
-            <a:fld id="{E6744CE3-0875-4B69-89C0-6F72D8139561}" type="datetimeFigureOut">
+            <a:fld id="{6BA5D40C-A8DC-479A-A5D3-E7B4936A184B}" type="datetimeFigureOut">
               <a:rPr lang="en-GB" smtClean="0"/>
-              <a:t>26/05/17</a:t>
+              <a:t>15/07/2015</a:t>
             </a:fld>
             <a:endParaRPr lang="en-GB"/>
           </a:p>
@@ -1861,18 +2743,18 @@
         </p:nvSpPr>
         <p:spPr>
           <a:xfrm>
-            <a:off x="3124200" y="6356350"/>
-            <a:ext cx="2895600" cy="365125"/>
+            <a:off x="5154930" y="9915617"/>
+            <a:ext cx="4777740" cy="569578"/>
           </a:xfrm>
           <a:prstGeom prst="rect">
             <a:avLst/>
           </a:prstGeom>
         </p:spPr>
         <p:txBody>
-          <a:bodyPr vert="horz" lIns="91440" tIns="45720" rIns="91440" bIns="45720" rtlCol="0" anchor="ctr"/>
+          <a:bodyPr vert="horz" lIns="105247" tIns="52624" rIns="105247" bIns="52624" rtlCol="0" anchor="ctr"/>
           <a:lstStyle>
             <a:lvl1pPr algn="ctr">
-              <a:defRPr sz="1200">
+              <a:defRPr sz="1400">
                 <a:solidFill>
                   <a:schemeClr val="tx1">
                     <a:tint val="75000"/>
@@ -1898,18 +2780,18 @@
         </p:nvSpPr>
         <p:spPr>
           <a:xfrm>
-            <a:off x="6553200" y="6356350"/>
-            <a:ext cx="2133600" cy="365125"/>
+            <a:off x="10812780" y="9915617"/>
+            <a:ext cx="3520440" cy="569578"/>
           </a:xfrm>
           <a:prstGeom prst="rect">
             <a:avLst/>
           </a:prstGeom>
         </p:spPr>
         <p:txBody>
-          <a:bodyPr vert="horz" lIns="91440" tIns="45720" rIns="91440" bIns="45720" rtlCol="0" anchor="ctr"/>
+          <a:bodyPr vert="horz" lIns="105247" tIns="52624" rIns="105247" bIns="52624" rtlCol="0" anchor="ctr"/>
           <a:lstStyle>
             <a:lvl1pPr algn="r">
-              <a:defRPr sz="1200">
+              <a:defRPr sz="1400">
                 <a:solidFill>
                   <a:schemeClr val="tx1">
                     <a:tint val="75000"/>
@@ -1919,7 +2801,7 @@
             </a:lvl1pPr>
           </a:lstStyle>
           <a:p>
-            <a:fld id="{8DADB20D-508E-4C6D-A9E4-257D5607B0F6}" type="slidenum">
+            <a:fld id="{52235FAC-C7EA-4164-B888-497B3F49A53C}" type="slidenum">
               <a:rPr lang="en-GB" smtClean="0"/>
               <a:t>‹#›</a:t>
             </a:fld>
@@ -1930,7 +2812,7 @@
     </p:spTree>
     <p:extLst>
       <p:ext uri="{BB962C8B-B14F-4D97-AF65-F5344CB8AC3E}">
-        <p14:creationId xmlns:p14="http://schemas.microsoft.com/office/powerpoint/2010/main" val="307823620"/>
+        <p14:creationId xmlns:p14="http://schemas.microsoft.com/office/powerpoint/2010/main" val="666274591"/>
       </p:ext>
     </p:extLst>
   </p:cSld>
@@ -1943,15 +2825,19 @@
     <p:sldLayoutId id="2147483653" r:id="rId5"/>
     <p:sldLayoutId id="2147483654" r:id="rId6"/>
     <p:sldLayoutId id="2147483655" r:id="rId7"/>
+    <p:sldLayoutId id="2147483656" r:id="rId8"/>
+    <p:sldLayoutId id="2147483657" r:id="rId9"/>
+    <p:sldLayoutId id="2147483658" r:id="rId10"/>
+    <p:sldLayoutId id="2147483659" r:id="rId11"/>
   </p:sldLayoutIdLst>
   <p:txStyles>
     <p:titleStyle>
-      <a:lvl1pPr algn="ctr" defTabSz="914400" rtl="0" eaLnBrk="1" latinLnBrk="0" hangingPunct="1">
+      <a:lvl1pPr algn="ctr" defTabSz="1052474" rtl="0" eaLnBrk="1" latinLnBrk="0" hangingPunct="1">
         <a:spcBef>
           <a:spcPct val="0"/>
         </a:spcBef>
         <a:buNone/>
-        <a:defRPr sz="4400" kern="1200">
+        <a:defRPr sz="5100" kern="1200">
           <a:solidFill>
             <a:schemeClr val="tx1"/>
           </a:solidFill>
@@ -1962,12 +2848,27 @@
       </a:lvl1pPr>
     </p:titleStyle>
     <p:bodyStyle>
-      <a:lvl1pPr marL="342900" indent="-342900" algn="l" defTabSz="914400" rtl="0" eaLnBrk="1" latinLnBrk="0" hangingPunct="1">
+      <a:lvl1pPr marL="394678" indent="-394678" algn="l" defTabSz="1052474" rtl="0" eaLnBrk="1" latinLnBrk="0" hangingPunct="1">
         <a:spcBef>
           <a:spcPct val="20000"/>
         </a:spcBef>
         <a:buFont typeface="Arial" panose="020B0604020202020204" pitchFamily="34" charset="0"/>
         <a:buChar char="•"/>
+        <a:defRPr sz="3700" kern="1200">
+          <a:solidFill>
+            <a:schemeClr val="tx1"/>
+          </a:solidFill>
+          <a:latin typeface="+mn-lt"/>
+          <a:ea typeface="+mn-ea"/>
+          <a:cs typeface="+mn-cs"/>
+        </a:defRPr>
+      </a:lvl1pPr>
+      <a:lvl2pPr marL="855135" indent="-328898" algn="l" defTabSz="1052474" rtl="0" eaLnBrk="1" latinLnBrk="0" hangingPunct="1">
+        <a:spcBef>
+          <a:spcPct val="20000"/>
+        </a:spcBef>
+        <a:buFont typeface="Arial" panose="020B0604020202020204" pitchFamily="34" charset="0"/>
+        <a:buChar char="–"/>
         <a:defRPr sz="3200" kern="1200">
           <a:solidFill>
             <a:schemeClr val="tx1"/>
@@ -1976,13 +2877,13 @@
           <a:ea typeface="+mn-ea"/>
           <a:cs typeface="+mn-cs"/>
         </a:defRPr>
-      </a:lvl1pPr>
-      <a:lvl2pPr marL="742950" indent="-285750" algn="l" defTabSz="914400" rtl="0" eaLnBrk="1" latinLnBrk="0" hangingPunct="1">
+      </a:lvl2pPr>
+      <a:lvl3pPr marL="1315593" indent="-263119" algn="l" defTabSz="1052474" rtl="0" eaLnBrk="1" latinLnBrk="0" hangingPunct="1">
         <a:spcBef>
           <a:spcPct val="20000"/>
         </a:spcBef>
         <a:buFont typeface="Arial" panose="020B0604020202020204" pitchFamily="34" charset="0"/>
-        <a:buChar char="–"/>
+        <a:buChar char="•"/>
         <a:defRPr sz="2800" kern="1200">
           <a:solidFill>
             <a:schemeClr val="tx1"/>
@@ -1991,29 +2892,14 @@
           <a:ea typeface="+mn-ea"/>
           <a:cs typeface="+mn-cs"/>
         </a:defRPr>
-      </a:lvl2pPr>
-      <a:lvl3pPr marL="1143000" indent="-228600" algn="l" defTabSz="914400" rtl="0" eaLnBrk="1" latinLnBrk="0" hangingPunct="1">
-        <a:spcBef>
-          <a:spcPct val="20000"/>
-        </a:spcBef>
-        <a:buFont typeface="Arial" panose="020B0604020202020204" pitchFamily="34" charset="0"/>
-        <a:buChar char="•"/>
-        <a:defRPr sz="2400" kern="1200">
-          <a:solidFill>
-            <a:schemeClr val="tx1"/>
-          </a:solidFill>
-          <a:latin typeface="+mn-lt"/>
-          <a:ea typeface="+mn-ea"/>
-          <a:cs typeface="+mn-cs"/>
-        </a:defRPr>
       </a:lvl3pPr>
-      <a:lvl4pPr marL="1600200" indent="-228600" algn="l" defTabSz="914400" rtl="0" eaLnBrk="1" latinLnBrk="0" hangingPunct="1">
+      <a:lvl4pPr marL="1841830" indent="-263119" algn="l" defTabSz="1052474" rtl="0" eaLnBrk="1" latinLnBrk="0" hangingPunct="1">
         <a:spcBef>
           <a:spcPct val="20000"/>
         </a:spcBef>
         <a:buFont typeface="Arial" panose="020B0604020202020204" pitchFamily="34" charset="0"/>
         <a:buChar char="–"/>
-        <a:defRPr sz="2000" kern="1200">
+        <a:defRPr sz="2300" kern="1200">
           <a:solidFill>
             <a:schemeClr val="tx1"/>
           </a:solidFill>
@@ -2022,13 +2908,13 @@
           <a:cs typeface="+mn-cs"/>
         </a:defRPr>
       </a:lvl4pPr>
-      <a:lvl5pPr marL="2057400" indent="-228600" algn="l" defTabSz="914400" rtl="0" eaLnBrk="1" latinLnBrk="0" hangingPunct="1">
+      <a:lvl5pPr marL="2368067" indent="-263119" algn="l" defTabSz="1052474" rtl="0" eaLnBrk="1" latinLnBrk="0" hangingPunct="1">
         <a:spcBef>
           <a:spcPct val="20000"/>
         </a:spcBef>
         <a:buFont typeface="Arial" panose="020B0604020202020204" pitchFamily="34" charset="0"/>
         <a:buChar char="»"/>
-        <a:defRPr sz="2000" kern="1200">
+        <a:defRPr sz="2300" kern="1200">
           <a:solidFill>
             <a:schemeClr val="tx1"/>
           </a:solidFill>
@@ -2037,13 +2923,13 @@
           <a:cs typeface="+mn-cs"/>
         </a:defRPr>
       </a:lvl5pPr>
-      <a:lvl6pPr marL="2514600" indent="-228600" algn="l" defTabSz="914400" rtl="0" eaLnBrk="1" latinLnBrk="0" hangingPunct="1">
+      <a:lvl6pPr marL="2894305" indent="-263119" algn="l" defTabSz="1052474" rtl="0" eaLnBrk="1" latinLnBrk="0" hangingPunct="1">
         <a:spcBef>
           <a:spcPct val="20000"/>
         </a:spcBef>
         <a:buFont typeface="Arial" panose="020B0604020202020204" pitchFamily="34" charset="0"/>
         <a:buChar char="•"/>
-        <a:defRPr sz="2000" kern="1200">
+        <a:defRPr sz="2300" kern="1200">
           <a:solidFill>
             <a:schemeClr val="tx1"/>
           </a:solidFill>
@@ -2052,13 +2938,13 @@
           <a:cs typeface="+mn-cs"/>
         </a:defRPr>
       </a:lvl6pPr>
-      <a:lvl7pPr marL="2971800" indent="-228600" algn="l" defTabSz="914400" rtl="0" eaLnBrk="1" latinLnBrk="0" hangingPunct="1">
+      <a:lvl7pPr marL="3420542" indent="-263119" algn="l" defTabSz="1052474" rtl="0" eaLnBrk="1" latinLnBrk="0" hangingPunct="1">
         <a:spcBef>
           <a:spcPct val="20000"/>
         </a:spcBef>
         <a:buFont typeface="Arial" panose="020B0604020202020204" pitchFamily="34" charset="0"/>
         <a:buChar char="•"/>
-        <a:defRPr sz="2000" kern="1200">
+        <a:defRPr sz="2300" kern="1200">
           <a:solidFill>
             <a:schemeClr val="tx1"/>
           </a:solidFill>
@@ -2067,13 +2953,13 @@
           <a:cs typeface="+mn-cs"/>
         </a:defRPr>
       </a:lvl7pPr>
-      <a:lvl8pPr marL="3429000" indent="-228600" algn="l" defTabSz="914400" rtl="0" eaLnBrk="1" latinLnBrk="0" hangingPunct="1">
+      <a:lvl8pPr marL="3946779" indent="-263119" algn="l" defTabSz="1052474" rtl="0" eaLnBrk="1" latinLnBrk="0" hangingPunct="1">
         <a:spcBef>
           <a:spcPct val="20000"/>
         </a:spcBef>
         <a:buFont typeface="Arial" panose="020B0604020202020204" pitchFamily="34" charset="0"/>
         <a:buChar char="•"/>
-        <a:defRPr sz="2000" kern="1200">
+        <a:defRPr sz="2300" kern="1200">
           <a:solidFill>
             <a:schemeClr val="tx1"/>
           </a:solidFill>
@@ -2082,13 +2968,13 @@
           <a:cs typeface="+mn-cs"/>
         </a:defRPr>
       </a:lvl8pPr>
-      <a:lvl9pPr marL="3886200" indent="-228600" algn="l" defTabSz="914400" rtl="0" eaLnBrk="1" latinLnBrk="0" hangingPunct="1">
+      <a:lvl9pPr marL="4473016" indent="-263119" algn="l" defTabSz="1052474" rtl="0" eaLnBrk="1" latinLnBrk="0" hangingPunct="1">
         <a:spcBef>
           <a:spcPct val="20000"/>
         </a:spcBef>
         <a:buFont typeface="Arial" panose="020B0604020202020204" pitchFamily="34" charset="0"/>
         <a:buChar char="•"/>
-        <a:defRPr sz="2000" kern="1200">
+        <a:defRPr sz="2300" kern="1200">
           <a:solidFill>
             <a:schemeClr val="tx1"/>
           </a:solidFill>
@@ -2102,8 +2988,8 @@
       <a:defPPr>
         <a:defRPr lang="en-US"/>
       </a:defPPr>
-      <a:lvl1pPr marL="0" algn="l" defTabSz="914400" rtl="0" eaLnBrk="1" latinLnBrk="0" hangingPunct="1">
-        <a:defRPr sz="1800" kern="1200">
+      <a:lvl1pPr marL="0" algn="l" defTabSz="1052474" rtl="0" eaLnBrk="1" latinLnBrk="0" hangingPunct="1">
+        <a:defRPr sz="2100" kern="1200">
           <a:solidFill>
             <a:schemeClr val="tx1"/>
           </a:solidFill>
@@ -2112,8 +2998,8 @@
           <a:cs typeface="+mn-cs"/>
         </a:defRPr>
       </a:lvl1pPr>
-      <a:lvl2pPr marL="457200" algn="l" defTabSz="914400" rtl="0" eaLnBrk="1" latinLnBrk="0" hangingPunct="1">
-        <a:defRPr sz="1800" kern="1200">
+      <a:lvl2pPr marL="526237" algn="l" defTabSz="1052474" rtl="0" eaLnBrk="1" latinLnBrk="0" hangingPunct="1">
+        <a:defRPr sz="2100" kern="1200">
           <a:solidFill>
             <a:schemeClr val="tx1"/>
           </a:solidFill>
@@ -2122,8 +3008,8 @@
           <a:cs typeface="+mn-cs"/>
         </a:defRPr>
       </a:lvl2pPr>
-      <a:lvl3pPr marL="914400" algn="l" defTabSz="914400" rtl="0" eaLnBrk="1" latinLnBrk="0" hangingPunct="1">
-        <a:defRPr sz="1800" kern="1200">
+      <a:lvl3pPr marL="1052474" algn="l" defTabSz="1052474" rtl="0" eaLnBrk="1" latinLnBrk="0" hangingPunct="1">
+        <a:defRPr sz="2100" kern="1200">
           <a:solidFill>
             <a:schemeClr val="tx1"/>
           </a:solidFill>
@@ -2132,8 +3018,8 @@
           <a:cs typeface="+mn-cs"/>
         </a:defRPr>
       </a:lvl3pPr>
-      <a:lvl4pPr marL="1371600" algn="l" defTabSz="914400" rtl="0" eaLnBrk="1" latinLnBrk="0" hangingPunct="1">
-        <a:defRPr sz="1800" kern="1200">
+      <a:lvl4pPr marL="1578712" algn="l" defTabSz="1052474" rtl="0" eaLnBrk="1" latinLnBrk="0" hangingPunct="1">
+        <a:defRPr sz="2100" kern="1200">
           <a:solidFill>
             <a:schemeClr val="tx1"/>
           </a:solidFill>
@@ -2142,8 +3028,8 @@
           <a:cs typeface="+mn-cs"/>
         </a:defRPr>
       </a:lvl4pPr>
-      <a:lvl5pPr marL="1828800" algn="l" defTabSz="914400" rtl="0" eaLnBrk="1" latinLnBrk="0" hangingPunct="1">
-        <a:defRPr sz="1800" kern="1200">
+      <a:lvl5pPr marL="2104949" algn="l" defTabSz="1052474" rtl="0" eaLnBrk="1" latinLnBrk="0" hangingPunct="1">
+        <a:defRPr sz="2100" kern="1200">
           <a:solidFill>
             <a:schemeClr val="tx1"/>
           </a:solidFill>
@@ -2152,8 +3038,8 @@
           <a:cs typeface="+mn-cs"/>
         </a:defRPr>
       </a:lvl5pPr>
-      <a:lvl6pPr marL="2286000" algn="l" defTabSz="914400" rtl="0" eaLnBrk="1" latinLnBrk="0" hangingPunct="1">
-        <a:defRPr sz="1800" kern="1200">
+      <a:lvl6pPr marL="2631186" algn="l" defTabSz="1052474" rtl="0" eaLnBrk="1" latinLnBrk="0" hangingPunct="1">
+        <a:defRPr sz="2100" kern="1200">
           <a:solidFill>
             <a:schemeClr val="tx1"/>
           </a:solidFill>
@@ -2162,8 +3048,8 @@
           <a:cs typeface="+mn-cs"/>
         </a:defRPr>
       </a:lvl6pPr>
-      <a:lvl7pPr marL="2743200" algn="l" defTabSz="914400" rtl="0" eaLnBrk="1" latinLnBrk="0" hangingPunct="1">
-        <a:defRPr sz="1800" kern="1200">
+      <a:lvl7pPr marL="3157423" algn="l" defTabSz="1052474" rtl="0" eaLnBrk="1" latinLnBrk="0" hangingPunct="1">
+        <a:defRPr sz="2100" kern="1200">
           <a:solidFill>
             <a:schemeClr val="tx1"/>
           </a:solidFill>
@@ -2172,8 +3058,8 @@
           <a:cs typeface="+mn-cs"/>
         </a:defRPr>
       </a:lvl7pPr>
-      <a:lvl8pPr marL="3200400" algn="l" defTabSz="914400" rtl="0" eaLnBrk="1" latinLnBrk="0" hangingPunct="1">
-        <a:defRPr sz="1800" kern="1200">
+      <a:lvl8pPr marL="3683660" algn="l" defTabSz="1052474" rtl="0" eaLnBrk="1" latinLnBrk="0" hangingPunct="1">
+        <a:defRPr sz="2100" kern="1200">
           <a:solidFill>
             <a:schemeClr val="tx1"/>
           </a:solidFill>
@@ -2182,8 +3068,8 @@
           <a:cs typeface="+mn-cs"/>
         </a:defRPr>
       </a:lvl8pPr>
-      <a:lvl9pPr marL="3657600" algn="l" defTabSz="914400" rtl="0" eaLnBrk="1" latinLnBrk="0" hangingPunct="1">
-        <a:defRPr sz="1800" kern="1200">
+      <a:lvl9pPr marL="4209898" algn="l" defTabSz="1052474" rtl="0" eaLnBrk="1" latinLnBrk="0" hangingPunct="1">
+        <a:defRPr sz="2100" kern="1200">
           <a:solidFill>
             <a:schemeClr val="tx1"/>
           </a:solidFill>
@@ -2222,10 +3108,10 @@
         </p:nvGrpSpPr>
         <p:grpSpPr>
           <a:xfrm>
-            <a:off x="0" y="0"/>
-            <a:ext cx="9144000" cy="6858000"/>
-            <a:chOff x="0" y="0"/>
-            <a:chExt cx="9144000" cy="6858000"/>
+            <a:off x="1051560" y="1371442"/>
+            <a:ext cx="12984480" cy="7955280"/>
+            <a:chOff x="1051560" y="1371442"/>
+            <a:chExt cx="12984480" cy="7955280"/>
           </a:xfrm>
         </p:grpSpPr>
         <p:sp>
@@ -2236,8 +3122,8 @@
           </p:nvSpPr>
           <p:spPr>
             <a:xfrm>
-              <a:off x="0" y="0"/>
-              <a:ext cx="9144000" cy="6858000"/>
+              <a:off x="1051560" y="1371441"/>
+              <a:ext cx="12984480" cy="7955280"/>
             </a:xfrm>
             <a:prstGeom prst="rect">
               <a:avLst/>
@@ -2271,8 +3157,8 @@
           </p:nvSpPr>
           <p:spPr>
             <a:xfrm>
-              <a:off x="0" y="0"/>
-              <a:ext cx="9144000" cy="6858000"/>
+              <a:off x="1051560" y="1371441"/>
+              <a:ext cx="12984480" cy="7955280"/>
             </a:xfrm>
             <a:prstGeom prst="rect">
               <a:avLst/>
@@ -2297,8 +3183,8 @@
           </p:nvSpPr>
           <p:spPr>
             <a:xfrm>
-              <a:off x="544700" y="1034744"/>
-              <a:ext cx="7882677" cy="5060977"/>
+              <a:off x="1596260" y="2406185"/>
+              <a:ext cx="11723157" cy="6158257"/>
             </a:xfrm>
             <a:prstGeom prst="rect">
               <a:avLst/>
@@ -2323,21 +3209,21 @@
           </p:nvSpPr>
           <p:spPr>
             <a:xfrm>
-              <a:off x="544700" y="6095721"/>
-              <a:ext cx="7882677" cy="0"/>
+              <a:off x="1596260" y="8564443"/>
+              <a:ext cx="11723157" cy="0"/>
             </a:xfrm>
             <a:custGeom>
               <a:avLst/>
               <a:pathLst>
-                <a:path w="7882677" h="0">
+                <a:path w="11723157" h="0">
                   <a:moveTo>
                     <a:pt x="0" y="0"/>
                   </a:moveTo>
                   <a:lnTo>
-                    <a:pt x="7882677" y="0"/>
+                    <a:pt x="11723157" y="0"/>
                   </a:lnTo>
                   <a:lnTo>
-                    <a:pt x="7882677" y="0"/>
+                    <a:pt x="11723157" y="0"/>
                   </a:lnTo>
                 </a:path>
               </a:pathLst>
@@ -2366,21 +3252,21 @@
           </p:nvSpPr>
           <p:spPr>
             <a:xfrm>
-              <a:off x="544700" y="4720456"/>
-              <a:ext cx="7882677" cy="0"/>
+              <a:off x="1596260" y="6891003"/>
+              <a:ext cx="11723157" cy="0"/>
             </a:xfrm>
             <a:custGeom>
               <a:avLst/>
               <a:pathLst>
-                <a:path w="7882677" h="0">
+                <a:path w="11723157" h="0">
                   <a:moveTo>
                     <a:pt x="0" y="0"/>
                   </a:moveTo>
                   <a:lnTo>
-                    <a:pt x="7882677" y="0"/>
+                    <a:pt x="11723157" y="0"/>
                   </a:lnTo>
                   <a:lnTo>
-                    <a:pt x="7882677" y="0"/>
+                    <a:pt x="11723157" y="0"/>
                   </a:lnTo>
                 </a:path>
               </a:pathLst>
@@ -2409,21 +3295,21 @@
           </p:nvSpPr>
           <p:spPr>
             <a:xfrm>
-              <a:off x="544700" y="3345190"/>
-              <a:ext cx="7882677" cy="0"/>
+              <a:off x="1596260" y="5217564"/>
+              <a:ext cx="11723157" cy="0"/>
             </a:xfrm>
             <a:custGeom>
               <a:avLst/>
               <a:pathLst>
-                <a:path w="7882677" h="0">
+                <a:path w="11723157" h="0">
                   <a:moveTo>
                     <a:pt x="0" y="0"/>
                   </a:moveTo>
                   <a:lnTo>
-                    <a:pt x="7882677" y="0"/>
+                    <a:pt x="11723157" y="0"/>
                   </a:lnTo>
                   <a:lnTo>
-                    <a:pt x="7882677" y="0"/>
+                    <a:pt x="11723157" y="0"/>
                   </a:lnTo>
                 </a:path>
               </a:pathLst>
@@ -2452,21 +3338,21 @@
           </p:nvSpPr>
           <p:spPr>
             <a:xfrm>
-              <a:off x="544700" y="1969924"/>
-              <a:ext cx="7882677" cy="0"/>
+              <a:off x="1596260" y="3544124"/>
+              <a:ext cx="11723157" cy="0"/>
             </a:xfrm>
             <a:custGeom>
               <a:avLst/>
               <a:pathLst>
-                <a:path w="7882677" h="0">
+                <a:path w="11723157" h="0">
                   <a:moveTo>
                     <a:pt x="0" y="0"/>
                   </a:moveTo>
                   <a:lnTo>
-                    <a:pt x="7882677" y="0"/>
+                    <a:pt x="11723157" y="0"/>
                   </a:lnTo>
                   <a:lnTo>
-                    <a:pt x="7882677" y="0"/>
+                    <a:pt x="11723157" y="0"/>
                   </a:lnTo>
                 </a:path>
               </a:pathLst>
@@ -2495,8 +3381,8 @@
           </p:nvSpPr>
           <p:spPr>
             <a:xfrm>
-              <a:off x="616908" y="5985700"/>
-              <a:ext cx="216623" cy="0"/>
+              <a:off x="1703648" y="8430568"/>
+              <a:ext cx="322163" cy="0"/>
             </a:xfrm>
             <a:prstGeom prst="rect">
               <a:avLst/>
@@ -2521,8 +3407,8 @@
           </p:nvSpPr>
           <p:spPr>
             <a:xfrm>
-              <a:off x="616908" y="5930690"/>
-              <a:ext cx="216623" cy="55010"/>
+              <a:off x="1703648" y="8363630"/>
+              <a:ext cx="322163" cy="66937"/>
             </a:xfrm>
             <a:prstGeom prst="rect">
               <a:avLst/>
@@ -2547,8 +3433,8 @@
           </p:nvSpPr>
           <p:spPr>
             <a:xfrm>
-              <a:off x="616908" y="5875679"/>
-              <a:ext cx="216623" cy="55010"/>
+              <a:off x="1703648" y="8296693"/>
+              <a:ext cx="322163" cy="66937"/>
             </a:xfrm>
             <a:prstGeom prst="rect">
               <a:avLst/>
@@ -2573,8 +3459,8 @@
           </p:nvSpPr>
           <p:spPr>
             <a:xfrm>
-              <a:off x="616908" y="6040711"/>
-              <a:ext cx="216623" cy="0"/>
+              <a:off x="1703648" y="8497505"/>
+              <a:ext cx="322163" cy="0"/>
             </a:xfrm>
             <a:prstGeom prst="rect">
               <a:avLst/>
@@ -2599,8 +3485,8 @@
           </p:nvSpPr>
           <p:spPr>
             <a:xfrm>
-              <a:off x="616908" y="6040711"/>
-              <a:ext cx="216623" cy="0"/>
+              <a:off x="1703648" y="8497505"/>
+              <a:ext cx="322163" cy="0"/>
             </a:xfrm>
             <a:prstGeom prst="rect">
               <a:avLst/>
@@ -2625,8 +3511,8 @@
           </p:nvSpPr>
           <p:spPr>
             <a:xfrm>
-              <a:off x="616908" y="6040711"/>
-              <a:ext cx="216623" cy="0"/>
+              <a:off x="1703648" y="8497505"/>
+              <a:ext cx="322163" cy="0"/>
             </a:xfrm>
             <a:prstGeom prst="rect">
               <a:avLst/>
@@ -2651,8 +3537,8 @@
           </p:nvSpPr>
           <p:spPr>
             <a:xfrm>
-              <a:off x="616908" y="6040711"/>
-              <a:ext cx="216623" cy="55010"/>
+              <a:off x="1703648" y="8497505"/>
+              <a:ext cx="322163" cy="66937"/>
             </a:xfrm>
             <a:prstGeom prst="rect">
               <a:avLst/>
@@ -2677,8 +3563,8 @@
           </p:nvSpPr>
           <p:spPr>
             <a:xfrm>
-              <a:off x="616908" y="5765658"/>
-              <a:ext cx="216623" cy="110021"/>
+              <a:off x="1703648" y="8162817"/>
+              <a:ext cx="322163" cy="133875"/>
             </a:xfrm>
             <a:prstGeom prst="rect">
               <a:avLst/>
@@ -2703,8 +3589,8 @@
           </p:nvSpPr>
           <p:spPr>
             <a:xfrm>
-              <a:off x="616908" y="5985700"/>
-              <a:ext cx="216623" cy="55010"/>
+              <a:off x="1703648" y="8430568"/>
+              <a:ext cx="322163" cy="66937"/>
             </a:xfrm>
             <a:prstGeom prst="rect">
               <a:avLst/>
@@ -2729,8 +3615,8 @@
           </p:nvSpPr>
           <p:spPr>
             <a:xfrm>
-              <a:off x="616908" y="6040711"/>
-              <a:ext cx="216623" cy="0"/>
+              <a:off x="1703648" y="8497505"/>
+              <a:ext cx="322163" cy="0"/>
             </a:xfrm>
             <a:prstGeom prst="rect">
               <a:avLst/>
@@ -2755,8 +3641,8 @@
           </p:nvSpPr>
           <p:spPr>
             <a:xfrm>
-              <a:off x="616908" y="6040711"/>
-              <a:ext cx="216623" cy="0"/>
+              <a:off x="1703648" y="8497505"/>
+              <a:ext cx="322163" cy="0"/>
             </a:xfrm>
             <a:prstGeom prst="rect">
               <a:avLst/>
@@ -2781,8 +3667,8 @@
           </p:nvSpPr>
           <p:spPr>
             <a:xfrm>
-              <a:off x="917774" y="5765658"/>
-              <a:ext cx="216623" cy="110021"/>
+              <a:off x="2151097" y="8162817"/>
+              <a:ext cx="322163" cy="133875"/>
             </a:xfrm>
             <a:prstGeom prst="rect">
               <a:avLst/>
@@ -2807,8 +3693,8 @@
           </p:nvSpPr>
           <p:spPr>
             <a:xfrm>
-              <a:off x="917774" y="5710647"/>
-              <a:ext cx="216623" cy="55010"/>
+              <a:off x="2151097" y="8095880"/>
+              <a:ext cx="322163" cy="66937"/>
             </a:xfrm>
             <a:prstGeom prst="rect">
               <a:avLst/>
@@ -2833,8 +3719,8 @@
           </p:nvSpPr>
           <p:spPr>
             <a:xfrm>
-              <a:off x="917774" y="5655636"/>
-              <a:ext cx="216623" cy="55010"/>
+              <a:off x="2151097" y="8028942"/>
+              <a:ext cx="322163" cy="66937"/>
             </a:xfrm>
             <a:prstGeom prst="rect">
               <a:avLst/>
@@ -2859,8 +3745,8 @@
           </p:nvSpPr>
           <p:spPr>
             <a:xfrm>
-              <a:off x="917774" y="5985700"/>
-              <a:ext cx="216623" cy="0"/>
+              <a:off x="2151097" y="8430568"/>
+              <a:ext cx="322163" cy="0"/>
             </a:xfrm>
             <a:prstGeom prst="rect">
               <a:avLst/>
@@ -2885,8 +3771,8 @@
           </p:nvSpPr>
           <p:spPr>
             <a:xfrm>
-              <a:off x="917774" y="5985700"/>
-              <a:ext cx="216623" cy="0"/>
+              <a:off x="2151097" y="8430568"/>
+              <a:ext cx="322163" cy="0"/>
             </a:xfrm>
             <a:prstGeom prst="rect">
               <a:avLst/>
@@ -2911,8 +3797,8 @@
           </p:nvSpPr>
           <p:spPr>
             <a:xfrm>
-              <a:off x="917774" y="5930690"/>
-              <a:ext cx="216623" cy="55010"/>
+              <a:off x="2151097" y="8363630"/>
+              <a:ext cx="322163" cy="66937"/>
             </a:xfrm>
             <a:prstGeom prst="rect">
               <a:avLst/>
@@ -2937,8 +3823,8 @@
           </p:nvSpPr>
           <p:spPr>
             <a:xfrm>
-              <a:off x="917774" y="6040711"/>
-              <a:ext cx="216623" cy="55010"/>
+              <a:off x="2151097" y="8497505"/>
+              <a:ext cx="322163" cy="66937"/>
             </a:xfrm>
             <a:prstGeom prst="rect">
               <a:avLst/>
@@ -2963,8 +3849,8 @@
           </p:nvSpPr>
           <p:spPr>
             <a:xfrm>
-              <a:off x="917774" y="5490605"/>
-              <a:ext cx="216623" cy="165031"/>
+              <a:off x="2151097" y="7828130"/>
+              <a:ext cx="322163" cy="200812"/>
             </a:xfrm>
             <a:prstGeom prst="rect">
               <a:avLst/>
@@ -2989,8 +3875,8 @@
           </p:nvSpPr>
           <p:spPr>
             <a:xfrm>
-              <a:off x="917774" y="5875679"/>
-              <a:ext cx="216623" cy="55010"/>
+              <a:off x="2151097" y="8296693"/>
+              <a:ext cx="322163" cy="66937"/>
             </a:xfrm>
             <a:prstGeom prst="rect">
               <a:avLst/>
@@ -3015,8 +3901,8 @@
           </p:nvSpPr>
           <p:spPr>
             <a:xfrm>
-              <a:off x="917774" y="5985700"/>
-              <a:ext cx="216623" cy="0"/>
+              <a:off x="2151097" y="8430568"/>
+              <a:ext cx="322163" cy="0"/>
             </a:xfrm>
             <a:prstGeom prst="rect">
               <a:avLst/>
@@ -3041,8 +3927,8 @@
           </p:nvSpPr>
           <p:spPr>
             <a:xfrm>
-              <a:off x="917774" y="5985700"/>
-              <a:ext cx="216623" cy="55010"/>
+              <a:off x="2151097" y="8430568"/>
+              <a:ext cx="322163" cy="66937"/>
             </a:xfrm>
             <a:prstGeom prst="rect">
               <a:avLst/>
@@ -3067,8 +3953,8 @@
           </p:nvSpPr>
           <p:spPr>
             <a:xfrm>
-              <a:off x="1218639" y="5875679"/>
-              <a:ext cx="216623" cy="0"/>
+              <a:off x="2598545" y="8296693"/>
+              <a:ext cx="322163" cy="0"/>
             </a:xfrm>
             <a:prstGeom prst="rect">
               <a:avLst/>
@@ -3093,8 +3979,8 @@
           </p:nvSpPr>
           <p:spPr>
             <a:xfrm>
-              <a:off x="1218639" y="5875679"/>
-              <a:ext cx="216623" cy="0"/>
+              <a:off x="2598545" y="8296693"/>
+              <a:ext cx="322163" cy="0"/>
             </a:xfrm>
             <a:prstGeom prst="rect">
               <a:avLst/>
@@ -3119,8 +4005,8 @@
           </p:nvSpPr>
           <p:spPr>
             <a:xfrm>
-              <a:off x="1218639" y="5875679"/>
-              <a:ext cx="216623" cy="0"/>
+              <a:off x="2598545" y="8296693"/>
+              <a:ext cx="322163" cy="0"/>
             </a:xfrm>
             <a:prstGeom prst="rect">
               <a:avLst/>
@@ -3145,8 +4031,8 @@
           </p:nvSpPr>
           <p:spPr>
             <a:xfrm>
-              <a:off x="1218639" y="6040711"/>
-              <a:ext cx="216623" cy="0"/>
+              <a:off x="2598545" y="8497505"/>
+              <a:ext cx="322163" cy="0"/>
             </a:xfrm>
             <a:prstGeom prst="rect">
               <a:avLst/>
@@ -3171,8 +4057,8 @@
           </p:nvSpPr>
           <p:spPr>
             <a:xfrm>
-              <a:off x="1218639" y="6095721"/>
-              <a:ext cx="216623" cy="0"/>
+              <a:off x="2598545" y="8564443"/>
+              <a:ext cx="322163" cy="0"/>
             </a:xfrm>
             <a:prstGeom prst="rect">
               <a:avLst/>
@@ -3197,8 +4083,8 @@
           </p:nvSpPr>
           <p:spPr>
             <a:xfrm>
-              <a:off x="1218639" y="5930690"/>
-              <a:ext cx="216623" cy="110021"/>
+              <a:off x="2598545" y="8363630"/>
+              <a:ext cx="322163" cy="133875"/>
             </a:xfrm>
             <a:prstGeom prst="rect">
               <a:avLst/>
@@ -3223,8 +4109,8 @@
           </p:nvSpPr>
           <p:spPr>
             <a:xfrm>
-              <a:off x="1218639" y="6095721"/>
-              <a:ext cx="216623" cy="0"/>
+              <a:off x="2598545" y="8564443"/>
+              <a:ext cx="322163" cy="0"/>
             </a:xfrm>
             <a:prstGeom prst="rect">
               <a:avLst/>
@@ -3249,8 +4135,8 @@
           </p:nvSpPr>
           <p:spPr>
             <a:xfrm>
-              <a:off x="1218639" y="5655636"/>
-              <a:ext cx="216623" cy="220042"/>
+              <a:off x="2598545" y="8028942"/>
+              <a:ext cx="322163" cy="267750"/>
             </a:xfrm>
             <a:prstGeom prst="rect">
               <a:avLst/>
@@ -3275,8 +4161,8 @@
           </p:nvSpPr>
           <p:spPr>
             <a:xfrm>
-              <a:off x="1218639" y="5875679"/>
-              <a:ext cx="216623" cy="55010"/>
+              <a:off x="2598545" y="8296693"/>
+              <a:ext cx="322163" cy="66937"/>
             </a:xfrm>
             <a:prstGeom prst="rect">
               <a:avLst/>
@@ -3301,8 +4187,8 @@
           </p:nvSpPr>
           <p:spPr>
             <a:xfrm>
-              <a:off x="1218639" y="6040711"/>
-              <a:ext cx="216623" cy="55010"/>
+              <a:off x="2598545" y="8497505"/>
+              <a:ext cx="322163" cy="66937"/>
             </a:xfrm>
             <a:prstGeom prst="rect">
               <a:avLst/>
@@ -3327,8 +4213,8 @@
           </p:nvSpPr>
           <p:spPr>
             <a:xfrm>
-              <a:off x="1218639" y="6095721"/>
-              <a:ext cx="216623" cy="0"/>
+              <a:off x="2598545" y="8564443"/>
+              <a:ext cx="322163" cy="0"/>
             </a:xfrm>
             <a:prstGeom prst="rect">
               <a:avLst/>
@@ -3353,8 +4239,8 @@
           </p:nvSpPr>
           <p:spPr>
             <a:xfrm>
-              <a:off x="1519505" y="5820668"/>
-              <a:ext cx="216623" cy="55010"/>
+              <a:off x="3045994" y="8229755"/>
+              <a:ext cx="322163" cy="66937"/>
             </a:xfrm>
             <a:prstGeom prst="rect">
               <a:avLst/>
@@ -3379,8 +4265,8 @@
           </p:nvSpPr>
           <p:spPr>
             <a:xfrm>
-              <a:off x="1519505" y="5820668"/>
-              <a:ext cx="216623" cy="0"/>
+              <a:off x="3045994" y="8229755"/>
+              <a:ext cx="322163" cy="0"/>
             </a:xfrm>
             <a:prstGeom prst="rect">
               <a:avLst/>
@@ -3405,8 +4291,8 @@
           </p:nvSpPr>
           <p:spPr>
             <a:xfrm>
-              <a:off x="1519505" y="5820668"/>
-              <a:ext cx="216623" cy="0"/>
+              <a:off x="3045994" y="8229755"/>
+              <a:ext cx="322163" cy="0"/>
             </a:xfrm>
             <a:prstGeom prst="rect">
               <a:avLst/>
@@ -3431,8 +4317,8 @@
           </p:nvSpPr>
           <p:spPr>
             <a:xfrm>
-              <a:off x="1519505" y="5930690"/>
-              <a:ext cx="216623" cy="0"/>
+              <a:off x="3045994" y="8363630"/>
+              <a:ext cx="322163" cy="0"/>
             </a:xfrm>
             <a:prstGeom prst="rect">
               <a:avLst/>
@@ -3457,8 +4343,8 @@
           </p:nvSpPr>
           <p:spPr>
             <a:xfrm>
-              <a:off x="1519505" y="5930690"/>
-              <a:ext cx="216623" cy="0"/>
+              <a:off x="3045994" y="8363630"/>
+              <a:ext cx="322163" cy="0"/>
             </a:xfrm>
             <a:prstGeom prst="rect">
               <a:avLst/>
@@ -3483,8 +4369,8 @@
           </p:nvSpPr>
           <p:spPr>
             <a:xfrm>
-              <a:off x="1519505" y="5930690"/>
-              <a:ext cx="216623" cy="0"/>
+              <a:off x="3045994" y="8363630"/>
+              <a:ext cx="322163" cy="0"/>
             </a:xfrm>
             <a:prstGeom prst="rect">
               <a:avLst/>
@@ -3509,8 +4395,8 @@
           </p:nvSpPr>
           <p:spPr>
             <a:xfrm>
-              <a:off x="1519505" y="5930690"/>
-              <a:ext cx="216623" cy="165031"/>
+              <a:off x="3045994" y="8363630"/>
+              <a:ext cx="322163" cy="200812"/>
             </a:xfrm>
             <a:prstGeom prst="rect">
               <a:avLst/>
@@ -3535,8 +4421,8 @@
           </p:nvSpPr>
           <p:spPr>
             <a:xfrm>
-              <a:off x="1519505" y="5545615"/>
-              <a:ext cx="216623" cy="275053"/>
+              <a:off x="3045994" y="7895067"/>
+              <a:ext cx="322163" cy="334687"/>
             </a:xfrm>
             <a:prstGeom prst="rect">
               <a:avLst/>
@@ -3561,8 +4447,8 @@
           </p:nvSpPr>
           <p:spPr>
             <a:xfrm>
-              <a:off x="1519505" y="5875679"/>
-              <a:ext cx="216623" cy="55010"/>
+              <a:off x="3045994" y="8296693"/>
+              <a:ext cx="322163" cy="66937"/>
             </a:xfrm>
             <a:prstGeom prst="rect">
               <a:avLst/>
@@ -3587,8 +4473,8 @@
           </p:nvSpPr>
           <p:spPr>
             <a:xfrm>
-              <a:off x="1519505" y="5930690"/>
-              <a:ext cx="216623" cy="0"/>
+              <a:off x="3045994" y="8363630"/>
+              <a:ext cx="322163" cy="0"/>
             </a:xfrm>
             <a:prstGeom prst="rect">
               <a:avLst/>
@@ -3613,8 +4499,8 @@
           </p:nvSpPr>
           <p:spPr>
             <a:xfrm>
-              <a:off x="1519505" y="5930690"/>
-              <a:ext cx="216623" cy="0"/>
+              <a:off x="3045994" y="8363630"/>
+              <a:ext cx="322163" cy="0"/>
             </a:xfrm>
             <a:prstGeom prst="rect">
               <a:avLst/>
@@ -3639,8 +4525,8 @@
           </p:nvSpPr>
           <p:spPr>
             <a:xfrm>
-              <a:off x="1820370" y="5930690"/>
-              <a:ext cx="216623" cy="0"/>
+              <a:off x="3493443" y="8363630"/>
+              <a:ext cx="322163" cy="0"/>
             </a:xfrm>
             <a:prstGeom prst="rect">
               <a:avLst/>
@@ -3665,8 +4551,8 @@
           </p:nvSpPr>
           <p:spPr>
             <a:xfrm>
-              <a:off x="1820370" y="5875679"/>
-              <a:ext cx="216623" cy="55010"/>
+              <a:off x="3493443" y="8296693"/>
+              <a:ext cx="322163" cy="66937"/>
             </a:xfrm>
             <a:prstGeom prst="rect">
               <a:avLst/>
@@ -3691,8 +4577,8 @@
           </p:nvSpPr>
           <p:spPr>
             <a:xfrm>
-              <a:off x="1820370" y="5875679"/>
-              <a:ext cx="216623" cy="0"/>
+              <a:off x="3493443" y="8296693"/>
+              <a:ext cx="322163" cy="0"/>
             </a:xfrm>
             <a:prstGeom prst="rect">
               <a:avLst/>
@@ -3717,8 +4603,8 @@
           </p:nvSpPr>
           <p:spPr>
             <a:xfrm>
-              <a:off x="1820370" y="6040711"/>
-              <a:ext cx="216623" cy="0"/>
+              <a:off x="3493443" y="8497505"/>
+              <a:ext cx="322163" cy="0"/>
             </a:xfrm>
             <a:prstGeom prst="rect">
               <a:avLst/>
@@ -3743,8 +4629,8 @@
           </p:nvSpPr>
           <p:spPr>
             <a:xfrm>
-              <a:off x="1820370" y="6095721"/>
-              <a:ext cx="216623" cy="0"/>
+              <a:off x="3493443" y="8564443"/>
+              <a:ext cx="322163" cy="0"/>
             </a:xfrm>
             <a:prstGeom prst="rect">
               <a:avLst/>
@@ -3769,8 +4655,8 @@
           </p:nvSpPr>
           <p:spPr>
             <a:xfrm>
-              <a:off x="1820370" y="5985700"/>
-              <a:ext cx="216623" cy="55010"/>
+              <a:off x="3493443" y="8430568"/>
+              <a:ext cx="322163" cy="66937"/>
             </a:xfrm>
             <a:prstGeom prst="rect">
               <a:avLst/>
@@ -3795,8 +4681,8 @@
           </p:nvSpPr>
           <p:spPr>
             <a:xfrm>
-              <a:off x="1820370" y="6095721"/>
-              <a:ext cx="216623" cy="0"/>
+              <a:off x="3493443" y="8564443"/>
+              <a:ext cx="322163" cy="0"/>
             </a:xfrm>
             <a:prstGeom prst="rect">
               <a:avLst/>
@@ -3821,8 +4707,8 @@
           </p:nvSpPr>
           <p:spPr>
             <a:xfrm>
-              <a:off x="1820370" y="5710647"/>
-              <a:ext cx="216623" cy="165031"/>
+              <a:off x="3493443" y="8095880"/>
+              <a:ext cx="322163" cy="200812"/>
             </a:xfrm>
             <a:prstGeom prst="rect">
               <a:avLst/>
@@ -3847,8 +4733,8 @@
           </p:nvSpPr>
           <p:spPr>
             <a:xfrm>
-              <a:off x="1820370" y="5930690"/>
-              <a:ext cx="216623" cy="55010"/>
+              <a:off x="3493443" y="8363630"/>
+              <a:ext cx="322163" cy="66937"/>
             </a:xfrm>
             <a:prstGeom prst="rect">
               <a:avLst/>
@@ -3873,8 +4759,8 @@
           </p:nvSpPr>
           <p:spPr>
             <a:xfrm>
-              <a:off x="1820370" y="6040711"/>
-              <a:ext cx="216623" cy="55010"/>
+              <a:off x="3493443" y="8497505"/>
+              <a:ext cx="322163" cy="66937"/>
             </a:xfrm>
             <a:prstGeom prst="rect">
               <a:avLst/>
@@ -3899,8 +4785,8 @@
           </p:nvSpPr>
           <p:spPr>
             <a:xfrm>
-              <a:off x="1820370" y="6095721"/>
-              <a:ext cx="216623" cy="0"/>
+              <a:off x="3493443" y="8564443"/>
+              <a:ext cx="322163" cy="0"/>
             </a:xfrm>
             <a:prstGeom prst="rect">
               <a:avLst/>
@@ -3925,8 +4811,8 @@
           </p:nvSpPr>
           <p:spPr>
             <a:xfrm>
-              <a:off x="2121236" y="5930690"/>
-              <a:ext cx="216623" cy="0"/>
+              <a:off x="3940892" y="8363630"/>
+              <a:ext cx="322163" cy="0"/>
             </a:xfrm>
             <a:prstGeom prst="rect">
               <a:avLst/>
@@ -3951,8 +4837,8 @@
           </p:nvSpPr>
           <p:spPr>
             <a:xfrm>
-              <a:off x="2121236" y="5930690"/>
-              <a:ext cx="216623" cy="0"/>
+              <a:off x="3940892" y="8363630"/>
+              <a:ext cx="322163" cy="0"/>
             </a:xfrm>
             <a:prstGeom prst="rect">
               <a:avLst/>
@@ -3977,8 +4863,8 @@
           </p:nvSpPr>
           <p:spPr>
             <a:xfrm>
-              <a:off x="2121236" y="5875679"/>
-              <a:ext cx="216623" cy="55010"/>
+              <a:off x="3940892" y="8296693"/>
+              <a:ext cx="322163" cy="66937"/>
             </a:xfrm>
             <a:prstGeom prst="rect">
               <a:avLst/>
@@ -4003,8 +4889,8 @@
           </p:nvSpPr>
           <p:spPr>
             <a:xfrm>
-              <a:off x="2121236" y="5930690"/>
-              <a:ext cx="216623" cy="0"/>
+              <a:off x="3940892" y="8363630"/>
+              <a:ext cx="322163" cy="0"/>
             </a:xfrm>
             <a:prstGeom prst="rect">
               <a:avLst/>
@@ -4029,8 +4915,8 @@
           </p:nvSpPr>
           <p:spPr>
             <a:xfrm>
-              <a:off x="2121236" y="6040711"/>
-              <a:ext cx="216623" cy="0"/>
+              <a:off x="3940892" y="8497505"/>
+              <a:ext cx="322163" cy="0"/>
             </a:xfrm>
             <a:prstGeom prst="rect">
               <a:avLst/>
@@ -4055,8 +4941,8 @@
           </p:nvSpPr>
           <p:spPr>
             <a:xfrm>
-              <a:off x="2121236" y="5930690"/>
-              <a:ext cx="216623" cy="0"/>
+              <a:off x="3940892" y="8363630"/>
+              <a:ext cx="322163" cy="0"/>
             </a:xfrm>
             <a:prstGeom prst="rect">
               <a:avLst/>
@@ -4081,8 +4967,8 @@
           </p:nvSpPr>
           <p:spPr>
             <a:xfrm>
-              <a:off x="2121236" y="6040711"/>
-              <a:ext cx="216623" cy="55010"/>
+              <a:off x="3940892" y="8497505"/>
+              <a:ext cx="322163" cy="66937"/>
             </a:xfrm>
             <a:prstGeom prst="rect">
               <a:avLst/>
@@ -4107,8 +4993,8 @@
           </p:nvSpPr>
           <p:spPr>
             <a:xfrm>
-              <a:off x="2121236" y="5710647"/>
-              <a:ext cx="216623" cy="165031"/>
+              <a:off x="3940892" y="8095880"/>
+              <a:ext cx="322163" cy="200812"/>
             </a:xfrm>
             <a:prstGeom prst="rect">
               <a:avLst/>
@@ -4133,8 +5019,8 @@
           </p:nvSpPr>
           <p:spPr>
             <a:xfrm>
-              <a:off x="2121236" y="5930690"/>
-              <a:ext cx="216623" cy="0"/>
+              <a:off x="3940892" y="8363630"/>
+              <a:ext cx="322163" cy="0"/>
             </a:xfrm>
             <a:prstGeom prst="rect">
               <a:avLst/>
@@ -4159,8 +5045,8 @@
           </p:nvSpPr>
           <p:spPr>
             <a:xfrm>
-              <a:off x="2121236" y="5930690"/>
-              <a:ext cx="216623" cy="110021"/>
+              <a:off x="3940892" y="8363630"/>
+              <a:ext cx="322163" cy="133875"/>
             </a:xfrm>
             <a:prstGeom prst="rect">
               <a:avLst/>
@@ -4185,8 +5071,8 @@
           </p:nvSpPr>
           <p:spPr>
             <a:xfrm>
-              <a:off x="2121236" y="6040711"/>
-              <a:ext cx="216623" cy="0"/>
+              <a:off x="3940892" y="8497505"/>
+              <a:ext cx="322163" cy="0"/>
             </a:xfrm>
             <a:prstGeom prst="rect">
               <a:avLst/>
@@ -4211,8 +5097,8 @@
           </p:nvSpPr>
           <p:spPr>
             <a:xfrm>
-              <a:off x="2422101" y="5325573"/>
-              <a:ext cx="216623" cy="55010"/>
+              <a:off x="4388340" y="7627317"/>
+              <a:ext cx="322163" cy="66937"/>
             </a:xfrm>
             <a:prstGeom prst="rect">
               <a:avLst/>
@@ -4237,8 +5123,8 @@
           </p:nvSpPr>
           <p:spPr>
             <a:xfrm>
-              <a:off x="2422101" y="5215551"/>
-              <a:ext cx="216623" cy="110021"/>
+              <a:off x="4388340" y="7493442"/>
+              <a:ext cx="322163" cy="133875"/>
             </a:xfrm>
             <a:prstGeom prst="rect">
               <a:avLst/>
@@ -4263,8 +5149,8 @@
           </p:nvSpPr>
           <p:spPr>
             <a:xfrm>
-              <a:off x="2422101" y="4720456"/>
-              <a:ext cx="216623" cy="495095"/>
+              <a:off x="4388340" y="6891003"/>
+              <a:ext cx="322163" cy="602438"/>
             </a:xfrm>
             <a:prstGeom prst="rect">
               <a:avLst/>
@@ -4289,8 +5175,8 @@
           </p:nvSpPr>
           <p:spPr>
             <a:xfrm>
-              <a:off x="2422101" y="5600626"/>
-              <a:ext cx="216623" cy="110021"/>
+              <a:off x="4388340" y="7962005"/>
+              <a:ext cx="322163" cy="133875"/>
             </a:xfrm>
             <a:prstGeom prst="rect">
               <a:avLst/>
@@ -4315,8 +5201,8 @@
           </p:nvSpPr>
           <p:spPr>
             <a:xfrm>
-              <a:off x="2422101" y="5710647"/>
-              <a:ext cx="216623" cy="110021"/>
+              <a:off x="4388340" y="8095880"/>
+              <a:ext cx="322163" cy="133875"/>
             </a:xfrm>
             <a:prstGeom prst="rect">
               <a:avLst/>
@@ -4341,8 +5227,8 @@
           </p:nvSpPr>
           <p:spPr>
             <a:xfrm>
-              <a:off x="2422101" y="5600626"/>
-              <a:ext cx="216623" cy="0"/>
+              <a:off x="4388340" y="7962005"/>
+              <a:ext cx="322163" cy="0"/>
             </a:xfrm>
             <a:prstGeom prst="rect">
               <a:avLst/>
@@ -4367,8 +5253,8 @@
           </p:nvSpPr>
           <p:spPr>
             <a:xfrm>
-              <a:off x="2422101" y="5875679"/>
-              <a:ext cx="216623" cy="220042"/>
+              <a:off x="4388340" y="8296693"/>
+              <a:ext cx="322163" cy="267750"/>
             </a:xfrm>
             <a:prstGeom prst="rect">
               <a:avLst/>
@@ -4393,8 +5279,8 @@
           </p:nvSpPr>
           <p:spPr>
             <a:xfrm>
-              <a:off x="2422101" y="3400201"/>
-              <a:ext cx="216623" cy="1320255"/>
+              <a:off x="4388340" y="5284501"/>
+              <a:ext cx="322163" cy="1606502"/>
             </a:xfrm>
             <a:prstGeom prst="rect">
               <a:avLst/>
@@ -4419,8 +5305,8 @@
           </p:nvSpPr>
           <p:spPr>
             <a:xfrm>
-              <a:off x="2422101" y="5380583"/>
-              <a:ext cx="216623" cy="220042"/>
+              <a:off x="4388340" y="7694254"/>
+              <a:ext cx="322163" cy="267750"/>
             </a:xfrm>
             <a:prstGeom prst="rect">
               <a:avLst/>
@@ -4445,8 +5331,8 @@
           </p:nvSpPr>
           <p:spPr>
             <a:xfrm>
-              <a:off x="2422101" y="5710647"/>
-              <a:ext cx="216623" cy="0"/>
+              <a:off x="4388340" y="8095880"/>
+              <a:ext cx="322163" cy="0"/>
             </a:xfrm>
             <a:prstGeom prst="rect">
               <a:avLst/>
@@ -4471,8 +5357,8 @@
           </p:nvSpPr>
           <p:spPr>
             <a:xfrm>
-              <a:off x="2422101" y="5820668"/>
-              <a:ext cx="216623" cy="55010"/>
+              <a:off x="4388340" y="8229755"/>
+              <a:ext cx="322163" cy="66937"/>
             </a:xfrm>
             <a:prstGeom prst="rect">
               <a:avLst/>
@@ -4497,8 +5383,8 @@
           </p:nvSpPr>
           <p:spPr>
             <a:xfrm>
-              <a:off x="2722967" y="5765658"/>
-              <a:ext cx="216623" cy="110021"/>
+              <a:off x="4835789" y="8162817"/>
+              <a:ext cx="322163" cy="133875"/>
             </a:xfrm>
             <a:prstGeom prst="rect">
               <a:avLst/>
@@ -4523,8 +5409,8 @@
           </p:nvSpPr>
           <p:spPr>
             <a:xfrm>
-              <a:off x="2722967" y="5655636"/>
-              <a:ext cx="216623" cy="110021"/>
+              <a:off x="4835789" y="8028942"/>
+              <a:ext cx="322163" cy="133875"/>
             </a:xfrm>
             <a:prstGeom prst="rect">
               <a:avLst/>
@@ -4549,8 +5435,8 @@
           </p:nvSpPr>
           <p:spPr>
             <a:xfrm>
-              <a:off x="2722967" y="5380583"/>
-              <a:ext cx="216623" cy="275053"/>
+              <a:off x="4835789" y="7694254"/>
+              <a:ext cx="322163" cy="334687"/>
             </a:xfrm>
             <a:prstGeom prst="rect">
               <a:avLst/>
@@ -4575,8 +5461,8 @@
           </p:nvSpPr>
           <p:spPr>
             <a:xfrm>
-              <a:off x="2722967" y="5930690"/>
-              <a:ext cx="216623" cy="0"/>
+              <a:off x="4835789" y="8363630"/>
+              <a:ext cx="322163" cy="0"/>
             </a:xfrm>
             <a:prstGeom prst="rect">
               <a:avLst/>
@@ -4601,8 +5487,8 @@
           </p:nvSpPr>
           <p:spPr>
             <a:xfrm>
-              <a:off x="2722967" y="5930690"/>
-              <a:ext cx="216623" cy="0"/>
+              <a:off x="4835789" y="8363630"/>
+              <a:ext cx="322163" cy="0"/>
             </a:xfrm>
             <a:prstGeom prst="rect">
               <a:avLst/>
@@ -4627,8 +5513,8 @@
           </p:nvSpPr>
           <p:spPr>
             <a:xfrm>
-              <a:off x="2722967" y="5875679"/>
-              <a:ext cx="216623" cy="55010"/>
+              <a:off x="4835789" y="8296693"/>
+              <a:ext cx="322163" cy="66937"/>
             </a:xfrm>
             <a:prstGeom prst="rect">
               <a:avLst/>
@@ -4653,8 +5539,8 @@
           </p:nvSpPr>
           <p:spPr>
             <a:xfrm>
-              <a:off x="2722967" y="5930690"/>
-              <a:ext cx="216623" cy="165031"/>
+              <a:off x="4835789" y="8363630"/>
+              <a:ext cx="322163" cy="200812"/>
             </a:xfrm>
             <a:prstGeom prst="rect">
               <a:avLst/>
@@ -4679,8 +5565,8 @@
           </p:nvSpPr>
           <p:spPr>
             <a:xfrm>
-              <a:off x="2722967" y="4555424"/>
-              <a:ext cx="216623" cy="825159"/>
+              <a:off x="4835789" y="6690191"/>
+              <a:ext cx="322163" cy="1004063"/>
             </a:xfrm>
             <a:prstGeom prst="rect">
               <a:avLst/>
@@ -4705,8 +5591,8 @@
           </p:nvSpPr>
           <p:spPr>
             <a:xfrm>
-              <a:off x="2722967" y="5875679"/>
-              <a:ext cx="216623" cy="0"/>
+              <a:off x="4835789" y="8296693"/>
+              <a:ext cx="322163" cy="0"/>
             </a:xfrm>
             <a:prstGeom prst="rect">
               <a:avLst/>
@@ -4731,8 +5617,8 @@
           </p:nvSpPr>
           <p:spPr>
             <a:xfrm>
-              <a:off x="2722967" y="5930690"/>
-              <a:ext cx="216623" cy="0"/>
+              <a:off x="4835789" y="8363630"/>
+              <a:ext cx="322163" cy="0"/>
             </a:xfrm>
             <a:prstGeom prst="rect">
               <a:avLst/>
@@ -4757,8 +5643,8 @@
           </p:nvSpPr>
           <p:spPr>
             <a:xfrm>
-              <a:off x="2722967" y="5930690"/>
-              <a:ext cx="216623" cy="0"/>
+              <a:off x="4835789" y="8363630"/>
+              <a:ext cx="322163" cy="0"/>
             </a:xfrm>
             <a:prstGeom prst="rect">
               <a:avLst/>
@@ -4783,8 +5669,8 @@
           </p:nvSpPr>
           <p:spPr>
             <a:xfrm>
-              <a:off x="3023832" y="5765658"/>
-              <a:ext cx="216623" cy="55010"/>
+              <a:off x="5283238" y="8162817"/>
+              <a:ext cx="322163" cy="66937"/>
             </a:xfrm>
             <a:prstGeom prst="rect">
               <a:avLst/>
@@ -4809,8 +5695,8 @@
           </p:nvSpPr>
           <p:spPr>
             <a:xfrm>
-              <a:off x="3023832" y="5655636"/>
-              <a:ext cx="216623" cy="110021"/>
+              <a:off x="5283238" y="8028942"/>
+              <a:ext cx="322163" cy="133875"/>
             </a:xfrm>
             <a:prstGeom prst="rect">
               <a:avLst/>
@@ -4835,8 +5721,8 @@
           </p:nvSpPr>
           <p:spPr>
             <a:xfrm>
-              <a:off x="3023832" y="5545615"/>
-              <a:ext cx="216623" cy="110021"/>
+              <a:off x="5283238" y="7895067"/>
+              <a:ext cx="322163" cy="133875"/>
             </a:xfrm>
             <a:prstGeom prst="rect">
               <a:avLst/>
@@ -4861,8 +5747,8 @@
           </p:nvSpPr>
           <p:spPr>
             <a:xfrm>
-              <a:off x="3023832" y="5875679"/>
-              <a:ext cx="216623" cy="0"/>
+              <a:off x="5283238" y="8296693"/>
+              <a:ext cx="322163" cy="0"/>
             </a:xfrm>
             <a:prstGeom prst="rect">
               <a:avLst/>
@@ -4887,8 +5773,8 @@
           </p:nvSpPr>
           <p:spPr>
             <a:xfrm>
-              <a:off x="3023832" y="5930690"/>
-              <a:ext cx="216623" cy="55010"/>
+              <a:off x="5283238" y="8363630"/>
+              <a:ext cx="322163" cy="66937"/>
             </a:xfrm>
             <a:prstGeom prst="rect">
               <a:avLst/>
@@ -4913,8 +5799,8 @@
           </p:nvSpPr>
           <p:spPr>
             <a:xfrm>
-              <a:off x="3023832" y="5875679"/>
-              <a:ext cx="216623" cy="0"/>
+              <a:off x="5283238" y="8296693"/>
+              <a:ext cx="322163" cy="0"/>
             </a:xfrm>
             <a:prstGeom prst="rect">
               <a:avLst/>
@@ -4939,8 +5825,8 @@
           </p:nvSpPr>
           <p:spPr>
             <a:xfrm>
-              <a:off x="3023832" y="5985700"/>
-              <a:ext cx="216623" cy="110021"/>
+              <a:off x="5283238" y="8430568"/>
+              <a:ext cx="322163" cy="133875"/>
             </a:xfrm>
             <a:prstGeom prst="rect">
               <a:avLst/>
@@ -4965,8 +5851,8 @@
           </p:nvSpPr>
           <p:spPr>
             <a:xfrm>
-              <a:off x="3023832" y="4995509"/>
-              <a:ext cx="216623" cy="550106"/>
+              <a:off x="5283238" y="7225691"/>
+              <a:ext cx="322163" cy="669375"/>
             </a:xfrm>
             <a:prstGeom prst="rect">
               <a:avLst/>
@@ -4991,8 +5877,8 @@
           </p:nvSpPr>
           <p:spPr>
             <a:xfrm>
-              <a:off x="3023832" y="5820668"/>
-              <a:ext cx="216623" cy="55010"/>
+              <a:off x="5283238" y="8229755"/>
+              <a:ext cx="322163" cy="66937"/>
             </a:xfrm>
             <a:prstGeom prst="rect">
               <a:avLst/>
@@ -5017,8 +5903,8 @@
           </p:nvSpPr>
           <p:spPr>
             <a:xfrm>
-              <a:off x="3023832" y="5875679"/>
-              <a:ext cx="216623" cy="55010"/>
+              <a:off x="5283238" y="8296693"/>
+              <a:ext cx="322163" cy="66937"/>
             </a:xfrm>
             <a:prstGeom prst="rect">
               <a:avLst/>
@@ -5043,8 +5929,8 @@
           </p:nvSpPr>
           <p:spPr>
             <a:xfrm>
-              <a:off x="3023832" y="5985700"/>
-              <a:ext cx="216623" cy="0"/>
+              <a:off x="5283238" y="8430568"/>
+              <a:ext cx="322163" cy="0"/>
             </a:xfrm>
             <a:prstGeom prst="rect">
               <a:avLst/>
@@ -5069,8 +5955,8 @@
           </p:nvSpPr>
           <p:spPr>
             <a:xfrm>
-              <a:off x="3324698" y="5820668"/>
-              <a:ext cx="216623" cy="0"/>
+              <a:off x="5730687" y="8229755"/>
+              <a:ext cx="322163" cy="0"/>
             </a:xfrm>
             <a:prstGeom prst="rect">
               <a:avLst/>
@@ -5095,8 +5981,8 @@
           </p:nvSpPr>
           <p:spPr>
             <a:xfrm>
-              <a:off x="3324698" y="5765658"/>
-              <a:ext cx="216623" cy="55010"/>
+              <a:off x="5730687" y="8162817"/>
+              <a:ext cx="322163" cy="66937"/>
             </a:xfrm>
             <a:prstGeom prst="rect">
               <a:avLst/>
@@ -5121,8 +6007,8 @@
           </p:nvSpPr>
           <p:spPr>
             <a:xfrm>
-              <a:off x="3324698" y="5600626"/>
-              <a:ext cx="216623" cy="165031"/>
+              <a:off x="5730687" y="7962005"/>
+              <a:ext cx="322163" cy="200812"/>
             </a:xfrm>
             <a:prstGeom prst="rect">
               <a:avLst/>
@@ -5147,8 +6033,8 @@
           </p:nvSpPr>
           <p:spPr>
             <a:xfrm>
-              <a:off x="3324698" y="5985700"/>
-              <a:ext cx="216623" cy="0"/>
+              <a:off x="5730687" y="8430568"/>
+              <a:ext cx="322163" cy="0"/>
             </a:xfrm>
             <a:prstGeom prst="rect">
               <a:avLst/>
@@ -5173,8 +6059,8 @@
           </p:nvSpPr>
           <p:spPr>
             <a:xfrm>
-              <a:off x="3324698" y="5985700"/>
-              <a:ext cx="216623" cy="55010"/>
+              <a:off x="5730687" y="8430568"/>
+              <a:ext cx="322163" cy="66937"/>
             </a:xfrm>
             <a:prstGeom prst="rect">
               <a:avLst/>
@@ -5199,8 +6085,8 @@
           </p:nvSpPr>
           <p:spPr>
             <a:xfrm>
-              <a:off x="3324698" y="5875679"/>
-              <a:ext cx="216623" cy="110021"/>
+              <a:off x="5730687" y="8296693"/>
+              <a:ext cx="322163" cy="133875"/>
             </a:xfrm>
             <a:prstGeom prst="rect">
               <a:avLst/>
@@ -5225,8 +6111,8 @@
           </p:nvSpPr>
           <p:spPr>
             <a:xfrm>
-              <a:off x="3324698" y="6040711"/>
-              <a:ext cx="216623" cy="55010"/>
+              <a:off x="5730687" y="8497505"/>
+              <a:ext cx="322163" cy="66937"/>
             </a:xfrm>
             <a:prstGeom prst="rect">
               <a:avLst/>
@@ -5251,8 +6137,8 @@
           </p:nvSpPr>
           <p:spPr>
             <a:xfrm>
-              <a:off x="3324698" y="4885488"/>
-              <a:ext cx="216623" cy="715138"/>
+              <a:off x="5730687" y="7091816"/>
+              <a:ext cx="322163" cy="870188"/>
             </a:xfrm>
             <a:prstGeom prst="rect">
               <a:avLst/>
@@ -5277,8 +6163,8 @@
           </p:nvSpPr>
           <p:spPr>
             <a:xfrm>
-              <a:off x="3324698" y="5820668"/>
-              <a:ext cx="216623" cy="55010"/>
+              <a:off x="5730687" y="8229755"/>
+              <a:ext cx="322163" cy="66937"/>
             </a:xfrm>
             <a:prstGeom prst="rect">
               <a:avLst/>
@@ -5303,8 +6189,8 @@
           </p:nvSpPr>
           <p:spPr>
             <a:xfrm>
-              <a:off x="3324698" y="5985700"/>
-              <a:ext cx="216623" cy="0"/>
+              <a:off x="5730687" y="8430568"/>
+              <a:ext cx="322163" cy="0"/>
             </a:xfrm>
             <a:prstGeom prst="rect">
               <a:avLst/>
@@ -5329,8 +6215,8 @@
           </p:nvSpPr>
           <p:spPr>
             <a:xfrm>
-              <a:off x="3324698" y="6040711"/>
-              <a:ext cx="216623" cy="0"/>
+              <a:off x="5730687" y="8497505"/>
+              <a:ext cx="322163" cy="0"/>
             </a:xfrm>
             <a:prstGeom prst="rect">
               <a:avLst/>
@@ -5355,8 +6241,8 @@
           </p:nvSpPr>
           <p:spPr>
             <a:xfrm>
-              <a:off x="3625563" y="5490605"/>
-              <a:ext cx="216623" cy="275053"/>
+              <a:off x="6178135" y="7828130"/>
+              <a:ext cx="322163" cy="334687"/>
             </a:xfrm>
             <a:prstGeom prst="rect">
               <a:avLst/>
@@ -5381,8 +6267,8 @@
           </p:nvSpPr>
           <p:spPr>
             <a:xfrm>
-              <a:off x="3625563" y="5325573"/>
-              <a:ext cx="216623" cy="165031"/>
+              <a:off x="6178135" y="7627317"/>
+              <a:ext cx="322163" cy="200812"/>
             </a:xfrm>
             <a:prstGeom prst="rect">
               <a:avLst/>
@@ -5407,8 +6293,8 @@
           </p:nvSpPr>
           <p:spPr>
             <a:xfrm>
-              <a:off x="3625563" y="4940498"/>
-              <a:ext cx="216623" cy="385074"/>
+              <a:off x="6178135" y="7158754"/>
+              <a:ext cx="322163" cy="468563"/>
             </a:xfrm>
             <a:prstGeom prst="rect">
               <a:avLst/>
@@ -5433,8 +6319,8 @@
           </p:nvSpPr>
           <p:spPr>
             <a:xfrm>
-              <a:off x="3625563" y="5930690"/>
-              <a:ext cx="216623" cy="0"/>
+              <a:off x="6178135" y="8363630"/>
+              <a:ext cx="322163" cy="0"/>
             </a:xfrm>
             <a:prstGeom prst="rect">
               <a:avLst/>
@@ -5459,8 +6345,8 @@
           </p:nvSpPr>
           <p:spPr>
             <a:xfrm>
-              <a:off x="3625563" y="5930690"/>
-              <a:ext cx="216623" cy="55010"/>
+              <a:off x="6178135" y="8363630"/>
+              <a:ext cx="322163" cy="66937"/>
             </a:xfrm>
             <a:prstGeom prst="rect">
               <a:avLst/>
@@ -5485,8 +6371,8 @@
           </p:nvSpPr>
           <p:spPr>
             <a:xfrm>
-              <a:off x="3625563" y="5875679"/>
-              <a:ext cx="216623" cy="55010"/>
+              <a:off x="6178135" y="8296693"/>
+              <a:ext cx="322163" cy="66937"/>
             </a:xfrm>
             <a:prstGeom prst="rect">
               <a:avLst/>
@@ -5511,8 +6397,8 @@
           </p:nvSpPr>
           <p:spPr>
             <a:xfrm>
-              <a:off x="3625563" y="5985700"/>
-              <a:ext cx="216623" cy="110021"/>
+              <a:off x="6178135" y="8430568"/>
+              <a:ext cx="322163" cy="133875"/>
             </a:xfrm>
             <a:prstGeom prst="rect">
               <a:avLst/>
@@ -5537,8 +6423,8 @@
           </p:nvSpPr>
           <p:spPr>
             <a:xfrm>
-              <a:off x="3625563" y="3400201"/>
-              <a:ext cx="216623" cy="1540297"/>
+              <a:off x="6178135" y="5284501"/>
+              <a:ext cx="322163" cy="1874252"/>
             </a:xfrm>
             <a:prstGeom prst="rect">
               <a:avLst/>
@@ -5563,8 +6449,8 @@
           </p:nvSpPr>
           <p:spPr>
             <a:xfrm>
-              <a:off x="3625563" y="5765658"/>
-              <a:ext cx="216623" cy="110021"/>
+              <a:off x="6178135" y="8162817"/>
+              <a:ext cx="322163" cy="133875"/>
             </a:xfrm>
             <a:prstGeom prst="rect">
               <a:avLst/>
@@ -5589,8 +6475,8 @@
           </p:nvSpPr>
           <p:spPr>
             <a:xfrm>
-              <a:off x="3625563" y="5930690"/>
-              <a:ext cx="216623" cy="0"/>
+              <a:off x="6178135" y="8363630"/>
+              <a:ext cx="322163" cy="0"/>
             </a:xfrm>
             <a:prstGeom prst="rect">
               <a:avLst/>
@@ -5615,8 +6501,8 @@
           </p:nvSpPr>
           <p:spPr>
             <a:xfrm>
-              <a:off x="3625563" y="5985700"/>
-              <a:ext cx="216623" cy="0"/>
+              <a:off x="6178135" y="8430568"/>
+              <a:ext cx="322163" cy="0"/>
             </a:xfrm>
             <a:prstGeom prst="rect">
               <a:avLst/>
@@ -5641,8 +6527,8 @@
           </p:nvSpPr>
           <p:spPr>
             <a:xfrm>
-              <a:off x="3926429" y="5600626"/>
-              <a:ext cx="216623" cy="55010"/>
+              <a:off x="6625584" y="7962005"/>
+              <a:ext cx="322163" cy="66937"/>
             </a:xfrm>
             <a:prstGeom prst="rect">
               <a:avLst/>
@@ -5667,8 +6553,8 @@
           </p:nvSpPr>
           <p:spPr>
             <a:xfrm>
-              <a:off x="3926429" y="5490605"/>
-              <a:ext cx="216623" cy="110021"/>
+              <a:off x="6625584" y="7828130"/>
+              <a:ext cx="322163" cy="133875"/>
             </a:xfrm>
             <a:prstGeom prst="rect">
               <a:avLst/>
@@ -5693,8 +6579,8 @@
           </p:nvSpPr>
           <p:spPr>
             <a:xfrm>
-              <a:off x="3926429" y="5050520"/>
-              <a:ext cx="216623" cy="440085"/>
+              <a:off x="6625584" y="7292629"/>
+              <a:ext cx="322163" cy="535500"/>
             </a:xfrm>
             <a:prstGeom prst="rect">
               <a:avLst/>
@@ -5719,8 +6605,8 @@
           </p:nvSpPr>
           <p:spPr>
             <a:xfrm>
-              <a:off x="3926429" y="5765658"/>
-              <a:ext cx="216623" cy="110021"/>
+              <a:off x="6625584" y="8162817"/>
+              <a:ext cx="322163" cy="133875"/>
             </a:xfrm>
             <a:prstGeom prst="rect">
               <a:avLst/>
@@ -5745,8 +6631,8 @@
           </p:nvSpPr>
           <p:spPr>
             <a:xfrm>
-              <a:off x="3926429" y="5930690"/>
-              <a:ext cx="216623" cy="55010"/>
+              <a:off x="6625584" y="8363630"/>
+              <a:ext cx="322163" cy="66937"/>
             </a:xfrm>
             <a:prstGeom prst="rect">
               <a:avLst/>
@@ -5771,8 +6657,8 @@
           </p:nvSpPr>
           <p:spPr>
             <a:xfrm>
-              <a:off x="3926429" y="5655636"/>
-              <a:ext cx="216623" cy="110021"/>
+              <a:off x="6625584" y="8028942"/>
+              <a:ext cx="322163" cy="133875"/>
             </a:xfrm>
             <a:prstGeom prst="rect">
               <a:avLst/>
@@ -5797,8 +6683,8 @@
           </p:nvSpPr>
           <p:spPr>
             <a:xfrm>
-              <a:off x="3926429" y="6040711"/>
-              <a:ext cx="216623" cy="55010"/>
+              <a:off x="6625584" y="8497505"/>
+              <a:ext cx="322163" cy="66937"/>
             </a:xfrm>
             <a:prstGeom prst="rect">
               <a:avLst/>
@@ -5823,8 +6709,8 @@
           </p:nvSpPr>
           <p:spPr>
             <a:xfrm>
-              <a:off x="3926429" y="3840286"/>
-              <a:ext cx="216623" cy="1210233"/>
+              <a:off x="6625584" y="5820002"/>
+              <a:ext cx="322163" cy="1472626"/>
             </a:xfrm>
             <a:prstGeom prst="rect">
               <a:avLst/>
@@ -5849,8 +6735,8 @@
           </p:nvSpPr>
           <p:spPr>
             <a:xfrm>
-              <a:off x="3926429" y="5655636"/>
-              <a:ext cx="216623" cy="0"/>
+              <a:off x="6625584" y="8028942"/>
+              <a:ext cx="322163" cy="0"/>
             </a:xfrm>
             <a:prstGeom prst="rect">
               <a:avLst/>
@@ -5875,8 +6761,8 @@
           </p:nvSpPr>
           <p:spPr>
             <a:xfrm>
-              <a:off x="3926429" y="5875679"/>
-              <a:ext cx="216623" cy="55010"/>
+              <a:off x="6625584" y="8296693"/>
+              <a:ext cx="322163" cy="66937"/>
             </a:xfrm>
             <a:prstGeom prst="rect">
               <a:avLst/>
@@ -5901,8 +6787,8 @@
           </p:nvSpPr>
           <p:spPr>
             <a:xfrm>
-              <a:off x="3926429" y="5985700"/>
-              <a:ext cx="216623" cy="55010"/>
+              <a:off x="6625584" y="8430568"/>
+              <a:ext cx="322163" cy="66937"/>
             </a:xfrm>
             <a:prstGeom prst="rect">
               <a:avLst/>
@@ -5927,8 +6813,8 @@
           </p:nvSpPr>
           <p:spPr>
             <a:xfrm>
-              <a:off x="4227294" y="5655636"/>
-              <a:ext cx="216623" cy="165031"/>
+              <a:off x="7073033" y="8028942"/>
+              <a:ext cx="322163" cy="200812"/>
             </a:xfrm>
             <a:prstGeom prst="rect">
               <a:avLst/>
@@ -5953,8 +6839,8 @@
           </p:nvSpPr>
           <p:spPr>
             <a:xfrm>
-              <a:off x="4227294" y="5600626"/>
-              <a:ext cx="216623" cy="55010"/>
+              <a:off x="7073033" y="7962005"/>
+              <a:ext cx="322163" cy="66937"/>
             </a:xfrm>
             <a:prstGeom prst="rect">
               <a:avLst/>
@@ -5979,8 +6865,8 @@
           </p:nvSpPr>
           <p:spPr>
             <a:xfrm>
-              <a:off x="4227294" y="5380583"/>
-              <a:ext cx="216623" cy="220042"/>
+              <a:off x="7073033" y="7694254"/>
+              <a:ext cx="322163" cy="267750"/>
             </a:xfrm>
             <a:prstGeom prst="rect">
               <a:avLst/>
@@ -6005,8 +6891,8 @@
           </p:nvSpPr>
           <p:spPr>
             <a:xfrm>
-              <a:off x="4227294" y="5875679"/>
-              <a:ext cx="216623" cy="0"/>
+              <a:off x="7073033" y="8296693"/>
+              <a:ext cx="322163" cy="0"/>
             </a:xfrm>
             <a:prstGeom prst="rect">
               <a:avLst/>
@@ -6031,8 +6917,8 @@
           </p:nvSpPr>
           <p:spPr>
             <a:xfrm>
-              <a:off x="4227294" y="5930690"/>
-              <a:ext cx="216623" cy="0"/>
+              <a:off x="7073033" y="8363630"/>
+              <a:ext cx="322163" cy="0"/>
             </a:xfrm>
             <a:prstGeom prst="rect">
               <a:avLst/>
@@ -6057,8 +6943,8 @@
           </p:nvSpPr>
           <p:spPr>
             <a:xfrm>
-              <a:off x="4227294" y="5820668"/>
-              <a:ext cx="216623" cy="55010"/>
+              <a:off x="7073033" y="8229755"/>
+              <a:ext cx="322163" cy="66937"/>
             </a:xfrm>
             <a:prstGeom prst="rect">
               <a:avLst/>
@@ -6083,8 +6969,8 @@
           </p:nvSpPr>
           <p:spPr>
             <a:xfrm>
-              <a:off x="4227294" y="5985700"/>
-              <a:ext cx="216623" cy="110021"/>
+              <a:off x="7073033" y="8430568"/>
+              <a:ext cx="322163" cy="133875"/>
             </a:xfrm>
             <a:prstGeom prst="rect">
               <a:avLst/>
@@ -6109,8 +6995,8 @@
           </p:nvSpPr>
           <p:spPr>
             <a:xfrm>
-              <a:off x="4227294" y="4830477"/>
-              <a:ext cx="216623" cy="550106"/>
+              <a:off x="7073033" y="7024879"/>
+              <a:ext cx="322163" cy="669375"/>
             </a:xfrm>
             <a:prstGeom prst="rect">
               <a:avLst/>
@@ -6135,8 +7021,8 @@
           </p:nvSpPr>
           <p:spPr>
             <a:xfrm>
-              <a:off x="4227294" y="5820668"/>
-              <a:ext cx="216623" cy="0"/>
+              <a:off x="7073033" y="8229755"/>
+              <a:ext cx="322163" cy="0"/>
             </a:xfrm>
             <a:prstGeom prst="rect">
               <a:avLst/>
@@ -6161,8 +7047,8 @@
           </p:nvSpPr>
           <p:spPr>
             <a:xfrm>
-              <a:off x="4227294" y="5875679"/>
-              <a:ext cx="216623" cy="55010"/>
+              <a:off x="7073033" y="8296693"/>
+              <a:ext cx="322163" cy="66937"/>
             </a:xfrm>
             <a:prstGeom prst="rect">
               <a:avLst/>
@@ -6187,8 +7073,8 @@
           </p:nvSpPr>
           <p:spPr>
             <a:xfrm>
-              <a:off x="4227294" y="5930690"/>
-              <a:ext cx="216623" cy="55010"/>
+              <a:off x="7073033" y="8363630"/>
+              <a:ext cx="322163" cy="66937"/>
             </a:xfrm>
             <a:prstGeom prst="rect">
               <a:avLst/>
@@ -6213,8 +7099,8 @@
           </p:nvSpPr>
           <p:spPr>
             <a:xfrm>
-              <a:off x="4528160" y="5380583"/>
-              <a:ext cx="216623" cy="275053"/>
+              <a:off x="7520482" y="7694254"/>
+              <a:ext cx="322163" cy="334687"/>
             </a:xfrm>
             <a:prstGeom prst="rect">
               <a:avLst/>
@@ -6239,8 +7125,8 @@
           </p:nvSpPr>
           <p:spPr>
             <a:xfrm>
-              <a:off x="4528160" y="5380583"/>
-              <a:ext cx="216623" cy="0"/>
+              <a:off x="7520482" y="7694254"/>
+              <a:ext cx="322163" cy="0"/>
             </a:xfrm>
             <a:prstGeom prst="rect">
               <a:avLst/>
@@ -6265,8 +7151,8 @@
           </p:nvSpPr>
           <p:spPr>
             <a:xfrm>
-              <a:off x="4528160" y="4995509"/>
-              <a:ext cx="216623" cy="385074"/>
+              <a:off x="7520482" y="7225691"/>
+              <a:ext cx="322163" cy="468563"/>
             </a:xfrm>
             <a:prstGeom prst="rect">
               <a:avLst/>
@@ -6291,8 +7177,8 @@
           </p:nvSpPr>
           <p:spPr>
             <a:xfrm>
-              <a:off x="4528160" y="5930690"/>
-              <a:ext cx="216623" cy="0"/>
+              <a:off x="7520482" y="8363630"/>
+              <a:ext cx="322163" cy="0"/>
             </a:xfrm>
             <a:prstGeom prst="rect">
               <a:avLst/>
@@ -6317,8 +7203,8 @@
           </p:nvSpPr>
           <p:spPr>
             <a:xfrm>
-              <a:off x="4528160" y="5930690"/>
-              <a:ext cx="216623" cy="0"/>
+              <a:off x="7520482" y="8363630"/>
+              <a:ext cx="322163" cy="0"/>
             </a:xfrm>
             <a:prstGeom prst="rect">
               <a:avLst/>
@@ -6343,8 +7229,8 @@
           </p:nvSpPr>
           <p:spPr>
             <a:xfrm>
-              <a:off x="4528160" y="5765658"/>
-              <a:ext cx="216623" cy="165031"/>
+              <a:off x="7520482" y="8162817"/>
+              <a:ext cx="322163" cy="200812"/>
             </a:xfrm>
             <a:prstGeom prst="rect">
               <a:avLst/>
@@ -6369,8 +7255,8 @@
           </p:nvSpPr>
           <p:spPr>
             <a:xfrm>
-              <a:off x="4528160" y="5930690"/>
-              <a:ext cx="216623" cy="165031"/>
+              <a:off x="7520482" y="8363630"/>
+              <a:ext cx="322163" cy="200812"/>
             </a:xfrm>
             <a:prstGeom prst="rect">
               <a:avLst/>
@@ -6395,8 +7281,8 @@
           </p:nvSpPr>
           <p:spPr>
             <a:xfrm>
-              <a:off x="4528160" y="3840286"/>
-              <a:ext cx="216623" cy="1155223"/>
+              <a:off x="7520482" y="5820002"/>
+              <a:ext cx="322163" cy="1405689"/>
             </a:xfrm>
             <a:prstGeom prst="rect">
               <a:avLst/>
@@ -6421,8 +7307,8 @@
           </p:nvSpPr>
           <p:spPr>
             <a:xfrm>
-              <a:off x="4528160" y="5655636"/>
-              <a:ext cx="216623" cy="110021"/>
+              <a:off x="7520482" y="8028942"/>
+              <a:ext cx="322163" cy="133875"/>
             </a:xfrm>
             <a:prstGeom prst="rect">
               <a:avLst/>
@@ -6447,8 +7333,8 @@
           </p:nvSpPr>
           <p:spPr>
             <a:xfrm>
-              <a:off x="4528160" y="5930690"/>
-              <a:ext cx="216623" cy="0"/>
+              <a:off x="7520482" y="8363630"/>
+              <a:ext cx="322163" cy="0"/>
             </a:xfrm>
             <a:prstGeom prst="rect">
               <a:avLst/>
@@ -6473,8 +7359,8 @@
           </p:nvSpPr>
           <p:spPr>
             <a:xfrm>
-              <a:off x="4528160" y="5930690"/>
-              <a:ext cx="216623" cy="0"/>
+              <a:off x="7520482" y="8363630"/>
+              <a:ext cx="322163" cy="0"/>
             </a:xfrm>
             <a:prstGeom prst="rect">
               <a:avLst/>
@@ -6499,8 +7385,8 @@
           </p:nvSpPr>
           <p:spPr>
             <a:xfrm>
-              <a:off x="4829026" y="5380583"/>
-              <a:ext cx="216623" cy="110021"/>
+              <a:off x="7967930" y="7694254"/>
+              <a:ext cx="322163" cy="133875"/>
             </a:xfrm>
             <a:prstGeom prst="rect">
               <a:avLst/>
@@ -6525,8 +7411,8 @@
           </p:nvSpPr>
           <p:spPr>
             <a:xfrm>
-              <a:off x="4829026" y="5270562"/>
-              <a:ext cx="216623" cy="110021"/>
+              <a:off x="7967930" y="7560379"/>
+              <a:ext cx="322163" cy="133875"/>
             </a:xfrm>
             <a:prstGeom prst="rect">
               <a:avLst/>
@@ -6551,8 +7437,8 @@
           </p:nvSpPr>
           <p:spPr>
             <a:xfrm>
-              <a:off x="4829026" y="4885488"/>
-              <a:ext cx="216623" cy="385074"/>
+              <a:off x="7967930" y="7091816"/>
+              <a:ext cx="322163" cy="468563"/>
             </a:xfrm>
             <a:prstGeom prst="rect">
               <a:avLst/>
@@ -6577,8 +7463,8 @@
           </p:nvSpPr>
           <p:spPr>
             <a:xfrm>
-              <a:off x="4829026" y="5600626"/>
-              <a:ext cx="216623" cy="0"/>
+              <a:off x="7967930" y="7962005"/>
+              <a:ext cx="322163" cy="0"/>
             </a:xfrm>
             <a:prstGeom prst="rect">
               <a:avLst/>
@@ -6603,8 +7489,8 @@
           </p:nvSpPr>
           <p:spPr>
             <a:xfrm>
-              <a:off x="4829026" y="5655636"/>
-              <a:ext cx="216623" cy="55010"/>
+              <a:off x="7967930" y="8028942"/>
+              <a:ext cx="322163" cy="66937"/>
             </a:xfrm>
             <a:prstGeom prst="rect">
               <a:avLst/>
@@ -6629,8 +7515,8 @@
           </p:nvSpPr>
           <p:spPr>
             <a:xfrm>
-              <a:off x="4829026" y="5600626"/>
-              <a:ext cx="216623" cy="0"/>
+              <a:off x="7967930" y="7962005"/>
+              <a:ext cx="322163" cy="0"/>
             </a:xfrm>
             <a:prstGeom prst="rect">
               <a:avLst/>
@@ -6655,8 +7541,8 @@
           </p:nvSpPr>
           <p:spPr>
             <a:xfrm>
-              <a:off x="4829026" y="5710647"/>
-              <a:ext cx="216623" cy="385074"/>
+              <a:off x="7967930" y="8095880"/>
+              <a:ext cx="322163" cy="468563"/>
             </a:xfrm>
             <a:prstGeom prst="rect">
               <a:avLst/>
@@ -6681,8 +7567,8 @@
           </p:nvSpPr>
           <p:spPr>
             <a:xfrm>
-              <a:off x="4829026" y="3510222"/>
-              <a:ext cx="216623" cy="1375265"/>
+              <a:off x="7967930" y="5418376"/>
+              <a:ext cx="322163" cy="1673439"/>
             </a:xfrm>
             <a:prstGeom prst="rect">
               <a:avLst/>
@@ -6707,8 +7593,8 @@
           </p:nvSpPr>
           <p:spPr>
             <a:xfrm>
-              <a:off x="4829026" y="5490605"/>
-              <a:ext cx="216623" cy="110021"/>
+              <a:off x="7967930" y="7828130"/>
+              <a:ext cx="322163" cy="133875"/>
             </a:xfrm>
             <a:prstGeom prst="rect">
               <a:avLst/>
@@ -6733,8 +7619,8 @@
           </p:nvSpPr>
           <p:spPr>
             <a:xfrm>
-              <a:off x="4829026" y="5600626"/>
-              <a:ext cx="216623" cy="55010"/>
+              <a:off x="7967930" y="7962005"/>
+              <a:ext cx="322163" cy="66937"/>
             </a:xfrm>
             <a:prstGeom prst="rect">
               <a:avLst/>
@@ -6759,8 +7645,8 @@
           </p:nvSpPr>
           <p:spPr>
             <a:xfrm>
-              <a:off x="4829026" y="5710647"/>
-              <a:ext cx="216623" cy="0"/>
+              <a:off x="7967930" y="8095880"/>
+              <a:ext cx="322163" cy="0"/>
             </a:xfrm>
             <a:prstGeom prst="rect">
               <a:avLst/>
@@ -6785,8 +7671,8 @@
           </p:nvSpPr>
           <p:spPr>
             <a:xfrm>
-              <a:off x="5129891" y="5545615"/>
-              <a:ext cx="216623" cy="165031"/>
+              <a:off x="8415379" y="7895067"/>
+              <a:ext cx="322163" cy="200812"/>
             </a:xfrm>
             <a:prstGeom prst="rect">
               <a:avLst/>
@@ -6811,8 +7697,8 @@
           </p:nvSpPr>
           <p:spPr>
             <a:xfrm>
-              <a:off x="5129891" y="5490605"/>
-              <a:ext cx="216623" cy="55010"/>
+              <a:off x="8415379" y="7828130"/>
+              <a:ext cx="322163" cy="66937"/>
             </a:xfrm>
             <a:prstGeom prst="rect">
               <a:avLst/>
@@ -6837,8 +7723,8 @@
           </p:nvSpPr>
           <p:spPr>
             <a:xfrm>
-              <a:off x="5129891" y="5270562"/>
-              <a:ext cx="216623" cy="220042"/>
+              <a:off x="8415379" y="7560379"/>
+              <a:ext cx="322163" cy="267750"/>
             </a:xfrm>
             <a:prstGeom prst="rect">
               <a:avLst/>
@@ -6863,8 +7749,8 @@
           </p:nvSpPr>
           <p:spPr>
             <a:xfrm>
-              <a:off x="5129891" y="5930690"/>
-              <a:ext cx="216623" cy="0"/>
+              <a:off x="8415379" y="8363630"/>
+              <a:ext cx="322163" cy="0"/>
             </a:xfrm>
             <a:prstGeom prst="rect">
               <a:avLst/>
@@ -6889,8 +7775,8 @@
           </p:nvSpPr>
           <p:spPr>
             <a:xfrm>
-              <a:off x="5129891" y="5985700"/>
-              <a:ext cx="216623" cy="55010"/>
+              <a:off x="8415379" y="8430568"/>
+              <a:ext cx="322163" cy="66937"/>
             </a:xfrm>
             <a:prstGeom prst="rect">
               <a:avLst/>
@@ -6915,8 +7801,8 @@
           </p:nvSpPr>
           <p:spPr>
             <a:xfrm>
-              <a:off x="5129891" y="5875679"/>
-              <a:ext cx="216623" cy="55010"/>
+              <a:off x="8415379" y="8296693"/>
+              <a:ext cx="322163" cy="66937"/>
             </a:xfrm>
             <a:prstGeom prst="rect">
               <a:avLst/>
@@ -6941,8 +7827,8 @@
           </p:nvSpPr>
           <p:spPr>
             <a:xfrm>
-              <a:off x="5129891" y="6040711"/>
-              <a:ext cx="216623" cy="55010"/>
+              <a:off x="8415379" y="8497505"/>
+              <a:ext cx="322163" cy="66937"/>
             </a:xfrm>
             <a:prstGeom prst="rect">
               <a:avLst/>
@@ -6967,8 +7853,8 @@
           </p:nvSpPr>
           <p:spPr>
             <a:xfrm>
-              <a:off x="5129891" y="4225360"/>
-              <a:ext cx="216623" cy="1045201"/>
+              <a:off x="8415379" y="6288565"/>
+              <a:ext cx="322163" cy="1271814"/>
             </a:xfrm>
             <a:prstGeom prst="rect">
               <a:avLst/>
@@ -6993,8 +7879,8 @@
           </p:nvSpPr>
           <p:spPr>
             <a:xfrm>
-              <a:off x="5129891" y="5710647"/>
-              <a:ext cx="216623" cy="165031"/>
+              <a:off x="8415379" y="8095880"/>
+              <a:ext cx="322163" cy="200812"/>
             </a:xfrm>
             <a:prstGeom prst="rect">
               <a:avLst/>
@@ -7019,8 +7905,8 @@
           </p:nvSpPr>
           <p:spPr>
             <a:xfrm>
-              <a:off x="5129891" y="5930690"/>
-              <a:ext cx="216623" cy="55010"/>
+              <a:off x="8415379" y="8363630"/>
+              <a:ext cx="322163" cy="66937"/>
             </a:xfrm>
             <a:prstGeom prst="rect">
               <a:avLst/>
@@ -7045,8 +7931,8 @@
           </p:nvSpPr>
           <p:spPr>
             <a:xfrm>
-              <a:off x="5129891" y="6040711"/>
-              <a:ext cx="216623" cy="0"/>
+              <a:off x="8415379" y="8497505"/>
+              <a:ext cx="322163" cy="0"/>
             </a:xfrm>
             <a:prstGeom prst="rect">
               <a:avLst/>
@@ -7071,8 +7957,8 @@
           </p:nvSpPr>
           <p:spPr>
             <a:xfrm>
-              <a:off x="5430757" y="5380583"/>
-              <a:ext cx="216623" cy="165031"/>
+              <a:off x="8862828" y="7694254"/>
+              <a:ext cx="322163" cy="200812"/>
             </a:xfrm>
             <a:prstGeom prst="rect">
               <a:avLst/>
@@ -7097,8 +7983,8 @@
           </p:nvSpPr>
           <p:spPr>
             <a:xfrm>
-              <a:off x="5430757" y="5215551"/>
-              <a:ext cx="216623" cy="165031"/>
+              <a:off x="8862828" y="7493442"/>
+              <a:ext cx="322163" cy="200812"/>
             </a:xfrm>
             <a:prstGeom prst="rect">
               <a:avLst/>
@@ -7123,8 +8009,8 @@
           </p:nvSpPr>
           <p:spPr>
             <a:xfrm>
-              <a:off x="5430757" y="5050520"/>
-              <a:ext cx="216623" cy="165031"/>
+              <a:off x="8862828" y="7292629"/>
+              <a:ext cx="322163" cy="200812"/>
             </a:xfrm>
             <a:prstGeom prst="rect">
               <a:avLst/>
@@ -7149,8 +8035,8 @@
           </p:nvSpPr>
           <p:spPr>
             <a:xfrm>
-              <a:off x="5430757" y="5655636"/>
-              <a:ext cx="216623" cy="55010"/>
+              <a:off x="8862828" y="8028942"/>
+              <a:ext cx="322163" cy="66937"/>
             </a:xfrm>
             <a:prstGeom prst="rect">
               <a:avLst/>
@@ -7175,8 +8061,8 @@
           </p:nvSpPr>
           <p:spPr>
             <a:xfrm>
-              <a:off x="5430757" y="5710647"/>
-              <a:ext cx="216623" cy="0"/>
+              <a:off x="8862828" y="8095880"/>
+              <a:ext cx="322163" cy="0"/>
             </a:xfrm>
             <a:prstGeom prst="rect">
               <a:avLst/>
@@ -7201,8 +8087,8 @@
           </p:nvSpPr>
           <p:spPr>
             <a:xfrm>
-              <a:off x="5430757" y="5655636"/>
-              <a:ext cx="216623" cy="0"/>
+              <a:off x="8862828" y="8028942"/>
+              <a:ext cx="322163" cy="0"/>
             </a:xfrm>
             <a:prstGeom prst="rect">
               <a:avLst/>
@@ -7227,8 +8113,8 @@
           </p:nvSpPr>
           <p:spPr>
             <a:xfrm>
-              <a:off x="5430757" y="5710647"/>
-              <a:ext cx="216623" cy="385074"/>
+              <a:off x="8862828" y="8095880"/>
+              <a:ext cx="322163" cy="468563"/>
             </a:xfrm>
             <a:prstGeom prst="rect">
               <a:avLst/>
@@ -7253,8 +8139,8 @@
           </p:nvSpPr>
           <p:spPr>
             <a:xfrm>
-              <a:off x="5430757" y="3785275"/>
-              <a:ext cx="216623" cy="1265244"/>
+              <a:off x="8862828" y="5753064"/>
+              <a:ext cx="322163" cy="1539564"/>
             </a:xfrm>
             <a:prstGeom prst="rect">
               <a:avLst/>
@@ -7279,8 +8165,8 @@
           </p:nvSpPr>
           <p:spPr>
             <a:xfrm>
-              <a:off x="5430757" y="5545615"/>
-              <a:ext cx="216623" cy="110021"/>
+              <a:off x="8862828" y="7895067"/>
+              <a:ext cx="322163" cy="133875"/>
             </a:xfrm>
             <a:prstGeom prst="rect">
               <a:avLst/>
@@ -7305,8 +8191,8 @@
           </p:nvSpPr>
           <p:spPr>
             <a:xfrm>
-              <a:off x="5430757" y="5710647"/>
-              <a:ext cx="216623" cy="0"/>
+              <a:off x="8862828" y="8095880"/>
+              <a:ext cx="322163" cy="0"/>
             </a:xfrm>
             <a:prstGeom prst="rect">
               <a:avLst/>
@@ -7331,8 +8217,8 @@
           </p:nvSpPr>
           <p:spPr>
             <a:xfrm>
-              <a:off x="5430757" y="5710647"/>
-              <a:ext cx="216623" cy="0"/>
+              <a:off x="8862828" y="8095880"/>
+              <a:ext cx="322163" cy="0"/>
             </a:xfrm>
             <a:prstGeom prst="rect">
               <a:avLst/>
@@ -7357,8 +8243,8 @@
           </p:nvSpPr>
           <p:spPr>
             <a:xfrm>
-              <a:off x="5731622" y="5050520"/>
-              <a:ext cx="216623" cy="55010"/>
+              <a:off x="9310277" y="7292629"/>
+              <a:ext cx="322163" cy="66937"/>
             </a:xfrm>
             <a:prstGeom prst="rect">
               <a:avLst/>
@@ -7383,8 +8269,8 @@
           </p:nvSpPr>
           <p:spPr>
             <a:xfrm>
-              <a:off x="5731622" y="4610435"/>
-              <a:ext cx="216623" cy="440085"/>
+              <a:off x="9310277" y="6757128"/>
+              <a:ext cx="322163" cy="535500"/>
             </a:xfrm>
             <a:prstGeom prst="rect">
               <a:avLst/>
@@ -7409,8 +8295,8 @@
           </p:nvSpPr>
           <p:spPr>
             <a:xfrm>
-              <a:off x="5731622" y="4225360"/>
-              <a:ext cx="216623" cy="385074"/>
+              <a:off x="9310277" y="6288565"/>
+              <a:ext cx="322163" cy="468563"/>
             </a:xfrm>
             <a:prstGeom prst="rect">
               <a:avLst/>
@@ -7435,8 +8321,8 @@
           </p:nvSpPr>
           <p:spPr>
             <a:xfrm>
-              <a:off x="5731622" y="5490605"/>
-              <a:ext cx="216623" cy="110021"/>
+              <a:off x="9310277" y="7828130"/>
+              <a:ext cx="322163" cy="133875"/>
             </a:xfrm>
             <a:prstGeom prst="rect">
               <a:avLst/>
@@ -7461,8 +8347,8 @@
           </p:nvSpPr>
           <p:spPr>
             <a:xfrm>
-              <a:off x="5731622" y="5600626"/>
-              <a:ext cx="216623" cy="55010"/>
+              <a:off x="9310277" y="7962005"/>
+              <a:ext cx="322163" cy="66937"/>
             </a:xfrm>
             <a:prstGeom prst="rect">
               <a:avLst/>
@@ -7487,8 +8373,8 @@
           </p:nvSpPr>
           <p:spPr>
             <a:xfrm>
-              <a:off x="5731622" y="5380583"/>
-              <a:ext cx="216623" cy="110021"/>
+              <a:off x="9310277" y="7694254"/>
+              <a:ext cx="322163" cy="133875"/>
             </a:xfrm>
             <a:prstGeom prst="rect">
               <a:avLst/>
@@ -7513,8 +8399,8 @@
           </p:nvSpPr>
           <p:spPr>
             <a:xfrm>
-              <a:off x="5731622" y="5765658"/>
-              <a:ext cx="216623" cy="330063"/>
+              <a:off x="9310277" y="8162817"/>
+              <a:ext cx="322163" cy="401625"/>
             </a:xfrm>
             <a:prstGeom prst="rect">
               <a:avLst/>
@@ -7539,8 +8425,8 @@
           </p:nvSpPr>
           <p:spPr>
             <a:xfrm>
-              <a:off x="5731622" y="2299988"/>
-              <a:ext cx="216623" cy="1925371"/>
+              <a:off x="9310277" y="3945750"/>
+              <a:ext cx="322163" cy="2342815"/>
             </a:xfrm>
             <a:prstGeom prst="rect">
               <a:avLst/>
@@ -7565,8 +8451,8 @@
           </p:nvSpPr>
           <p:spPr>
             <a:xfrm>
-              <a:off x="5731622" y="5105530"/>
-              <a:ext cx="216623" cy="275053"/>
+              <a:off x="9310277" y="7359566"/>
+              <a:ext cx="322163" cy="334687"/>
             </a:xfrm>
             <a:prstGeom prst="rect">
               <a:avLst/>
@@ -7591,8 +8477,8 @@
           </p:nvSpPr>
           <p:spPr>
             <a:xfrm>
-              <a:off x="5731622" y="5600626"/>
-              <a:ext cx="216623" cy="0"/>
+              <a:off x="9310277" y="7962005"/>
+              <a:ext cx="322163" cy="0"/>
             </a:xfrm>
             <a:prstGeom prst="rect">
               <a:avLst/>
@@ -7617,8 +8503,8 @@
           </p:nvSpPr>
           <p:spPr>
             <a:xfrm>
-              <a:off x="5731622" y="5655636"/>
-              <a:ext cx="216623" cy="110021"/>
+              <a:off x="9310277" y="8028942"/>
+              <a:ext cx="322163" cy="133875"/>
             </a:xfrm>
             <a:prstGeom prst="rect">
               <a:avLst/>
@@ -7643,8 +8529,8 @@
           </p:nvSpPr>
           <p:spPr>
             <a:xfrm>
-              <a:off x="6032488" y="5160541"/>
-              <a:ext cx="216623" cy="220042"/>
+              <a:off x="9757725" y="7426504"/>
+              <a:ext cx="322163" cy="267750"/>
             </a:xfrm>
             <a:prstGeom prst="rect">
               <a:avLst/>
@@ -7669,8 +8555,8 @@
           </p:nvSpPr>
           <p:spPr>
             <a:xfrm>
-              <a:off x="6032488" y="4885488"/>
-              <a:ext cx="216623" cy="275053"/>
+              <a:off x="9757725" y="7091816"/>
+              <a:ext cx="322163" cy="334687"/>
             </a:xfrm>
             <a:prstGeom prst="rect">
               <a:avLst/>
@@ -7695,8 +8581,8 @@
           </p:nvSpPr>
           <p:spPr>
             <a:xfrm>
-              <a:off x="6032488" y="4500413"/>
-              <a:ext cx="216623" cy="385074"/>
+              <a:off x="9757725" y="6623253"/>
+              <a:ext cx="322163" cy="468563"/>
             </a:xfrm>
             <a:prstGeom prst="rect">
               <a:avLst/>
@@ -7721,8 +8607,8 @@
           </p:nvSpPr>
           <p:spPr>
             <a:xfrm>
-              <a:off x="6032488" y="5435594"/>
-              <a:ext cx="216623" cy="55010"/>
+              <a:off x="9757725" y="7761192"/>
+              <a:ext cx="322163" cy="66937"/>
             </a:xfrm>
             <a:prstGeom prst="rect">
               <a:avLst/>
@@ -7747,8 +8633,8 @@
           </p:nvSpPr>
           <p:spPr>
             <a:xfrm>
-              <a:off x="6032488" y="5490605"/>
-              <a:ext cx="216623" cy="55010"/>
+              <a:off x="9757725" y="7828130"/>
+              <a:ext cx="322163" cy="66937"/>
             </a:xfrm>
             <a:prstGeom prst="rect">
               <a:avLst/>
@@ -7773,8 +8659,8 @@
           </p:nvSpPr>
           <p:spPr>
             <a:xfrm>
-              <a:off x="6032488" y="5435594"/>
-              <a:ext cx="216623" cy="0"/>
+              <a:off x="9757725" y="7761192"/>
+              <a:ext cx="322163" cy="0"/>
             </a:xfrm>
             <a:prstGeom prst="rect">
               <a:avLst/>
@@ -7799,8 +8685,8 @@
           </p:nvSpPr>
           <p:spPr>
             <a:xfrm>
-              <a:off x="6032488" y="5600626"/>
-              <a:ext cx="216623" cy="495095"/>
+              <a:off x="9757725" y="7962005"/>
+              <a:ext cx="322163" cy="602438"/>
             </a:xfrm>
             <a:prstGeom prst="rect">
               <a:avLst/>
@@ -7825,8 +8711,8 @@
           </p:nvSpPr>
           <p:spPr>
             <a:xfrm>
-              <a:off x="6032488" y="2905105"/>
-              <a:ext cx="216623" cy="1595308"/>
+              <a:off x="9757725" y="4682063"/>
+              <a:ext cx="322163" cy="1941189"/>
             </a:xfrm>
             <a:prstGeom prst="rect">
               <a:avLst/>
@@ -7851,8 +8737,8 @@
           </p:nvSpPr>
           <p:spPr>
             <a:xfrm>
-              <a:off x="6032488" y="5380583"/>
-              <a:ext cx="216623" cy="55010"/>
+              <a:off x="9757725" y="7694254"/>
+              <a:ext cx="322163" cy="66937"/>
             </a:xfrm>
             <a:prstGeom prst="rect">
               <a:avLst/>
@@ -7877,8 +8763,8 @@
           </p:nvSpPr>
           <p:spPr>
             <a:xfrm>
-              <a:off x="6032488" y="5490605"/>
-              <a:ext cx="216623" cy="0"/>
+              <a:off x="9757725" y="7828130"/>
+              <a:ext cx="322163" cy="0"/>
             </a:xfrm>
             <a:prstGeom prst="rect">
               <a:avLst/>
@@ -7903,8 +8789,8 @@
           </p:nvSpPr>
           <p:spPr>
             <a:xfrm>
-              <a:off x="6032488" y="5545615"/>
-              <a:ext cx="216623" cy="55010"/>
+              <a:off x="9757725" y="7895067"/>
+              <a:ext cx="322163" cy="66937"/>
             </a:xfrm>
             <a:prstGeom prst="rect">
               <a:avLst/>
@@ -7929,8 +8815,8 @@
           </p:nvSpPr>
           <p:spPr>
             <a:xfrm>
-              <a:off x="6333353" y="5105530"/>
-              <a:ext cx="216623" cy="110021"/>
+              <a:off x="10205174" y="7359566"/>
+              <a:ext cx="322163" cy="133875"/>
             </a:xfrm>
             <a:prstGeom prst="rect">
               <a:avLst/>
@@ -7955,8 +8841,8 @@
           </p:nvSpPr>
           <p:spPr>
             <a:xfrm>
-              <a:off x="6333353" y="4775466"/>
-              <a:ext cx="216623" cy="330063"/>
+              <a:off x="10205174" y="6957941"/>
+              <a:ext cx="322163" cy="401625"/>
             </a:xfrm>
             <a:prstGeom prst="rect">
               <a:avLst/>
@@ -7981,8 +8867,8 @@
           </p:nvSpPr>
           <p:spPr>
             <a:xfrm>
-              <a:off x="6333353" y="3840286"/>
-              <a:ext cx="216623" cy="935180"/>
+              <a:off x="10205174" y="5820002"/>
+              <a:ext cx="322163" cy="1137938"/>
             </a:xfrm>
             <a:prstGeom prst="rect">
               <a:avLst/>
@@ -8007,8 +8893,8 @@
           </p:nvSpPr>
           <p:spPr>
             <a:xfrm>
-              <a:off x="6333353" y="5545615"/>
-              <a:ext cx="216623" cy="55010"/>
+              <a:off x="10205174" y="7895067"/>
+              <a:ext cx="322163" cy="66937"/>
             </a:xfrm>
             <a:prstGeom prst="rect">
               <a:avLst/>
@@ -8033,8 +8919,8 @@
           </p:nvSpPr>
           <p:spPr>
             <a:xfrm>
-              <a:off x="6333353" y="5710647"/>
-              <a:ext cx="216623" cy="110021"/>
+              <a:off x="10205174" y="8095880"/>
+              <a:ext cx="322163" cy="133875"/>
             </a:xfrm>
             <a:prstGeom prst="rect">
               <a:avLst/>
@@ -8059,8 +8945,8 @@
           </p:nvSpPr>
           <p:spPr>
             <a:xfrm>
-              <a:off x="6333353" y="5490605"/>
-              <a:ext cx="216623" cy="55010"/>
+              <a:off x="10205174" y="7828130"/>
+              <a:ext cx="322163" cy="66937"/>
             </a:xfrm>
             <a:prstGeom prst="rect">
               <a:avLst/>
@@ -8085,8 +8971,8 @@
           </p:nvSpPr>
           <p:spPr>
             <a:xfrm>
-              <a:off x="6333353" y="5820668"/>
-              <a:ext cx="216623" cy="275053"/>
+              <a:off x="10205174" y="8229755"/>
+              <a:ext cx="322163" cy="334687"/>
             </a:xfrm>
             <a:prstGeom prst="rect">
               <a:avLst/>
@@ -8111,8 +8997,8 @@
           </p:nvSpPr>
           <p:spPr>
             <a:xfrm>
-              <a:off x="6333353" y="2079946"/>
-              <a:ext cx="216623" cy="1760340"/>
+              <a:off x="10205174" y="3677999"/>
+              <a:ext cx="322163" cy="2142002"/>
             </a:xfrm>
             <a:prstGeom prst="rect">
               <a:avLst/>
@@ -8137,8 +9023,8 @@
           </p:nvSpPr>
           <p:spPr>
             <a:xfrm>
-              <a:off x="6333353" y="5215551"/>
-              <a:ext cx="216623" cy="275053"/>
+              <a:off x="10205174" y="7493442"/>
+              <a:ext cx="322163" cy="334687"/>
             </a:xfrm>
             <a:prstGeom prst="rect">
               <a:avLst/>
@@ -8163,8 +9049,8 @@
           </p:nvSpPr>
           <p:spPr>
             <a:xfrm>
-              <a:off x="6333353" y="5600626"/>
-              <a:ext cx="216623" cy="110021"/>
+              <a:off x="10205174" y="7962005"/>
+              <a:ext cx="322163" cy="133875"/>
             </a:xfrm>
             <a:prstGeom prst="rect">
               <a:avLst/>
@@ -8189,8 +9075,8 @@
           </p:nvSpPr>
           <p:spPr>
             <a:xfrm>
-              <a:off x="6333353" y="5820668"/>
-              <a:ext cx="216623" cy="0"/>
+              <a:off x="10205174" y="8229755"/>
+              <a:ext cx="322163" cy="0"/>
             </a:xfrm>
             <a:prstGeom prst="rect">
               <a:avLst/>
@@ -8215,8 +9101,8 @@
           </p:nvSpPr>
           <p:spPr>
             <a:xfrm>
-              <a:off x="6634219" y="5710647"/>
-              <a:ext cx="216623" cy="110021"/>
+              <a:off x="10652623" y="8095880"/>
+              <a:ext cx="322163" cy="133875"/>
             </a:xfrm>
             <a:prstGeom prst="rect">
               <a:avLst/>
@@ -8241,8 +9127,8 @@
           </p:nvSpPr>
           <p:spPr>
             <a:xfrm>
-              <a:off x="6634219" y="5655636"/>
-              <a:ext cx="216623" cy="55010"/>
+              <a:off x="10652623" y="8028942"/>
+              <a:ext cx="322163" cy="66937"/>
             </a:xfrm>
             <a:prstGeom prst="rect">
               <a:avLst/>
@@ -8267,8 +9153,8 @@
           </p:nvSpPr>
           <p:spPr>
             <a:xfrm>
-              <a:off x="6634219" y="5325573"/>
-              <a:ext cx="216623" cy="330063"/>
+              <a:off x="10652623" y="7627317"/>
+              <a:ext cx="322163" cy="401625"/>
             </a:xfrm>
             <a:prstGeom prst="rect">
               <a:avLst/>
@@ -8293,8 +9179,8 @@
           </p:nvSpPr>
           <p:spPr>
             <a:xfrm>
-              <a:off x="6634219" y="5930690"/>
-              <a:ext cx="216623" cy="0"/>
+              <a:off x="10652623" y="8363630"/>
+              <a:ext cx="322163" cy="0"/>
             </a:xfrm>
             <a:prstGeom prst="rect">
               <a:avLst/>
@@ -8319,8 +9205,8 @@
           </p:nvSpPr>
           <p:spPr>
             <a:xfrm>
-              <a:off x="6634219" y="5930690"/>
-              <a:ext cx="216623" cy="55010"/>
+              <a:off x="10652623" y="8363630"/>
+              <a:ext cx="322163" cy="66937"/>
             </a:xfrm>
             <a:prstGeom prst="rect">
               <a:avLst/>
@@ -8345,8 +9231,8 @@
           </p:nvSpPr>
           <p:spPr>
             <a:xfrm>
-              <a:off x="6634219" y="5875679"/>
-              <a:ext cx="216623" cy="55010"/>
+              <a:off x="10652623" y="8296693"/>
+              <a:ext cx="322163" cy="66937"/>
             </a:xfrm>
             <a:prstGeom prst="rect">
               <a:avLst/>
@@ -8371,8 +9257,8 @@
           </p:nvSpPr>
           <p:spPr>
             <a:xfrm>
-              <a:off x="6634219" y="5985700"/>
-              <a:ext cx="216623" cy="110021"/>
+              <a:off x="10652623" y="8430568"/>
+              <a:ext cx="322163" cy="133875"/>
             </a:xfrm>
             <a:prstGeom prst="rect">
               <a:avLst/>
@@ -8397,8 +9283,8 @@
           </p:nvSpPr>
           <p:spPr>
             <a:xfrm>
-              <a:off x="6634219" y="3785275"/>
-              <a:ext cx="216623" cy="1540297"/>
+              <a:off x="10652623" y="5753064"/>
+              <a:ext cx="322163" cy="1874252"/>
             </a:xfrm>
             <a:prstGeom prst="rect">
               <a:avLst/>
@@ -8423,8 +9309,8 @@
           </p:nvSpPr>
           <p:spPr>
             <a:xfrm>
-              <a:off x="6634219" y="5820668"/>
-              <a:ext cx="216623" cy="55010"/>
+              <a:off x="10652623" y="8229755"/>
+              <a:ext cx="322163" cy="66937"/>
             </a:xfrm>
             <a:prstGeom prst="rect">
               <a:avLst/>
@@ -8449,8 +9335,8 @@
           </p:nvSpPr>
           <p:spPr>
             <a:xfrm>
-              <a:off x="6634219" y="5930690"/>
-              <a:ext cx="216623" cy="0"/>
+              <a:off x="10652623" y="8363630"/>
+              <a:ext cx="322163" cy="0"/>
             </a:xfrm>
             <a:prstGeom prst="rect">
               <a:avLst/>
@@ -8475,8 +9361,8 @@
           </p:nvSpPr>
           <p:spPr>
             <a:xfrm>
-              <a:off x="6634219" y="5985700"/>
-              <a:ext cx="216623" cy="0"/>
+              <a:off x="10652623" y="8430568"/>
+              <a:ext cx="322163" cy="0"/>
             </a:xfrm>
             <a:prstGeom prst="rect">
               <a:avLst/>
@@ -8501,8 +9387,8 @@
           </p:nvSpPr>
           <p:spPr>
             <a:xfrm>
-              <a:off x="6935084" y="4610435"/>
-              <a:ext cx="216623" cy="440085"/>
+              <a:off x="11100072" y="6757128"/>
+              <a:ext cx="322163" cy="535500"/>
             </a:xfrm>
             <a:prstGeom prst="rect">
               <a:avLst/>
@@ -8527,8 +9413,8 @@
           </p:nvSpPr>
           <p:spPr>
             <a:xfrm>
-              <a:off x="6935084" y="4390392"/>
-              <a:ext cx="216623" cy="220042"/>
+              <a:off x="11100072" y="6489378"/>
+              <a:ext cx="322163" cy="267750"/>
             </a:xfrm>
             <a:prstGeom prst="rect">
               <a:avLst/>
@@ -8553,8 +9439,8 @@
           </p:nvSpPr>
           <p:spPr>
             <a:xfrm>
-              <a:off x="6935084" y="3675254"/>
-              <a:ext cx="216623" cy="715138"/>
+              <a:off x="11100072" y="5619189"/>
+              <a:ext cx="322163" cy="870188"/>
             </a:xfrm>
             <a:prstGeom prst="rect">
               <a:avLst/>
@@ -8579,8 +9465,8 @@
           </p:nvSpPr>
           <p:spPr>
             <a:xfrm>
-              <a:off x="6935084" y="5270562"/>
-              <a:ext cx="216623" cy="110021"/>
+              <a:off x="11100072" y="7560379"/>
+              <a:ext cx="322163" cy="133875"/>
             </a:xfrm>
             <a:prstGeom prst="rect">
               <a:avLst/>
@@ -8605,8 +9491,8 @@
           </p:nvSpPr>
           <p:spPr>
             <a:xfrm>
-              <a:off x="6935084" y="5435594"/>
-              <a:ext cx="216623" cy="0"/>
+              <a:off x="11100072" y="7761192"/>
+              <a:ext cx="322163" cy="0"/>
             </a:xfrm>
             <a:prstGeom prst="rect">
               <a:avLst/>
@@ -8631,8 +9517,8 @@
           </p:nvSpPr>
           <p:spPr>
             <a:xfrm>
-              <a:off x="6935084" y="5160541"/>
-              <a:ext cx="216623" cy="110021"/>
+              <a:off x="11100072" y="7426504"/>
+              <a:ext cx="322163" cy="133875"/>
             </a:xfrm>
             <a:prstGeom prst="rect">
               <a:avLst/>
@@ -8657,8 +9543,8 @@
           </p:nvSpPr>
           <p:spPr>
             <a:xfrm>
-              <a:off x="6935084" y="5600626"/>
-              <a:ext cx="216623" cy="495095"/>
+              <a:off x="11100072" y="7962005"/>
+              <a:ext cx="322163" cy="602438"/>
             </a:xfrm>
             <a:prstGeom prst="rect">
               <a:avLst/>
@@ -8683,8 +9569,8 @@
           </p:nvSpPr>
           <p:spPr>
             <a:xfrm>
-              <a:off x="6935084" y="2795084"/>
-              <a:ext cx="216623" cy="880170"/>
+              <a:off x="11100072" y="4548188"/>
+              <a:ext cx="322163" cy="1071001"/>
             </a:xfrm>
             <a:prstGeom prst="rect">
               <a:avLst/>
@@ -8709,8 +9595,8 @@
           </p:nvSpPr>
           <p:spPr>
             <a:xfrm>
-              <a:off x="6935084" y="5050520"/>
-              <a:ext cx="216623" cy="110021"/>
+              <a:off x="11100072" y="7292629"/>
+              <a:ext cx="322163" cy="133875"/>
             </a:xfrm>
             <a:prstGeom prst="rect">
               <a:avLst/>
@@ -8735,8 +9621,8 @@
           </p:nvSpPr>
           <p:spPr>
             <a:xfrm>
-              <a:off x="6935084" y="5380583"/>
-              <a:ext cx="216623" cy="55010"/>
+              <a:off x="11100072" y="7694254"/>
+              <a:ext cx="322163" cy="66937"/>
             </a:xfrm>
             <a:prstGeom prst="rect">
               <a:avLst/>
@@ -8761,8 +9647,8 @@
           </p:nvSpPr>
           <p:spPr>
             <a:xfrm>
-              <a:off x="6935084" y="5435594"/>
-              <a:ext cx="216623" cy="165031"/>
+              <a:off x="11100072" y="7761192"/>
+              <a:ext cx="322163" cy="200812"/>
             </a:xfrm>
             <a:prstGeom prst="rect">
               <a:avLst/>
@@ -8787,8 +9673,8 @@
           </p:nvSpPr>
           <p:spPr>
             <a:xfrm>
-              <a:off x="7235950" y="4995509"/>
-              <a:ext cx="216623" cy="110021"/>
+              <a:off x="11547520" y="7225691"/>
+              <a:ext cx="322163" cy="133875"/>
             </a:xfrm>
             <a:prstGeom prst="rect">
               <a:avLst/>
@@ -8813,8 +9699,8 @@
           </p:nvSpPr>
           <p:spPr>
             <a:xfrm>
-              <a:off x="7235950" y="4665445"/>
-              <a:ext cx="216623" cy="330063"/>
+              <a:off x="11547520" y="6824066"/>
+              <a:ext cx="322163" cy="401625"/>
             </a:xfrm>
             <a:prstGeom prst="rect">
               <a:avLst/>
@@ -8839,8 +9725,8 @@
           </p:nvSpPr>
           <p:spPr>
             <a:xfrm>
-              <a:off x="7235950" y="4335381"/>
-              <a:ext cx="216623" cy="330063"/>
+              <a:off x="11547520" y="6422440"/>
+              <a:ext cx="322163" cy="401625"/>
             </a:xfrm>
             <a:prstGeom prst="rect">
               <a:avLst/>
@@ -8865,8 +9751,8 @@
           </p:nvSpPr>
           <p:spPr>
             <a:xfrm>
-              <a:off x="7235950" y="5435594"/>
-              <a:ext cx="216623" cy="165031"/>
+              <a:off x="11547520" y="7761192"/>
+              <a:ext cx="322163" cy="200812"/>
             </a:xfrm>
             <a:prstGeom prst="rect">
               <a:avLst/>
@@ -8891,8 +9777,8 @@
           </p:nvSpPr>
           <p:spPr>
             <a:xfrm>
-              <a:off x="7235950" y="5655636"/>
-              <a:ext cx="216623" cy="55010"/>
+              <a:off x="11547520" y="8028942"/>
+              <a:ext cx="322163" cy="66937"/>
             </a:xfrm>
             <a:prstGeom prst="rect">
               <a:avLst/>
@@ -8917,8 +9803,8 @@
           </p:nvSpPr>
           <p:spPr>
             <a:xfrm>
-              <a:off x="7235950" y="5215551"/>
-              <a:ext cx="216623" cy="220042"/>
+              <a:off x="11547520" y="7493442"/>
+              <a:ext cx="322163" cy="267750"/>
             </a:xfrm>
             <a:prstGeom prst="rect">
               <a:avLst/>
@@ -8943,8 +9829,8 @@
           </p:nvSpPr>
           <p:spPr>
             <a:xfrm>
-              <a:off x="7235950" y="5710647"/>
-              <a:ext cx="216623" cy="385074"/>
+              <a:off x="11547520" y="8095880"/>
+              <a:ext cx="322163" cy="468563"/>
             </a:xfrm>
             <a:prstGeom prst="rect">
               <a:avLst/>
@@ -8969,8 +9855,8 @@
           </p:nvSpPr>
           <p:spPr>
             <a:xfrm>
-              <a:off x="7235950" y="2630052"/>
-              <a:ext cx="216623" cy="1705329"/>
+              <a:off x="11547520" y="4347375"/>
+              <a:ext cx="322163" cy="2075065"/>
             </a:xfrm>
             <a:prstGeom prst="rect">
               <a:avLst/>
@@ -8995,8 +9881,8 @@
           </p:nvSpPr>
           <p:spPr>
             <a:xfrm>
-              <a:off x="7235950" y="5105530"/>
-              <a:ext cx="216623" cy="110021"/>
+              <a:off x="11547520" y="7359566"/>
+              <a:ext cx="322163" cy="133875"/>
             </a:xfrm>
             <a:prstGeom prst="rect">
               <a:avLst/>
@@ -9021,8 +9907,8 @@
           </p:nvSpPr>
           <p:spPr>
             <a:xfrm>
-              <a:off x="7235950" y="5600626"/>
-              <a:ext cx="216623" cy="55010"/>
+              <a:off x="11547520" y="7962005"/>
+              <a:ext cx="322163" cy="66937"/>
             </a:xfrm>
             <a:prstGeom prst="rect">
               <a:avLst/>
@@ -9047,8 +9933,8 @@
           </p:nvSpPr>
           <p:spPr>
             <a:xfrm>
-              <a:off x="7235950" y="5710647"/>
-              <a:ext cx="216623" cy="0"/>
+              <a:off x="11547520" y="8095880"/>
+              <a:ext cx="322163" cy="0"/>
             </a:xfrm>
             <a:prstGeom prst="rect">
               <a:avLst/>
@@ -9073,8 +9959,8 @@
           </p:nvSpPr>
           <p:spPr>
             <a:xfrm>
-              <a:off x="7536815" y="4665445"/>
-              <a:ext cx="216623" cy="495095"/>
+              <a:off x="11994969" y="6824066"/>
+              <a:ext cx="322163" cy="602438"/>
             </a:xfrm>
             <a:prstGeom prst="rect">
               <a:avLst/>
@@ -9099,8 +9985,8 @@
           </p:nvSpPr>
           <p:spPr>
             <a:xfrm>
-              <a:off x="7536815" y="4390392"/>
-              <a:ext cx="216623" cy="275053"/>
+              <a:off x="11994969" y="6489378"/>
+              <a:ext cx="322163" cy="334687"/>
             </a:xfrm>
             <a:prstGeom prst="rect">
               <a:avLst/>
@@ -9125,8 +10011,8 @@
           </p:nvSpPr>
           <p:spPr>
             <a:xfrm>
-              <a:off x="7536815" y="3950307"/>
-              <a:ext cx="216623" cy="440085"/>
+              <a:off x="11994969" y="5953877"/>
+              <a:ext cx="322163" cy="535500"/>
             </a:xfrm>
             <a:prstGeom prst="rect">
               <a:avLst/>
@@ -9151,8 +10037,8 @@
           </p:nvSpPr>
           <p:spPr>
             <a:xfrm>
-              <a:off x="7536815" y="5490605"/>
-              <a:ext cx="216623" cy="220042"/>
+              <a:off x="11994969" y="7828130"/>
+              <a:ext cx="322163" cy="267750"/>
             </a:xfrm>
             <a:prstGeom prst="rect">
               <a:avLst/>
@@ -9177,8 +10063,8 @@
           </p:nvSpPr>
           <p:spPr>
             <a:xfrm>
-              <a:off x="7536815" y="5875679"/>
-              <a:ext cx="216623" cy="55010"/>
+              <a:off x="11994969" y="8296693"/>
+              <a:ext cx="322163" cy="66937"/>
             </a:xfrm>
             <a:prstGeom prst="rect">
               <a:avLst/>
@@ -9203,8 +10089,8 @@
           </p:nvSpPr>
           <p:spPr>
             <a:xfrm>
-              <a:off x="7536815" y="5215551"/>
-              <a:ext cx="216623" cy="275053"/>
+              <a:off x="11994969" y="7493442"/>
+              <a:ext cx="322163" cy="334687"/>
             </a:xfrm>
             <a:prstGeom prst="rect">
               <a:avLst/>
@@ -9229,8 +10115,8 @@
           </p:nvSpPr>
           <p:spPr>
             <a:xfrm>
-              <a:off x="7536815" y="5930690"/>
-              <a:ext cx="216623" cy="165031"/>
+              <a:off x="11994969" y="8363630"/>
+              <a:ext cx="322163" cy="200812"/>
             </a:xfrm>
             <a:prstGeom prst="rect">
               <a:avLst/>
@@ -9255,8 +10141,8 @@
           </p:nvSpPr>
           <p:spPr>
             <a:xfrm>
-              <a:off x="7536815" y="1859903"/>
-              <a:ext cx="216623" cy="2090403"/>
+              <a:off x="11994969" y="3410249"/>
+              <a:ext cx="322163" cy="2543628"/>
             </a:xfrm>
             <a:prstGeom prst="rect">
               <a:avLst/>
@@ -9281,8 +10167,8 @@
           </p:nvSpPr>
           <p:spPr>
             <a:xfrm>
-              <a:off x="7536815" y="5160541"/>
-              <a:ext cx="216623" cy="55010"/>
+              <a:off x="11994969" y="7426504"/>
+              <a:ext cx="322163" cy="66937"/>
             </a:xfrm>
             <a:prstGeom prst="rect">
               <a:avLst/>
@@ -9307,8 +10193,8 @@
           </p:nvSpPr>
           <p:spPr>
             <a:xfrm>
-              <a:off x="7536815" y="5710647"/>
-              <a:ext cx="216623" cy="165031"/>
+              <a:off x="11994969" y="8095880"/>
+              <a:ext cx="322163" cy="200812"/>
             </a:xfrm>
             <a:prstGeom prst="rect">
               <a:avLst/>
@@ -9333,8 +10219,8 @@
           </p:nvSpPr>
           <p:spPr>
             <a:xfrm>
-              <a:off x="7536815" y="5930690"/>
-              <a:ext cx="216623" cy="0"/>
+              <a:off x="11994969" y="8363630"/>
+              <a:ext cx="322163" cy="0"/>
             </a:xfrm>
             <a:prstGeom prst="rect">
               <a:avLst/>
@@ -9359,8 +10245,8 @@
           </p:nvSpPr>
           <p:spPr>
             <a:xfrm>
-              <a:off x="7837681" y="4665445"/>
-              <a:ext cx="216623" cy="220042"/>
+              <a:off x="12442418" y="6824066"/>
+              <a:ext cx="322163" cy="267750"/>
             </a:xfrm>
             <a:prstGeom prst="rect">
               <a:avLst/>
@@ -9385,8 +10271,8 @@
           </p:nvSpPr>
           <p:spPr>
             <a:xfrm>
-              <a:off x="7837681" y="4335381"/>
-              <a:ext cx="216623" cy="330063"/>
+              <a:off x="12442418" y="6422440"/>
+              <a:ext cx="322163" cy="401625"/>
             </a:xfrm>
             <a:prstGeom prst="rect">
               <a:avLst/>
@@ -9411,8 +10297,8 @@
           </p:nvSpPr>
           <p:spPr>
             <a:xfrm>
-              <a:off x="7837681" y="3675254"/>
-              <a:ext cx="216623" cy="660127"/>
+              <a:off x="12442418" y="5619189"/>
+              <a:ext cx="322163" cy="803251"/>
             </a:xfrm>
             <a:prstGeom prst="rect">
               <a:avLst/>
@@ -9437,8 +10323,8 @@
           </p:nvSpPr>
           <p:spPr>
             <a:xfrm>
-              <a:off x="7837681" y="5160541"/>
-              <a:ext cx="216623" cy="110021"/>
+              <a:off x="12442418" y="7426504"/>
+              <a:ext cx="322163" cy="133875"/>
             </a:xfrm>
             <a:prstGeom prst="rect">
               <a:avLst/>
@@ -9463,8 +10349,8 @@
           </p:nvSpPr>
           <p:spPr>
             <a:xfrm>
-              <a:off x="7837681" y="5380583"/>
-              <a:ext cx="216623" cy="55010"/>
+              <a:off x="12442418" y="7694254"/>
+              <a:ext cx="322163" cy="66937"/>
             </a:xfrm>
             <a:prstGeom prst="rect">
               <a:avLst/>
@@ -9489,8 +10375,8 @@
           </p:nvSpPr>
           <p:spPr>
             <a:xfrm>
-              <a:off x="7837681" y="5050520"/>
-              <a:ext cx="216623" cy="110021"/>
+              <a:off x="12442418" y="7292629"/>
+              <a:ext cx="322163" cy="133875"/>
             </a:xfrm>
             <a:prstGeom prst="rect">
               <a:avLst/>
@@ -9515,8 +10401,8 @@
           </p:nvSpPr>
           <p:spPr>
             <a:xfrm>
-              <a:off x="7837681" y="5600626"/>
-              <a:ext cx="216623" cy="495095"/>
+              <a:off x="12442418" y="7962005"/>
+              <a:ext cx="322163" cy="602438"/>
             </a:xfrm>
             <a:prstGeom prst="rect">
               <a:avLst/>
@@ -9541,8 +10427,8 @@
           </p:nvSpPr>
           <p:spPr>
             <a:xfrm>
-              <a:off x="7837681" y="1034744"/>
-              <a:ext cx="216623" cy="2640510"/>
+              <a:off x="12442418" y="2406185"/>
+              <a:ext cx="322163" cy="3213004"/>
             </a:xfrm>
             <a:prstGeom prst="rect">
               <a:avLst/>
@@ -9567,8 +10453,8 @@
           </p:nvSpPr>
           <p:spPr>
             <a:xfrm>
-              <a:off x="7837681" y="4885488"/>
-              <a:ext cx="216623" cy="165031"/>
+              <a:off x="12442418" y="7091816"/>
+              <a:ext cx="322163" cy="200812"/>
             </a:xfrm>
             <a:prstGeom prst="rect">
               <a:avLst/>
@@ -9593,8 +10479,8 @@
           </p:nvSpPr>
           <p:spPr>
             <a:xfrm>
-              <a:off x="7837681" y="5270562"/>
-              <a:ext cx="216623" cy="110021"/>
+              <a:off x="12442418" y="7560379"/>
+              <a:ext cx="322163" cy="133875"/>
             </a:xfrm>
             <a:prstGeom prst="rect">
               <a:avLst/>
@@ -9619,8 +10505,8 @@
           </p:nvSpPr>
           <p:spPr>
             <a:xfrm>
-              <a:off x="7837681" y="5435594"/>
-              <a:ext cx="216623" cy="165031"/>
+              <a:off x="12442418" y="7761192"/>
+              <a:ext cx="322163" cy="200812"/>
             </a:xfrm>
             <a:prstGeom prst="rect">
               <a:avLst/>
@@ -9645,8 +10531,8 @@
           </p:nvSpPr>
           <p:spPr>
             <a:xfrm>
-              <a:off x="8138547" y="4940498"/>
-              <a:ext cx="216623" cy="330063"/>
+              <a:off x="12889867" y="7158754"/>
+              <a:ext cx="322163" cy="401625"/>
             </a:xfrm>
             <a:prstGeom prst="rect">
               <a:avLst/>
@@ -9671,8 +10557,8 @@
           </p:nvSpPr>
           <p:spPr>
             <a:xfrm>
-              <a:off x="8138547" y="4665445"/>
-              <a:ext cx="216623" cy="275053"/>
+              <a:off x="12889867" y="6824066"/>
+              <a:ext cx="322163" cy="334687"/>
             </a:xfrm>
             <a:prstGeom prst="rect">
               <a:avLst/>
@@ -9697,8 +10583,8 @@
           </p:nvSpPr>
           <p:spPr>
             <a:xfrm>
-              <a:off x="8138547" y="3730264"/>
-              <a:ext cx="216623" cy="935180"/>
+              <a:off x="12889867" y="5686127"/>
+              <a:ext cx="322163" cy="1137938"/>
             </a:xfrm>
             <a:prstGeom prst="rect">
               <a:avLst/>
@@ -9723,8 +10609,8 @@
           </p:nvSpPr>
           <p:spPr>
             <a:xfrm>
-              <a:off x="8138547" y="5655636"/>
-              <a:ext cx="216623" cy="0"/>
+              <a:off x="12889867" y="8028942"/>
+              <a:ext cx="322163" cy="0"/>
             </a:xfrm>
             <a:prstGeom prst="rect">
               <a:avLst/>
@@ -9749,8 +10635,8 @@
           </p:nvSpPr>
           <p:spPr>
             <a:xfrm>
-              <a:off x="8138547" y="5655636"/>
-              <a:ext cx="216623" cy="55010"/>
+              <a:off x="12889867" y="8028942"/>
+              <a:ext cx="322163" cy="66937"/>
             </a:xfrm>
             <a:prstGeom prst="rect">
               <a:avLst/>
@@ -9775,8 +10661,8 @@
           </p:nvSpPr>
           <p:spPr>
             <a:xfrm>
-              <a:off x="8138547" y="5490605"/>
-              <a:ext cx="216623" cy="165031"/>
+              <a:off x="12889867" y="7828130"/>
+              <a:ext cx="322163" cy="200812"/>
             </a:xfrm>
             <a:prstGeom prst="rect">
               <a:avLst/>
@@ -9801,8 +10687,8 @@
           </p:nvSpPr>
           <p:spPr>
             <a:xfrm>
-              <a:off x="8138547" y="5820668"/>
-              <a:ext cx="216623" cy="275053"/>
+              <a:off x="12889867" y="8229755"/>
+              <a:ext cx="322163" cy="334687"/>
             </a:xfrm>
             <a:prstGeom prst="rect">
               <a:avLst/>
@@ -9827,8 +10713,8 @@
           </p:nvSpPr>
           <p:spPr>
             <a:xfrm>
-              <a:off x="8138547" y="1694871"/>
-              <a:ext cx="216623" cy="2035393"/>
+              <a:off x="12889867" y="3209436"/>
+              <a:ext cx="322163" cy="2476690"/>
             </a:xfrm>
             <a:prstGeom prst="rect">
               <a:avLst/>
@@ -9853,8 +10739,8 @@
           </p:nvSpPr>
           <p:spPr>
             <a:xfrm>
-              <a:off x="8138547" y="5270562"/>
-              <a:ext cx="216623" cy="220042"/>
+              <a:off x="12889867" y="7560379"/>
+              <a:ext cx="322163" cy="267750"/>
             </a:xfrm>
             <a:prstGeom prst="rect">
               <a:avLst/>
@@ -9879,8 +10765,8 @@
           </p:nvSpPr>
           <p:spPr>
             <a:xfrm>
-              <a:off x="8138547" y="5655636"/>
-              <a:ext cx="216623" cy="0"/>
+              <a:off x="12889867" y="8028942"/>
+              <a:ext cx="322163" cy="0"/>
             </a:xfrm>
             <a:prstGeom prst="rect">
               <a:avLst/>
@@ -9905,8 +10791,8 @@
           </p:nvSpPr>
           <p:spPr>
             <a:xfrm>
-              <a:off x="8138547" y="5710647"/>
-              <a:ext cx="216623" cy="110021"/>
+              <a:off x="12889867" y="8095880"/>
+              <a:ext cx="322163" cy="133875"/>
             </a:xfrm>
             <a:prstGeom prst="rect">
               <a:avLst/>
@@ -9931,90 +10817,90 @@
           </p:nvSpPr>
           <p:spPr>
             <a:xfrm>
-              <a:off x="725220" y="1210505"/>
-              <a:ext cx="7521638" cy="4566615"/>
+              <a:off x="1864730" y="2620054"/>
+              <a:ext cx="11186218" cy="5556711"/>
             </a:xfrm>
             <a:custGeom>
               <a:avLst/>
               <a:pathLst>
-                <a:path w="7521638" h="4566615">
+                <a:path w="11186218" h="5556711">
                   <a:moveTo>
-                    <a:pt x="0" y="4566615"/>
+                    <a:pt x="0" y="5556711"/>
                   </a:moveTo>
                   <a:lnTo>
-                    <a:pt x="300865" y="4301114"/>
+                    <a:pt x="447448" y="5233646"/>
                   </a:lnTo>
                   <a:lnTo>
-                    <a:pt x="601731" y="4460414"/>
+                    <a:pt x="894897" y="5427485"/>
                   </a:lnTo>
                   <a:lnTo>
-                    <a:pt x="902596" y="4354214"/>
+                    <a:pt x="1342346" y="5298259"/>
                   </a:lnTo>
                   <a:lnTo>
-                    <a:pt x="1203462" y="4513514"/>
+                    <a:pt x="1789794" y="5492098"/>
                   </a:lnTo>
                   <a:lnTo>
-                    <a:pt x="1504327" y="4513514"/>
+                    <a:pt x="2237243" y="5492098"/>
                   </a:lnTo>
                   <a:lnTo>
-                    <a:pt x="1805193" y="2283307"/>
+                    <a:pt x="2684692" y="2778355"/>
                   </a:lnTo>
                   <a:lnTo>
-                    <a:pt x="2106058" y="3398411"/>
+                    <a:pt x="3132141" y="4135227"/>
                   </a:lnTo>
                   <a:lnTo>
-                    <a:pt x="2406924" y="3823212"/>
+                    <a:pt x="3579589" y="4652130"/>
                   </a:lnTo>
                   <a:lnTo>
-                    <a:pt x="2707789" y="3717012"/>
+                    <a:pt x="4027038" y="4522904"/>
                   </a:lnTo>
                   <a:lnTo>
-                    <a:pt x="3008655" y="2283307"/>
+                    <a:pt x="4474487" y="2778355"/>
                   </a:lnTo>
                   <a:lnTo>
-                    <a:pt x="3309520" y="2708108"/>
+                    <a:pt x="4921936" y="3295259"/>
                   </a:lnTo>
                   <a:lnTo>
-                    <a:pt x="3610386" y="3663912"/>
+                    <a:pt x="5369384" y="4458291"/>
                   </a:lnTo>
                   <a:lnTo>
-                    <a:pt x="3911252" y="2708108"/>
+                    <a:pt x="5816833" y="3295259"/>
                   </a:lnTo>
                   <a:lnTo>
-                    <a:pt x="4212117" y="2389507"/>
+                    <a:pt x="6264282" y="2907581"/>
                   </a:lnTo>
                   <a:lnTo>
-                    <a:pt x="4512983" y="3079810"/>
+                    <a:pt x="6711731" y="3747549"/>
                   </a:lnTo>
                   <a:lnTo>
-                    <a:pt x="4813848" y="2655008"/>
+                    <a:pt x="7159179" y="3230646"/>
                   </a:lnTo>
                   <a:lnTo>
-                    <a:pt x="5114714" y="1221304"/>
+                    <a:pt x="7606628" y="1486097"/>
                   </a:lnTo>
                   <a:lnTo>
-                    <a:pt x="5415579" y="1805405"/>
+                    <a:pt x="8054077" y="2196839"/>
                   </a:lnTo>
                   <a:lnTo>
-                    <a:pt x="5716445" y="1008903"/>
+                    <a:pt x="8501526" y="1227645"/>
                   </a:lnTo>
                   <a:lnTo>
-                    <a:pt x="6017310" y="2655008"/>
+                    <a:pt x="8948974" y="3230646"/>
                   </a:lnTo>
                   <a:lnTo>
-                    <a:pt x="6318176" y="1699205"/>
+                    <a:pt x="9396423" y="2067613"/>
                   </a:lnTo>
                   <a:lnTo>
-                    <a:pt x="6619041" y="1539905"/>
+                    <a:pt x="9843872" y="1873774"/>
                   </a:lnTo>
                   <a:lnTo>
-                    <a:pt x="6919907" y="796502"/>
+                    <a:pt x="10291321" y="969193"/>
                   </a:lnTo>
                   <a:lnTo>
-                    <a:pt x="7220772" y="0"/>
+                    <a:pt x="10738769" y="0"/>
                   </a:lnTo>
                   <a:lnTo>
-                    <a:pt x="7521638" y="637202"/>
+                    <a:pt x="11186218" y="775355"/>
                   </a:lnTo>
                 </a:path>
               </a:pathLst>
@@ -10045,7 +10931,7 @@
           </p:nvSpPr>
           <p:spPr>
             <a:xfrm>
-              <a:off x="690090" y="5741991"/>
+              <a:off x="1829600" y="8141636"/>
               <a:ext cx="70259" cy="70259"/>
             </a:xfrm>
             <a:prstGeom prst="ellipse">
@@ -10080,7 +10966,7 @@
           </p:nvSpPr>
           <p:spPr>
             <a:xfrm>
-              <a:off x="990956" y="5476490"/>
+              <a:off x="2277049" y="7818571"/>
               <a:ext cx="70259" cy="70259"/>
             </a:xfrm>
             <a:prstGeom prst="ellipse">
@@ -10115,7 +11001,7 @@
           </p:nvSpPr>
           <p:spPr>
             <a:xfrm>
-              <a:off x="1291821" y="5635791"/>
+              <a:off x="2724497" y="8012410"/>
               <a:ext cx="70259" cy="70259"/>
             </a:xfrm>
             <a:prstGeom prst="ellipse">
@@ -10150,7 +11036,7 @@
           </p:nvSpPr>
           <p:spPr>
             <a:xfrm>
-              <a:off x="1592687" y="5529590"/>
+              <a:off x="3171946" y="7883184"/>
               <a:ext cx="70259" cy="70259"/>
             </a:xfrm>
             <a:prstGeom prst="ellipse">
@@ -10185,7 +11071,7 @@
           </p:nvSpPr>
           <p:spPr>
             <a:xfrm>
-              <a:off x="1893552" y="5688891"/>
+              <a:off x="3619395" y="8077023"/>
               <a:ext cx="70259" cy="70259"/>
             </a:xfrm>
             <a:prstGeom prst="ellipse">
@@ -10220,7 +11106,7 @@
           </p:nvSpPr>
           <p:spPr>
             <a:xfrm>
-              <a:off x="2194418" y="5688891"/>
+              <a:off x="4066844" y="8077023"/>
               <a:ext cx="70259" cy="70259"/>
             </a:xfrm>
             <a:prstGeom prst="ellipse">
@@ -10255,7 +11141,7 @@
           </p:nvSpPr>
           <p:spPr>
             <a:xfrm>
-              <a:off x="2495283" y="3458683"/>
+              <a:off x="4514292" y="5363280"/>
               <a:ext cx="70259" cy="70259"/>
             </a:xfrm>
             <a:prstGeom prst="ellipse">
@@ -10290,7 +11176,7 @@
           </p:nvSpPr>
           <p:spPr>
             <a:xfrm>
-              <a:off x="2796149" y="4573787"/>
+              <a:off x="4961741" y="6720152"/>
               <a:ext cx="70259" cy="70259"/>
             </a:xfrm>
             <a:prstGeom prst="ellipse">
@@ -10325,7 +11211,7 @@
           </p:nvSpPr>
           <p:spPr>
             <a:xfrm>
-              <a:off x="3097014" y="4998588"/>
+              <a:off x="5409190" y="7237055"/>
               <a:ext cx="70259" cy="70259"/>
             </a:xfrm>
             <a:prstGeom prst="ellipse">
@@ -10360,7 +11246,7 @@
           </p:nvSpPr>
           <p:spPr>
             <a:xfrm>
-              <a:off x="3397880" y="4892388"/>
+              <a:off x="5856639" y="7107829"/>
               <a:ext cx="70259" cy="70259"/>
             </a:xfrm>
             <a:prstGeom prst="ellipse">
@@ -10395,7 +11281,7 @@
           </p:nvSpPr>
           <p:spPr>
             <a:xfrm>
-              <a:off x="3698745" y="3458683"/>
+              <a:off x="6304087" y="5363280"/>
               <a:ext cx="70259" cy="70259"/>
             </a:xfrm>
             <a:prstGeom prst="ellipse">
@@ -10430,7 +11316,7 @@
           </p:nvSpPr>
           <p:spPr>
             <a:xfrm>
-              <a:off x="3999611" y="3883485"/>
+              <a:off x="6751536" y="5880184"/>
               <a:ext cx="70259" cy="70259"/>
             </a:xfrm>
             <a:prstGeom prst="ellipse">
@@ -10465,7 +11351,7 @@
           </p:nvSpPr>
           <p:spPr>
             <a:xfrm>
-              <a:off x="4300477" y="4839288"/>
+              <a:off x="7198985" y="7043216"/>
               <a:ext cx="70259" cy="70259"/>
             </a:xfrm>
             <a:prstGeom prst="ellipse">
@@ -10500,7 +11386,7 @@
           </p:nvSpPr>
           <p:spPr>
             <a:xfrm>
-              <a:off x="4601342" y="3883485"/>
+              <a:off x="7646434" y="5880184"/>
               <a:ext cx="70259" cy="70259"/>
             </a:xfrm>
             <a:prstGeom prst="ellipse">
@@ -10535,7 +11421,7 @@
           </p:nvSpPr>
           <p:spPr>
             <a:xfrm>
-              <a:off x="4902208" y="3564884"/>
+              <a:off x="8093882" y="5492506"/>
               <a:ext cx="70259" cy="70259"/>
             </a:xfrm>
             <a:prstGeom prst="ellipse">
@@ -10570,7 +11456,7 @@
           </p:nvSpPr>
           <p:spPr>
             <a:xfrm>
-              <a:off x="5203073" y="4255186"/>
+              <a:off x="8541331" y="6332474"/>
               <a:ext cx="70259" cy="70259"/>
             </a:xfrm>
             <a:prstGeom prst="ellipse">
@@ -10605,7 +11491,7 @@
           </p:nvSpPr>
           <p:spPr>
             <a:xfrm>
-              <a:off x="5503939" y="3830385"/>
+              <a:off x="8988780" y="5815571"/>
               <a:ext cx="70259" cy="70259"/>
             </a:xfrm>
             <a:prstGeom prst="ellipse">
@@ -10640,7 +11526,7 @@
           </p:nvSpPr>
           <p:spPr>
             <a:xfrm>
-              <a:off x="5804804" y="2396680"/>
+              <a:off x="9436229" y="4071022"/>
               <a:ext cx="70259" cy="70259"/>
             </a:xfrm>
             <a:prstGeom prst="ellipse">
@@ -10675,7 +11561,7 @@
           </p:nvSpPr>
           <p:spPr>
             <a:xfrm>
-              <a:off x="6105670" y="2980782"/>
+              <a:off x="9883677" y="4781764"/>
               <a:ext cx="70259" cy="70259"/>
             </a:xfrm>
             <a:prstGeom prst="ellipse">
@@ -10710,7 +11596,7 @@
           </p:nvSpPr>
           <p:spPr>
             <a:xfrm>
-              <a:off x="6406535" y="2184279"/>
+              <a:off x="10331126" y="3812570"/>
               <a:ext cx="70259" cy="70259"/>
             </a:xfrm>
             <a:prstGeom prst="ellipse">
@@ -10745,7 +11631,7 @@
           </p:nvSpPr>
           <p:spPr>
             <a:xfrm>
-              <a:off x="6707401" y="3830385"/>
+              <a:off x="10778575" y="5815571"/>
               <a:ext cx="70259" cy="70259"/>
             </a:xfrm>
             <a:prstGeom prst="ellipse">
@@ -10780,7 +11666,7 @@
           </p:nvSpPr>
           <p:spPr>
             <a:xfrm>
-              <a:off x="7008266" y="2874581"/>
+              <a:off x="11226024" y="4652538"/>
               <a:ext cx="70259" cy="70259"/>
             </a:xfrm>
             <a:prstGeom prst="ellipse">
@@ -10815,7 +11701,7 @@
           </p:nvSpPr>
           <p:spPr>
             <a:xfrm>
-              <a:off x="7309132" y="2715281"/>
+              <a:off x="11673472" y="4458699"/>
               <a:ext cx="70259" cy="70259"/>
             </a:xfrm>
             <a:prstGeom prst="ellipse">
@@ -10850,7 +11736,7 @@
           </p:nvSpPr>
           <p:spPr>
             <a:xfrm>
-              <a:off x="7609997" y="1971878"/>
+              <a:off x="12120921" y="3554118"/>
               <a:ext cx="70259" cy="70259"/>
             </a:xfrm>
             <a:prstGeom prst="ellipse">
@@ -10885,7 +11771,7 @@
           </p:nvSpPr>
           <p:spPr>
             <a:xfrm>
-              <a:off x="7910863" y="1175376"/>
+              <a:off x="12568370" y="2584924"/>
               <a:ext cx="70259" cy="70259"/>
             </a:xfrm>
             <a:prstGeom prst="ellipse">
@@ -10920,7 +11806,7 @@
           </p:nvSpPr>
           <p:spPr>
             <a:xfrm>
-              <a:off x="8211729" y="1812578"/>
+              <a:off x="13015819" y="3360280"/>
               <a:ext cx="70259" cy="70259"/>
             </a:xfrm>
             <a:prstGeom prst="ellipse">
@@ -10955,15 +11841,15 @@
           </p:nvSpPr>
           <p:spPr>
             <a:xfrm>
-              <a:off x="544700" y="1034744"/>
-              <a:ext cx="0" cy="5060977"/>
+              <a:off x="1596260" y="2406185"/>
+              <a:ext cx="0" cy="6158257"/>
             </a:xfrm>
             <a:custGeom>
               <a:avLst/>
               <a:pathLst>
-                <a:path w="0" h="5060977">
+                <a:path w="0" h="6158257">
                   <a:moveTo>
-                    <a:pt x="0" y="5060977"/>
+                    <a:pt x="0" y="6158257"/>
                   </a:moveTo>
                   <a:lnTo>
                     <a:pt x="0" y="0"/>
@@ -10995,7 +11881,7 @@
           </p:nvSpPr>
           <p:spPr>
             <a:xfrm>
-              <a:off x="388750" y="6042742"/>
+              <a:off x="1440310" y="8511464"/>
               <a:ext cx="81932" cy="105814"/>
             </a:xfrm>
             <a:prstGeom prst="rect">
@@ -11041,7 +11927,7 @@
           </p:nvSpPr>
           <p:spPr>
             <a:xfrm>
-              <a:off x="306818" y="4667333"/>
+              <a:off x="1358378" y="6837880"/>
               <a:ext cx="163864" cy="105958"/>
             </a:xfrm>
             <a:prstGeom prst="rect">
@@ -11087,7 +11973,7 @@
           </p:nvSpPr>
           <p:spPr>
             <a:xfrm>
-              <a:off x="306818" y="3292211"/>
+              <a:off x="1358378" y="5164585"/>
               <a:ext cx="163864" cy="105814"/>
             </a:xfrm>
             <a:prstGeom prst="rect">
@@ -11133,7 +12019,7 @@
           </p:nvSpPr>
           <p:spPr>
             <a:xfrm>
-              <a:off x="306818" y="1918887"/>
+              <a:off x="1358378" y="3493087"/>
               <a:ext cx="163864" cy="103872"/>
             </a:xfrm>
             <a:prstGeom prst="rect">
@@ -11179,7 +12065,7 @@
           </p:nvSpPr>
           <p:spPr>
             <a:xfrm>
-              <a:off x="503579" y="6095721"/>
+              <a:off x="1555139" y="8564443"/>
               <a:ext cx="41120" cy="0"/>
             </a:xfrm>
             <a:custGeom>
@@ -11219,7 +12105,7 @@
           </p:nvSpPr>
           <p:spPr>
             <a:xfrm>
-              <a:off x="503579" y="4720456"/>
+              <a:off x="1555139" y="6891003"/>
               <a:ext cx="41120" cy="0"/>
             </a:xfrm>
             <a:custGeom>
@@ -11259,7 +12145,7 @@
           </p:nvSpPr>
           <p:spPr>
             <a:xfrm>
-              <a:off x="503579" y="3345190"/>
+              <a:off x="1555139" y="5217564"/>
               <a:ext cx="41120" cy="0"/>
             </a:xfrm>
             <a:custGeom>
@@ -11299,7 +12185,7 @@
           </p:nvSpPr>
           <p:spPr>
             <a:xfrm>
-              <a:off x="503579" y="1969924"/>
+              <a:off x="1555139" y="3544124"/>
               <a:ext cx="41120" cy="0"/>
             </a:xfrm>
             <a:custGeom>
@@ -11339,15 +12225,15 @@
           </p:nvSpPr>
           <p:spPr>
             <a:xfrm>
-              <a:off x="8427377" y="1034744"/>
-              <a:ext cx="0" cy="5060977"/>
+              <a:off x="13319417" y="2406185"/>
+              <a:ext cx="0" cy="6158257"/>
             </a:xfrm>
             <a:custGeom>
               <a:avLst/>
               <a:pathLst>
-                <a:path w="0" h="5060977">
+                <a:path w="0" h="6158257">
                   <a:moveTo>
-                    <a:pt x="0" y="5060977"/>
+                    <a:pt x="0" y="6158257"/>
                   </a:moveTo>
                   <a:lnTo>
                     <a:pt x="0" y="0"/>
@@ -11379,7 +12265,7 @@
           </p:nvSpPr>
           <p:spPr>
             <a:xfrm>
-              <a:off x="8427377" y="6095721"/>
+              <a:off x="13319417" y="8564443"/>
               <a:ext cx="41120" cy="0"/>
             </a:xfrm>
             <a:custGeom>
@@ -11419,7 +12305,7 @@
           </p:nvSpPr>
           <p:spPr>
             <a:xfrm>
-              <a:off x="8427377" y="4689894"/>
+              <a:off x="13319417" y="6853816"/>
               <a:ext cx="41120" cy="0"/>
             </a:xfrm>
             <a:custGeom>
@@ -11459,7 +12345,7 @@
           </p:nvSpPr>
           <p:spPr>
             <a:xfrm>
-              <a:off x="8427377" y="3284067"/>
+              <a:off x="13319417" y="5143189"/>
               <a:ext cx="41120" cy="0"/>
             </a:xfrm>
             <a:custGeom>
@@ -11499,7 +12385,7 @@
           </p:nvSpPr>
           <p:spPr>
             <a:xfrm>
-              <a:off x="8427377" y="1878240"/>
+              <a:off x="13319417" y="3432561"/>
               <a:ext cx="41120" cy="0"/>
             </a:xfrm>
             <a:custGeom>
@@ -11539,7 +12425,7 @@
           </p:nvSpPr>
           <p:spPr>
             <a:xfrm>
-              <a:off x="8501395" y="6042742"/>
+              <a:off x="13393435" y="8511464"/>
               <a:ext cx="335786" cy="105814"/>
             </a:xfrm>
             <a:prstGeom prst="rect">
@@ -11585,7 +12471,7 @@
           </p:nvSpPr>
           <p:spPr>
             <a:xfrm>
-              <a:off x="8501395" y="4636627"/>
+              <a:off x="13393435" y="6800549"/>
               <a:ext cx="335786" cy="106102"/>
             </a:xfrm>
             <a:prstGeom prst="rect">
@@ -11631,7 +12517,7 @@
           </p:nvSpPr>
           <p:spPr>
             <a:xfrm>
-              <a:off x="8501395" y="3231088"/>
+              <a:off x="13393435" y="5090210"/>
               <a:ext cx="335786" cy="105814"/>
             </a:xfrm>
             <a:prstGeom prst="rect">
@@ -11677,7 +12563,7 @@
           </p:nvSpPr>
           <p:spPr>
             <a:xfrm>
-              <a:off x="8501395" y="1825764"/>
+              <a:off x="13393435" y="3380086"/>
               <a:ext cx="335786" cy="105310"/>
             </a:xfrm>
             <a:prstGeom prst="rect">
@@ -11723,18 +12609,18 @@
           </p:nvSpPr>
           <p:spPr>
             <a:xfrm>
-              <a:off x="544700" y="6095721"/>
-              <a:ext cx="7882677" cy="0"/>
+              <a:off x="1596260" y="8564443"/>
+              <a:ext cx="11723157" cy="0"/>
             </a:xfrm>
             <a:custGeom>
               <a:avLst/>
               <a:pathLst>
-                <a:path w="7882677" h="0">
+                <a:path w="11723157" h="0">
                   <a:moveTo>
                     <a:pt x="0" y="0"/>
                   </a:moveTo>
                   <a:lnTo>
-                    <a:pt x="7882677" y="0"/>
+                    <a:pt x="11723157" y="0"/>
                   </a:lnTo>
                 </a:path>
               </a:pathLst>
@@ -11763,7 +12649,7 @@
           </p:nvSpPr>
           <p:spPr>
             <a:xfrm>
-              <a:off x="725220" y="6095721"/>
+              <a:off x="1864730" y="8564443"/>
               <a:ext cx="0" cy="41120"/>
             </a:xfrm>
             <a:custGeom>
@@ -11803,7 +12689,7 @@
           </p:nvSpPr>
           <p:spPr>
             <a:xfrm>
-              <a:off x="1026085" y="6095721"/>
+              <a:off x="2312178" y="8564443"/>
               <a:ext cx="0" cy="41120"/>
             </a:xfrm>
             <a:custGeom>
@@ -11843,7 +12729,7 @@
           </p:nvSpPr>
           <p:spPr>
             <a:xfrm>
-              <a:off x="1326951" y="6095721"/>
+              <a:off x="2759627" y="8564443"/>
               <a:ext cx="0" cy="41120"/>
             </a:xfrm>
             <a:custGeom>
@@ -11883,7 +12769,7 @@
           </p:nvSpPr>
           <p:spPr>
             <a:xfrm>
-              <a:off x="1627816" y="6095721"/>
+              <a:off x="3207076" y="8564443"/>
               <a:ext cx="0" cy="41120"/>
             </a:xfrm>
             <a:custGeom>
@@ -11923,7 +12809,7 @@
           </p:nvSpPr>
           <p:spPr>
             <a:xfrm>
-              <a:off x="1928682" y="6095721"/>
+              <a:off x="3654525" y="8564443"/>
               <a:ext cx="0" cy="41120"/>
             </a:xfrm>
             <a:custGeom>
@@ -11963,7 +12849,7 @@
           </p:nvSpPr>
           <p:spPr>
             <a:xfrm>
-              <a:off x="2229547" y="6095721"/>
+              <a:off x="4101973" y="8564443"/>
               <a:ext cx="0" cy="41120"/>
             </a:xfrm>
             <a:custGeom>
@@ -12003,7 +12889,7 @@
           </p:nvSpPr>
           <p:spPr>
             <a:xfrm>
-              <a:off x="2530413" y="6095721"/>
+              <a:off x="4549422" y="8564443"/>
               <a:ext cx="0" cy="41120"/>
             </a:xfrm>
             <a:custGeom>
@@ -12043,7 +12929,7 @@
           </p:nvSpPr>
           <p:spPr>
             <a:xfrm>
-              <a:off x="2831278" y="6095721"/>
+              <a:off x="4996871" y="8564443"/>
               <a:ext cx="0" cy="41120"/>
             </a:xfrm>
             <a:custGeom>
@@ -12083,7 +12969,7 @@
           </p:nvSpPr>
           <p:spPr>
             <a:xfrm>
-              <a:off x="3132144" y="6095721"/>
+              <a:off x="5444319" y="8564443"/>
               <a:ext cx="0" cy="41120"/>
             </a:xfrm>
             <a:custGeom>
@@ -12123,7 +13009,7 @@
           </p:nvSpPr>
           <p:spPr>
             <a:xfrm>
-              <a:off x="3433009" y="6095721"/>
+              <a:off x="5891768" y="8564443"/>
               <a:ext cx="0" cy="41120"/>
             </a:xfrm>
             <a:custGeom>
@@ -12163,7 +13049,7 @@
           </p:nvSpPr>
           <p:spPr>
             <a:xfrm>
-              <a:off x="3733875" y="6095721"/>
+              <a:off x="6339217" y="8564443"/>
               <a:ext cx="0" cy="41120"/>
             </a:xfrm>
             <a:custGeom>
@@ -12203,7 +13089,7 @@
           </p:nvSpPr>
           <p:spPr>
             <a:xfrm>
-              <a:off x="4034741" y="6095721"/>
+              <a:off x="6786666" y="8564443"/>
               <a:ext cx="0" cy="41120"/>
             </a:xfrm>
             <a:custGeom>
@@ -12243,7 +13129,7 @@
           </p:nvSpPr>
           <p:spPr>
             <a:xfrm>
-              <a:off x="4335606" y="6095721"/>
+              <a:off x="7234114" y="8564443"/>
               <a:ext cx="0" cy="41120"/>
             </a:xfrm>
             <a:custGeom>
@@ -12283,7 +13169,7 @@
           </p:nvSpPr>
           <p:spPr>
             <a:xfrm>
-              <a:off x="4636472" y="6095721"/>
+              <a:off x="7681563" y="8564443"/>
               <a:ext cx="0" cy="41120"/>
             </a:xfrm>
             <a:custGeom>
@@ -12323,7 +13209,7 @@
           </p:nvSpPr>
           <p:spPr>
             <a:xfrm>
-              <a:off x="4937337" y="6095721"/>
+              <a:off x="8129012" y="8564443"/>
               <a:ext cx="0" cy="41120"/>
             </a:xfrm>
             <a:custGeom>
@@ -12363,7 +13249,7 @@
           </p:nvSpPr>
           <p:spPr>
             <a:xfrm>
-              <a:off x="5238203" y="6095721"/>
+              <a:off x="8576461" y="8564443"/>
               <a:ext cx="0" cy="41120"/>
             </a:xfrm>
             <a:custGeom>
@@ -12403,7 +13289,7 @@
           </p:nvSpPr>
           <p:spPr>
             <a:xfrm>
-              <a:off x="5539068" y="6095721"/>
+              <a:off x="9023909" y="8564443"/>
               <a:ext cx="0" cy="41120"/>
             </a:xfrm>
             <a:custGeom>
@@ -12443,7 +13329,7 @@
           </p:nvSpPr>
           <p:spPr>
             <a:xfrm>
-              <a:off x="5839934" y="6095721"/>
+              <a:off x="9471358" y="8564443"/>
               <a:ext cx="0" cy="41120"/>
             </a:xfrm>
             <a:custGeom>
@@ -12483,7 +13369,7 @@
           </p:nvSpPr>
           <p:spPr>
             <a:xfrm>
-              <a:off x="6140799" y="6095721"/>
+              <a:off x="9918807" y="8564443"/>
               <a:ext cx="0" cy="41120"/>
             </a:xfrm>
             <a:custGeom>
@@ -12523,7 +13409,7 @@
           </p:nvSpPr>
           <p:spPr>
             <a:xfrm>
-              <a:off x="6441665" y="6095721"/>
+              <a:off x="10366256" y="8564443"/>
               <a:ext cx="0" cy="41120"/>
             </a:xfrm>
             <a:custGeom>
@@ -12563,7 +13449,7 @@
           </p:nvSpPr>
           <p:spPr>
             <a:xfrm>
-              <a:off x="6742530" y="6095721"/>
+              <a:off x="10813704" y="8564443"/>
               <a:ext cx="0" cy="41120"/>
             </a:xfrm>
             <a:custGeom>
@@ -12603,7 +13489,7 @@
           </p:nvSpPr>
           <p:spPr>
             <a:xfrm>
-              <a:off x="7043396" y="6095721"/>
+              <a:off x="11261153" y="8564443"/>
               <a:ext cx="0" cy="41120"/>
             </a:xfrm>
             <a:custGeom>
@@ -12643,7 +13529,7 @@
           </p:nvSpPr>
           <p:spPr>
             <a:xfrm>
-              <a:off x="7344261" y="6095721"/>
+              <a:off x="11708602" y="8564443"/>
               <a:ext cx="0" cy="41120"/>
             </a:xfrm>
             <a:custGeom>
@@ -12683,7 +13569,7 @@
           </p:nvSpPr>
           <p:spPr>
             <a:xfrm>
-              <a:off x="7645127" y="6095721"/>
+              <a:off x="12156051" y="8564443"/>
               <a:ext cx="0" cy="41120"/>
             </a:xfrm>
             <a:custGeom>
@@ -12723,7 +13609,7 @@
           </p:nvSpPr>
           <p:spPr>
             <a:xfrm>
-              <a:off x="7945993" y="6095721"/>
+              <a:off x="12603499" y="8564443"/>
               <a:ext cx="0" cy="41120"/>
             </a:xfrm>
             <a:custGeom>
@@ -12763,7 +13649,7 @@
           </p:nvSpPr>
           <p:spPr>
             <a:xfrm>
-              <a:off x="8246858" y="6095721"/>
+              <a:off x="13050948" y="8564443"/>
               <a:ext cx="0" cy="41120"/>
             </a:xfrm>
             <a:custGeom>
@@ -12803,7 +13689,7 @@
           </p:nvSpPr>
           <p:spPr>
             <a:xfrm rot="-2100000">
-              <a:off x="461905" y="6252267"/>
+              <a:off x="1601415" y="8720988"/>
               <a:ext cx="322078" cy="104343"/>
             </a:xfrm>
             <a:prstGeom prst="rect">
@@ -12849,7 +13735,7 @@
           </p:nvSpPr>
           <p:spPr>
             <a:xfrm rot="-2100000">
-              <a:off x="762770" y="6252267"/>
+              <a:off x="2048864" y="8720988"/>
               <a:ext cx="322078" cy="104343"/>
             </a:xfrm>
             <a:prstGeom prst="rect">
@@ -12895,7 +13781,7 @@
           </p:nvSpPr>
           <p:spPr>
             <a:xfrm rot="-2100000">
-              <a:off x="1063636" y="6252267"/>
+              <a:off x="2496312" y="8720988"/>
               <a:ext cx="322078" cy="104343"/>
             </a:xfrm>
             <a:prstGeom prst="rect">
@@ -12941,7 +13827,7 @@
           </p:nvSpPr>
           <p:spPr>
             <a:xfrm rot="-2100000">
-              <a:off x="1364502" y="6252267"/>
+              <a:off x="2943761" y="8720988"/>
               <a:ext cx="322078" cy="104343"/>
             </a:xfrm>
             <a:prstGeom prst="rect">
@@ -12987,7 +13873,7 @@
           </p:nvSpPr>
           <p:spPr>
             <a:xfrm rot="-2100000">
-              <a:off x="1665367" y="6252267"/>
+              <a:off x="3391210" y="8720988"/>
               <a:ext cx="322078" cy="104343"/>
             </a:xfrm>
             <a:prstGeom prst="rect">
@@ -13033,7 +13919,7 @@
           </p:nvSpPr>
           <p:spPr>
             <a:xfrm rot="-2100000">
-              <a:off x="1966233" y="6252267"/>
+              <a:off x="3838659" y="8720988"/>
               <a:ext cx="322078" cy="104343"/>
             </a:xfrm>
             <a:prstGeom prst="rect">
@@ -13079,7 +13965,7 @@
           </p:nvSpPr>
           <p:spPr>
             <a:xfrm rot="-2100000">
-              <a:off x="2267078" y="6252203"/>
+              <a:off x="4286087" y="8720924"/>
               <a:ext cx="322078" cy="104414"/>
             </a:xfrm>
             <a:prstGeom prst="rect">
@@ -13125,7 +14011,7 @@
           </p:nvSpPr>
           <p:spPr>
             <a:xfrm rot="-2100000">
-              <a:off x="2567964" y="6252267"/>
+              <a:off x="4733556" y="8720988"/>
               <a:ext cx="322078" cy="104343"/>
             </a:xfrm>
             <a:prstGeom prst="rect">
@@ -13171,7 +14057,7 @@
           </p:nvSpPr>
           <p:spPr>
             <a:xfrm rot="-2100000">
-              <a:off x="2868789" y="6252138"/>
+              <a:off x="5180964" y="8720860"/>
               <a:ext cx="322078" cy="104484"/>
             </a:xfrm>
             <a:prstGeom prst="rect">
@@ -13217,7 +14103,7 @@
           </p:nvSpPr>
           <p:spPr>
             <a:xfrm rot="-2100000">
-              <a:off x="3169675" y="6252203"/>
+              <a:off x="5628433" y="8720924"/>
               <a:ext cx="322078" cy="104414"/>
             </a:xfrm>
             <a:prstGeom prst="rect">
@@ -13263,7 +14149,7 @@
           </p:nvSpPr>
           <p:spPr>
             <a:xfrm rot="-2100000">
-              <a:off x="3470560" y="6252267"/>
+              <a:off x="6075902" y="8720988"/>
               <a:ext cx="322078" cy="104343"/>
             </a:xfrm>
             <a:prstGeom prst="rect">
@@ -13309,7 +14195,7 @@
           </p:nvSpPr>
           <p:spPr>
             <a:xfrm rot="-2100000">
-              <a:off x="3771426" y="6252267"/>
+              <a:off x="6523351" y="8720988"/>
               <a:ext cx="322078" cy="104343"/>
             </a:xfrm>
             <a:prstGeom prst="rect">
@@ -13355,7 +14241,7 @@
           </p:nvSpPr>
           <p:spPr>
             <a:xfrm rot="-2100000">
-              <a:off x="4072291" y="6252267"/>
+              <a:off x="6970800" y="8720988"/>
               <a:ext cx="322078" cy="104343"/>
             </a:xfrm>
             <a:prstGeom prst="rect">
@@ -13401,7 +14287,7 @@
           </p:nvSpPr>
           <p:spPr>
             <a:xfrm rot="-2100000">
-              <a:off x="4373157" y="6252267"/>
+              <a:off x="7418249" y="8720988"/>
               <a:ext cx="322078" cy="104343"/>
             </a:xfrm>
             <a:prstGeom prst="rect">
@@ -13447,7 +14333,7 @@
           </p:nvSpPr>
           <p:spPr>
             <a:xfrm rot="-2100000">
-              <a:off x="4674023" y="6252267"/>
+              <a:off x="7865697" y="8720988"/>
               <a:ext cx="322078" cy="104343"/>
             </a:xfrm>
             <a:prstGeom prst="rect">
@@ -13493,7 +14379,7 @@
           </p:nvSpPr>
           <p:spPr>
             <a:xfrm rot="-2100000">
-              <a:off x="4974888" y="6252267"/>
+              <a:off x="8313146" y="8720988"/>
               <a:ext cx="322078" cy="104343"/>
             </a:xfrm>
             <a:prstGeom prst="rect">
@@ -13539,7 +14425,7 @@
           </p:nvSpPr>
           <p:spPr>
             <a:xfrm rot="-2100000">
-              <a:off x="5275733" y="6252203"/>
+              <a:off x="8760575" y="8720924"/>
               <a:ext cx="322078" cy="104414"/>
             </a:xfrm>
             <a:prstGeom prst="rect">
@@ -13585,7 +14471,7 @@
           </p:nvSpPr>
           <p:spPr>
             <a:xfrm rot="-2100000">
-              <a:off x="5576619" y="6252267"/>
+              <a:off x="9208044" y="8720988"/>
               <a:ext cx="322078" cy="104343"/>
             </a:xfrm>
             <a:prstGeom prst="rect">
@@ -13631,7 +14517,7 @@
           </p:nvSpPr>
           <p:spPr>
             <a:xfrm rot="-2100000">
-              <a:off x="5877444" y="6252138"/>
+              <a:off x="9655452" y="8720860"/>
               <a:ext cx="322078" cy="104484"/>
             </a:xfrm>
             <a:prstGeom prst="rect">
@@ -13677,7 +14563,7 @@
           </p:nvSpPr>
           <p:spPr>
             <a:xfrm rot="-2100000">
-              <a:off x="6178330" y="6252203"/>
+              <a:off x="10102921" y="8720924"/>
               <a:ext cx="322078" cy="104414"/>
             </a:xfrm>
             <a:prstGeom prst="rect">
@@ -13723,7 +14609,7 @@
           </p:nvSpPr>
           <p:spPr>
             <a:xfrm rot="-2100000">
-              <a:off x="6479216" y="6252267"/>
+              <a:off x="10550390" y="8720988"/>
               <a:ext cx="322078" cy="104343"/>
             </a:xfrm>
             <a:prstGeom prst="rect">
@@ -13769,7 +14655,7 @@
           </p:nvSpPr>
           <p:spPr>
             <a:xfrm rot="-2100000">
-              <a:off x="6780081" y="6252267"/>
+              <a:off x="10997839" y="8720988"/>
               <a:ext cx="322078" cy="104343"/>
             </a:xfrm>
             <a:prstGeom prst="rect">
@@ -13815,7 +14701,7 @@
           </p:nvSpPr>
           <p:spPr>
             <a:xfrm rot="-2100000">
-              <a:off x="7080947" y="6252267"/>
+              <a:off x="11445287" y="8720988"/>
               <a:ext cx="322078" cy="104343"/>
             </a:xfrm>
             <a:prstGeom prst="rect">
@@ -13861,7 +14747,7 @@
           </p:nvSpPr>
           <p:spPr>
             <a:xfrm rot="-2100000">
-              <a:off x="7381812" y="6252267"/>
+              <a:off x="11892736" y="8720988"/>
               <a:ext cx="322078" cy="104343"/>
             </a:xfrm>
             <a:prstGeom prst="rect">
@@ -13907,7 +14793,7 @@
           </p:nvSpPr>
           <p:spPr>
             <a:xfrm rot="-2100000">
-              <a:off x="7682678" y="6252267"/>
+              <a:off x="12340185" y="8720988"/>
               <a:ext cx="322078" cy="104343"/>
             </a:xfrm>
             <a:prstGeom prst="rect">
@@ -13953,7 +14839,7 @@
           </p:nvSpPr>
           <p:spPr>
             <a:xfrm rot="-2100000">
-              <a:off x="7983543" y="6252267"/>
+              <a:off x="12787634" y="8720988"/>
               <a:ext cx="322078" cy="104343"/>
             </a:xfrm>
             <a:prstGeom prst="rect">
@@ -13999,7 +14885,7 @@
           </p:nvSpPr>
           <p:spPr>
             <a:xfrm>
-              <a:off x="4300938" y="6589050"/>
+              <a:off x="7272738" y="9057771"/>
               <a:ext cx="370202" cy="128963"/>
             </a:xfrm>
             <a:prstGeom prst="rect">
@@ -14045,7 +14931,7 @@
           </p:nvSpPr>
           <p:spPr>
             <a:xfrm rot="-5400000">
-              <a:off x="-749321" y="3499724"/>
+              <a:off x="302238" y="5419806"/>
               <a:ext cx="1821488" cy="131017"/>
             </a:xfrm>
             <a:prstGeom prst="rect">
@@ -14091,7 +14977,7 @@
           </p:nvSpPr>
           <p:spPr>
             <a:xfrm rot="5400000">
-              <a:off x="8551101" y="3482994"/>
+              <a:off x="13443141" y="5403075"/>
               <a:ext cx="896410" cy="164477"/>
             </a:xfrm>
             <a:prstGeom prst="rect">
@@ -14137,7 +15023,7 @@
           </p:nvSpPr>
           <p:spPr>
             <a:xfrm>
-              <a:off x="774180" y="126525"/>
+              <a:off x="3745980" y="1497967"/>
               <a:ext cx="7423718" cy="743735"/>
             </a:xfrm>
             <a:prstGeom prst="rect">
@@ -14163,8 +15049,8 @@
           </p:nvSpPr>
           <p:spPr>
             <a:xfrm>
-              <a:off x="856421" y="208767"/>
-              <a:ext cx="306000" cy="138256"/>
+              <a:off x="3828221" y="1580208"/>
+              <a:ext cx="305999" cy="138256"/>
             </a:xfrm>
             <a:prstGeom prst="rect">
               <a:avLst/>
@@ -14189,7 +15075,7 @@
           </p:nvSpPr>
           <p:spPr>
             <a:xfrm>
-              <a:off x="867058" y="219403"/>
+              <a:off x="3838858" y="1590844"/>
               <a:ext cx="284727" cy="116983"/>
             </a:xfrm>
             <a:prstGeom prst="rect">
@@ -14215,8 +15101,8 @@
           </p:nvSpPr>
           <p:spPr>
             <a:xfrm>
-              <a:off x="2685802" y="208767"/>
-              <a:ext cx="306000" cy="138256"/>
+              <a:off x="5657602" y="1580208"/>
+              <a:ext cx="305999" cy="138256"/>
             </a:xfrm>
             <a:prstGeom prst="rect">
               <a:avLst/>
@@ -14241,7 +15127,7 @@
           </p:nvSpPr>
           <p:spPr>
             <a:xfrm>
-              <a:off x="2696438" y="219403"/>
+              <a:off x="5668238" y="1590844"/>
               <a:ext cx="284727" cy="116983"/>
             </a:xfrm>
             <a:prstGeom prst="rect">
@@ -14267,7 +15153,7 @@
           </p:nvSpPr>
           <p:spPr>
             <a:xfrm>
-              <a:off x="4596827" y="208767"/>
+              <a:off x="7568627" y="1580208"/>
               <a:ext cx="305999" cy="138256"/>
             </a:xfrm>
             <a:prstGeom prst="rect">
@@ -14293,7 +15179,7 @@
           </p:nvSpPr>
           <p:spPr>
             <a:xfrm>
-              <a:off x="4607464" y="219403"/>
+              <a:off x="7579264" y="1590844"/>
               <a:ext cx="284727" cy="116983"/>
             </a:xfrm>
             <a:prstGeom prst="rect">
@@ -14319,8 +15205,8 @@
           </p:nvSpPr>
           <p:spPr>
             <a:xfrm>
-              <a:off x="6368733" y="208767"/>
-              <a:ext cx="306000" cy="138256"/>
+              <a:off x="9340533" y="1580208"/>
+              <a:ext cx="305999" cy="138256"/>
             </a:xfrm>
             <a:prstGeom prst="rect">
               <a:avLst/>
@@ -14345,7 +15231,7 @@
           </p:nvSpPr>
           <p:spPr>
             <a:xfrm>
-              <a:off x="6379369" y="219403"/>
+              <a:off x="9351169" y="1590844"/>
               <a:ext cx="284727" cy="116983"/>
             </a:xfrm>
             <a:prstGeom prst="rect">
@@ -14371,8 +15257,8 @@
           </p:nvSpPr>
           <p:spPr>
             <a:xfrm>
-              <a:off x="856421" y="429265"/>
-              <a:ext cx="306000" cy="138256"/>
+              <a:off x="3828221" y="1800706"/>
+              <a:ext cx="305999" cy="138256"/>
             </a:xfrm>
             <a:prstGeom prst="rect">
               <a:avLst/>
@@ -14397,7 +15283,7 @@
           </p:nvSpPr>
           <p:spPr>
             <a:xfrm>
-              <a:off x="867058" y="439901"/>
+              <a:off x="3838858" y="1811342"/>
               <a:ext cx="284727" cy="116983"/>
             </a:xfrm>
             <a:prstGeom prst="rect">
@@ -14423,8 +15309,8 @@
           </p:nvSpPr>
           <p:spPr>
             <a:xfrm>
-              <a:off x="2685802" y="429265"/>
-              <a:ext cx="306000" cy="138256"/>
+              <a:off x="5657602" y="1800706"/>
+              <a:ext cx="305999" cy="138256"/>
             </a:xfrm>
             <a:prstGeom prst="rect">
               <a:avLst/>
@@ -14449,7 +15335,7 @@
           </p:nvSpPr>
           <p:spPr>
             <a:xfrm>
-              <a:off x="2696438" y="439901"/>
+              <a:off x="5668238" y="1811342"/>
               <a:ext cx="284727" cy="116983"/>
             </a:xfrm>
             <a:prstGeom prst="rect">
@@ -14475,7 +15361,7 @@
           </p:nvSpPr>
           <p:spPr>
             <a:xfrm>
-              <a:off x="4596827" y="429265"/>
+              <a:off x="7568627" y="1800706"/>
               <a:ext cx="305999" cy="138256"/>
             </a:xfrm>
             <a:prstGeom prst="rect">
@@ -14501,7 +15387,7 @@
           </p:nvSpPr>
           <p:spPr>
             <a:xfrm>
-              <a:off x="4607464" y="439901"/>
+              <a:off x="7579264" y="1811342"/>
               <a:ext cx="284727" cy="116983"/>
             </a:xfrm>
             <a:prstGeom prst="rect">
@@ -14527,8 +15413,8 @@
           </p:nvSpPr>
           <p:spPr>
             <a:xfrm>
-              <a:off x="6368733" y="429265"/>
-              <a:ext cx="306000" cy="138256"/>
+              <a:off x="9340533" y="1800706"/>
+              <a:ext cx="305999" cy="138256"/>
             </a:xfrm>
             <a:prstGeom prst="rect">
               <a:avLst/>
@@ -14553,7 +15439,7 @@
           </p:nvSpPr>
           <p:spPr>
             <a:xfrm>
-              <a:off x="6379369" y="439901"/>
+              <a:off x="9351169" y="1811342"/>
               <a:ext cx="284727" cy="116983"/>
             </a:xfrm>
             <a:prstGeom prst="rect">
@@ -14579,8 +15465,8 @@
           </p:nvSpPr>
           <p:spPr>
             <a:xfrm>
-              <a:off x="856421" y="649763"/>
-              <a:ext cx="306000" cy="138256"/>
+              <a:off x="3828221" y="2021204"/>
+              <a:ext cx="305999" cy="138256"/>
             </a:xfrm>
             <a:prstGeom prst="rect">
               <a:avLst/>
@@ -14605,7 +15491,7 @@
           </p:nvSpPr>
           <p:spPr>
             <a:xfrm>
-              <a:off x="867058" y="660399"/>
+              <a:off x="3838858" y="2031840"/>
               <a:ext cx="284727" cy="116983"/>
             </a:xfrm>
             <a:prstGeom prst="rect">
@@ -14631,8 +15517,8 @@
           </p:nvSpPr>
           <p:spPr>
             <a:xfrm>
-              <a:off x="2685802" y="649763"/>
-              <a:ext cx="306000" cy="138256"/>
+              <a:off x="5657602" y="2021204"/>
+              <a:ext cx="305999" cy="138256"/>
             </a:xfrm>
             <a:prstGeom prst="rect">
               <a:avLst/>
@@ -14657,7 +15543,7 @@
           </p:nvSpPr>
           <p:spPr>
             <a:xfrm>
-              <a:off x="2696438" y="660399"/>
+              <a:off x="5668238" y="2031840"/>
               <a:ext cx="284727" cy="116983"/>
             </a:xfrm>
             <a:prstGeom prst="rect">
@@ -14683,7 +15569,7 @@
           </p:nvSpPr>
           <p:spPr>
             <a:xfrm>
-              <a:off x="4596827" y="649763"/>
+              <a:off x="7568627" y="2021204"/>
               <a:ext cx="305999" cy="138256"/>
             </a:xfrm>
             <a:prstGeom prst="rect">
@@ -14709,7 +15595,7 @@
           </p:nvSpPr>
           <p:spPr>
             <a:xfrm>
-              <a:off x="4607464" y="660399"/>
+              <a:off x="7579264" y="2031840"/>
               <a:ext cx="284727" cy="116983"/>
             </a:xfrm>
             <a:prstGeom prst="rect">
@@ -14735,7 +15621,7 @@
           </p:nvSpPr>
           <p:spPr>
             <a:xfrm>
-              <a:off x="1244663" y="219089"/>
+              <a:off x="4216463" y="1590531"/>
               <a:ext cx="1268836" cy="111640"/>
             </a:xfrm>
             <a:prstGeom prst="rect">
@@ -14781,7 +15667,7 @@
           </p:nvSpPr>
           <p:spPr>
             <a:xfrm>
-              <a:off x="3074044" y="219089"/>
+              <a:off x="6045844" y="1590531"/>
               <a:ext cx="1440542" cy="111640"/>
             </a:xfrm>
             <a:prstGeom prst="rect">
@@ -14827,7 +15713,7 @@
           </p:nvSpPr>
           <p:spPr>
             <a:xfrm>
-              <a:off x="4985069" y="219089"/>
+              <a:off x="7956869" y="1590531"/>
               <a:ext cx="1178703" cy="111640"/>
             </a:xfrm>
             <a:prstGeom prst="rect">
@@ -14873,7 +15759,7 @@
           </p:nvSpPr>
           <p:spPr>
             <a:xfrm>
-              <a:off x="6756975" y="219089"/>
+              <a:off x="9728775" y="1590531"/>
               <a:ext cx="1358681" cy="111640"/>
             </a:xfrm>
             <a:prstGeom prst="rect">
@@ -14919,7 +15805,7 @@
           </p:nvSpPr>
           <p:spPr>
             <a:xfrm>
-              <a:off x="1244663" y="439587"/>
+              <a:off x="4216463" y="1811029"/>
               <a:ext cx="1358897" cy="111640"/>
             </a:xfrm>
             <a:prstGeom prst="rect">
@@ -14965,7 +15851,7 @@
           </p:nvSpPr>
           <p:spPr>
             <a:xfrm>
-              <a:off x="3074044" y="439587"/>
+              <a:off x="6045844" y="1811029"/>
               <a:ext cx="998510" cy="111640"/>
             </a:xfrm>
             <a:prstGeom prst="rect">
@@ -15011,7 +15897,7 @@
           </p:nvSpPr>
           <p:spPr>
             <a:xfrm>
-              <a:off x="4985069" y="439587"/>
+              <a:off x="7956869" y="1811029"/>
               <a:ext cx="1301422" cy="111640"/>
             </a:xfrm>
             <a:prstGeom prst="rect">
@@ -15057,7 +15943,7 @@
           </p:nvSpPr>
           <p:spPr>
             <a:xfrm>
-              <a:off x="6756975" y="439587"/>
+              <a:off x="9728775" y="1811029"/>
               <a:ext cx="1121300" cy="111640"/>
             </a:xfrm>
             <a:prstGeom prst="rect">
@@ -15103,7 +15989,7 @@
           </p:nvSpPr>
           <p:spPr>
             <a:xfrm>
-              <a:off x="1244663" y="660085"/>
+              <a:off x="4216463" y="2031527"/>
               <a:ext cx="1244091" cy="111640"/>
             </a:xfrm>
             <a:prstGeom prst="rect">
@@ -15149,7 +16035,7 @@
           </p:nvSpPr>
           <p:spPr>
             <a:xfrm>
-              <a:off x="3074044" y="660085"/>
+              <a:off x="6045844" y="2031527"/>
               <a:ext cx="957723" cy="111640"/>
             </a:xfrm>
             <a:prstGeom prst="rect">
@@ -15195,7 +16081,7 @@
           </p:nvSpPr>
           <p:spPr>
             <a:xfrm>
-              <a:off x="4985069" y="660085"/>
+              <a:off x="7956869" y="2031527"/>
               <a:ext cx="613881" cy="111640"/>
             </a:xfrm>
             <a:prstGeom prst="rect">
@@ -15240,12 +16126,6 @@
     <a:masterClrMapping/>
   </p:clrMapOvr>
 </p:sld>
-</file>
-
-<file path=ppt/tags/tag1.xml><?xml version="1.0" encoding="utf-8"?>
-<p:tagLst xmlns:a="http://schemas.openxmlformats.org/drawingml/2006/main" xmlns:r="http://schemas.openxmlformats.org/officeDocument/2006/relationships" xmlns:p="http://schemas.openxmlformats.org/presentationml/2006/main">
-  <p:tag name="_AMO_UNIQUEIDENTIFIER" val="Empty"/>
-</p:tagLst>
 </file>
 
 <file path=ppt/theme/theme1.xml><?xml version="1.0" encoding="utf-8"?>
